--- a/output/wordlabs-flex-3day.pptx
+++ b/output/wordlabs-flex-3day.pptx
@@ -5622,7 +5622,7 @@
                 <a:ea typeface="Trebuchet MS" pitchFamily="34" charset="-122"/>
                 <a:cs typeface="Trebuchet MS" pitchFamily="34" charset="-120"/>
               </a:rPr>
-              <a:t>1</a:t>
+              <a:t>0</a:t>
             </a:r>
             <a:pPr algn="ctr" indent="0" marL="0">
               <a:buNone/>
@@ -6040,7 +6040,7 @@
                 <a:ea typeface="Calibri" pitchFamily="34" charset="-122"/>
                 <a:cs typeface="Calibri" pitchFamily="34" charset="-120"/>
               </a:rPr>
-              <a:t>A </a:t>
+              <a:t>The </a:t>
             </a:r>
             <a:pPr algn="l" indent="0" marL="0">
               <a:buNone/>
@@ -6071,7 +6071,7 @@
                 <a:ea typeface="Calibri" pitchFamily="34" charset="-122"/>
                 <a:cs typeface="Calibri" pitchFamily="34" charset="-120"/>
               </a:rPr>
-              <a:t> dancer can bend and stretch in ways that seem almost impossible, and her </a:t>
+              <a:t> gymnast showed an incredible </a:t>
             </a:r>
             <a:pPr algn="l" indent="0" marL="0">
               <a:buNone/>
@@ -6088,7 +6088,7 @@
                 <a:ea typeface="Calibri" pitchFamily="34" charset="-122"/>
                 <a:cs typeface="Calibri" pitchFamily="34" charset="-120"/>
               </a:rPr>
-              <a:t>reflexes</a:t>
+              <a:t>reflex</a:t>
             </a:r>
             <a:pPr algn="l" indent="0" marL="0">
               <a:buNone/>
@@ -6102,7 +6102,7 @@
                 <a:ea typeface="Calibri" pitchFamily="34" charset="-122"/>
                 <a:cs typeface="Calibri" pitchFamily="34" charset="-120"/>
               </a:rPr>
-              <a:t> help her react quickly to the music.</a:t>
+              <a:t> when she caught the falling ribbon.</a:t>
             </a:r>
             <a:endParaRPr lang="en-US" sz="1800" dirty="0"/>
           </a:p>
@@ -6385,7 +6385,7 @@
                 <a:ea typeface="Trebuchet MS" pitchFamily="34" charset="-122"/>
                 <a:cs typeface="Trebuchet MS" pitchFamily="34" charset="-120"/>
               </a:rPr>
-              <a:t>reflexes</a:t>
+              <a:t>reflex</a:t>
             </a:r>
             <a:endParaRPr lang="en-US" sz="1400" dirty="0"/>
           </a:p>
@@ -10655,7 +10655,7 @@
         </p:nvSpPr>
         <p:spPr>
           <a:xfrm>
-            <a:off x="2124837" y="4169664"/>
+            <a:off x="2427732" y="4169664"/>
             <a:ext cx="685800" cy="384048"/>
           </a:xfrm>
           <a:prstGeom prst="rect">
@@ -10682,7 +10682,7 @@
         </p:nvSpPr>
         <p:spPr>
           <a:xfrm>
-            <a:off x="2124837" y="4169664"/>
+            <a:off x="2427732" y="4169664"/>
             <a:ext cx="685800" cy="384048"/>
           </a:xfrm>
           <a:prstGeom prst="rect">
@@ -10707,7 +10707,7 @@
                 <a:ea typeface="Trebuchet MS" pitchFamily="34" charset="-122"/>
                 <a:cs typeface="Trebuchet MS" pitchFamily="34" charset="-120"/>
               </a:rPr>
-              <a:t>f</a:t>
+              <a:t>fl</a:t>
             </a:r>
             <a:endParaRPr lang="en-US" sz="900" dirty="0"/>
           </a:p>
@@ -10721,7 +10721,7 @@
         </p:nvSpPr>
         <p:spPr>
           <a:xfrm>
-            <a:off x="3033522" y="4169664"/>
+            <a:off x="3639312" y="4169664"/>
             <a:ext cx="685800" cy="384048"/>
           </a:xfrm>
           <a:prstGeom prst="rect">
@@ -10748,7 +10748,7 @@
         </p:nvSpPr>
         <p:spPr>
           <a:xfrm>
-            <a:off x="3033522" y="4169664"/>
+            <a:off x="3639312" y="4169664"/>
             <a:ext cx="685800" cy="384048"/>
           </a:xfrm>
           <a:prstGeom prst="rect">
@@ -10773,7 +10773,7 @@
                 <a:ea typeface="Trebuchet MS" pitchFamily="34" charset="-122"/>
                 <a:cs typeface="Trebuchet MS" pitchFamily="34" charset="-120"/>
               </a:rPr>
-              <a:t>l</a:t>
+              <a:t>e</a:t>
             </a:r>
             <a:endParaRPr lang="en-US" sz="900" dirty="0"/>
           </a:p>
@@ -10787,7 +10787,7 @@
         </p:nvSpPr>
         <p:spPr>
           <a:xfrm>
-            <a:off x="3942207" y="4169664"/>
+            <a:off x="4850892" y="4169664"/>
             <a:ext cx="685800" cy="384048"/>
           </a:xfrm>
           <a:prstGeom prst="rect">
@@ -10814,7 +10814,7 @@
         </p:nvSpPr>
         <p:spPr>
           <a:xfrm>
-            <a:off x="3942207" y="4169664"/>
+            <a:off x="4850892" y="4169664"/>
             <a:ext cx="685800" cy="384048"/>
           </a:xfrm>
           <a:prstGeom prst="rect">
@@ -10839,7 +10839,7 @@
                 <a:ea typeface="Trebuchet MS" pitchFamily="34" charset="-122"/>
                 <a:cs typeface="Trebuchet MS" pitchFamily="34" charset="-120"/>
               </a:rPr>
-              <a:t>e</a:t>
+              <a:t>x</a:t>
             </a:r>
             <a:endParaRPr lang="en-US" sz="900" dirty="0"/>
           </a:p>
@@ -10847,13 +10847,52 @@
       </p:sp>
       <p:sp>
         <p:nvSpPr>
-          <p:cNvPr id="42" name="Shape 40"/>
-          <p:cNvSpPr/>
-          <p:nvPr/>
-        </p:nvSpPr>
-        <p:spPr>
-          <a:xfrm>
-            <a:off x="4850892" y="4169664"/>
+          <p:cNvPr id="42" name="Text 40"/>
+          <p:cNvSpPr/>
+          <p:nvPr/>
+        </p:nvSpPr>
+        <p:spPr>
+          <a:xfrm>
+            <a:off x="4850892" y="4572000"/>
+            <a:ext cx="685800" cy="219456"/>
+          </a:xfrm>
+          <a:prstGeom prst="rect">
+            <a:avLst/>
+          </a:prstGeom>
+          <a:noFill/>
+          <a:ln/>
+        </p:spPr>
+        <p:txBody>
+          <a:bodyPr wrap="square" lIns="0" tIns="0" rIns="0" bIns="0" rtlCol="0" anchor="t"/>
+          <a:lstStyle/>
+          <a:p>
+            <a:pPr algn="ctr" indent="0" marL="0">
+              <a:buNone/>
+            </a:pPr>
+            <a:r>
+              <a:rPr lang="en-US" sz="750" i="1" dirty="0">
+                <a:solidFill>
+                  <a:srgbClr val="94A3B8"/>
+                </a:solidFill>
+                <a:latin typeface="Calibri" pitchFamily="34" charset="0"/>
+                <a:ea typeface="Calibri" pitchFamily="34" charset="-122"/>
+                <a:cs typeface="Calibri" pitchFamily="34" charset="-120"/>
+              </a:rPr>
+              <a:t>/ks/</a:t>
+            </a:r>
+            <a:endParaRPr lang="en-US" sz="750" dirty="0"/>
+          </a:p>
+        </p:txBody>
+      </p:sp>
+      <p:sp>
+        <p:nvSpPr>
+          <p:cNvPr id="43" name="Shape 41"/>
+          <p:cNvSpPr/>
+          <p:nvPr/>
+        </p:nvSpPr>
+        <p:spPr>
+          <a:xfrm>
+            <a:off x="6062472" y="4169664"/>
             <a:ext cx="685800" cy="384048"/>
           </a:xfrm>
           <a:prstGeom prst="rect">
@@ -10874,13 +10913,13 @@
       </p:sp>
       <p:sp>
         <p:nvSpPr>
-          <p:cNvPr id="43" name="Text 41"/>
-          <p:cNvSpPr/>
-          <p:nvPr/>
-        </p:nvSpPr>
-        <p:spPr>
-          <a:xfrm>
-            <a:off x="4850892" y="4169664"/>
+          <p:cNvPr id="44" name="Text 42"/>
+          <p:cNvSpPr/>
+          <p:nvPr/>
+        </p:nvSpPr>
+        <p:spPr>
+          <a:xfrm>
+            <a:off x="6062472" y="4169664"/>
             <a:ext cx="685800" cy="384048"/>
           </a:xfrm>
           <a:prstGeom prst="rect">
@@ -10905,7 +10944,7 @@
                 <a:ea typeface="Trebuchet MS" pitchFamily="34" charset="-122"/>
                 <a:cs typeface="Trebuchet MS" pitchFamily="34" charset="-120"/>
               </a:rPr>
-              <a:t>x</a:t>
+              <a:t>i</a:t>
             </a:r>
             <a:endParaRPr lang="en-US" sz="900" dirty="0"/>
           </a:p>
@@ -10913,52 +10952,13 @@
       </p:sp>
       <p:sp>
         <p:nvSpPr>
-          <p:cNvPr id="44" name="Text 42"/>
-          <p:cNvSpPr/>
-          <p:nvPr/>
-        </p:nvSpPr>
-        <p:spPr>
-          <a:xfrm>
-            <a:off x="4850892" y="4572000"/>
-            <a:ext cx="685800" cy="219456"/>
-          </a:xfrm>
-          <a:prstGeom prst="rect">
-            <a:avLst/>
-          </a:prstGeom>
-          <a:noFill/>
-          <a:ln/>
-        </p:spPr>
-        <p:txBody>
-          <a:bodyPr wrap="square" lIns="0" tIns="0" rIns="0" bIns="0" rtlCol="0" anchor="t"/>
-          <a:lstStyle/>
-          <a:p>
-            <a:pPr algn="ctr" indent="0" marL="0">
-              <a:buNone/>
-            </a:pPr>
-            <a:r>
-              <a:rPr lang="en-US" sz="750" i="1" dirty="0">
-                <a:solidFill>
-                  <a:srgbClr val="94A3B8"/>
-                </a:solidFill>
-                <a:latin typeface="Calibri" pitchFamily="34" charset="0"/>
-                <a:ea typeface="Calibri" pitchFamily="34" charset="-122"/>
-                <a:cs typeface="Calibri" pitchFamily="34" charset="-120"/>
-              </a:rPr>
-              <a:t>/ks/</a:t>
-            </a:r>
-            <a:endParaRPr lang="en-US" sz="750" dirty="0"/>
-          </a:p>
-        </p:txBody>
-      </p:sp>
-      <p:sp>
-        <p:nvSpPr>
           <p:cNvPr id="45" name="Shape 43"/>
           <p:cNvSpPr/>
           <p:nvPr/>
         </p:nvSpPr>
         <p:spPr>
           <a:xfrm>
-            <a:off x="5759577" y="4169664"/>
+            <a:off x="7274052" y="4169664"/>
             <a:ext cx="685800" cy="384048"/>
           </a:xfrm>
           <a:prstGeom prst="rect">
@@ -10985,7 +10985,7 @@
         </p:nvSpPr>
         <p:spPr>
           <a:xfrm>
-            <a:off x="5759577" y="4169664"/>
+            <a:off x="7274052" y="4169664"/>
             <a:ext cx="685800" cy="384048"/>
           </a:xfrm>
           <a:prstGeom prst="rect">
@@ -11010,139 +11010,7 @@
                 <a:ea typeface="Trebuchet MS" pitchFamily="34" charset="-122"/>
                 <a:cs typeface="Trebuchet MS" pitchFamily="34" charset="-120"/>
               </a:rPr>
-              <a:t>i</a:t>
-            </a:r>
-            <a:endParaRPr lang="en-US" sz="900" dirty="0"/>
-          </a:p>
-        </p:txBody>
-      </p:sp>
-      <p:sp>
-        <p:nvSpPr>
-          <p:cNvPr id="47" name="Shape 45"/>
-          <p:cNvSpPr/>
-          <p:nvPr/>
-        </p:nvSpPr>
-        <p:spPr>
-          <a:xfrm>
-            <a:off x="6668262" y="4169664"/>
-            <a:ext cx="685800" cy="384048"/>
-          </a:xfrm>
-          <a:prstGeom prst="rect">
-            <a:avLst>
-              <a:gd name="adj" fmla="val 9524"/>
-            </a:avLst>
-          </a:prstGeom>
-          <a:solidFill>
-            <a:srgbClr val="FFFFFF"/>
-          </a:solidFill>
-          <a:ln w="12700">
-            <a:solidFill>
-              <a:srgbClr val="DB2777"/>
-            </a:solidFill>
-            <a:prstDash val="solid"/>
-          </a:ln>
-        </p:spPr>
-      </p:sp>
-      <p:sp>
-        <p:nvSpPr>
-          <p:cNvPr id="48" name="Text 46"/>
-          <p:cNvSpPr/>
-          <p:nvPr/>
-        </p:nvSpPr>
-        <p:spPr>
-          <a:xfrm>
-            <a:off x="6668262" y="4169664"/>
-            <a:ext cx="685800" cy="384048"/>
-          </a:xfrm>
-          <a:prstGeom prst="rect">
-            <a:avLst/>
-          </a:prstGeom>
-          <a:noFill/>
-          <a:ln/>
-        </p:spPr>
-        <p:txBody>
-          <a:bodyPr wrap="square" lIns="0" tIns="0" rIns="0" bIns="0" rtlCol="0" anchor="ctr"/>
-          <a:lstStyle/>
-          <a:p>
-            <a:pPr algn="ctr" indent="0" marL="0">
-              <a:buNone/>
-            </a:pPr>
-            <a:r>
-              <a:rPr lang="en-US" sz="900" b="1" dirty="0">
-                <a:solidFill>
-                  <a:srgbClr val="9D174D"/>
-                </a:solidFill>
-                <a:latin typeface="Trebuchet MS" pitchFamily="34" charset="0"/>
-                <a:ea typeface="Trebuchet MS" pitchFamily="34" charset="-122"/>
-                <a:cs typeface="Trebuchet MS" pitchFamily="34" charset="-120"/>
-              </a:rPr>
-              <a:t>b</a:t>
-            </a:r>
-            <a:endParaRPr lang="en-US" sz="900" dirty="0"/>
-          </a:p>
-        </p:txBody>
-      </p:sp>
-      <p:sp>
-        <p:nvSpPr>
-          <p:cNvPr id="49" name="Shape 47"/>
-          <p:cNvSpPr/>
-          <p:nvPr/>
-        </p:nvSpPr>
-        <p:spPr>
-          <a:xfrm>
-            <a:off x="7576947" y="4169664"/>
-            <a:ext cx="685800" cy="384048"/>
-          </a:xfrm>
-          <a:prstGeom prst="rect">
-            <a:avLst>
-              <a:gd name="adj" fmla="val 9524"/>
-            </a:avLst>
-          </a:prstGeom>
-          <a:solidFill>
-            <a:srgbClr val="FFFFFF"/>
-          </a:solidFill>
-          <a:ln w="12700">
-            <a:solidFill>
-              <a:srgbClr val="DB2777"/>
-            </a:solidFill>
-            <a:prstDash val="solid"/>
-          </a:ln>
-        </p:spPr>
-      </p:sp>
-      <p:sp>
-        <p:nvSpPr>
-          <p:cNvPr id="50" name="Text 48"/>
-          <p:cNvSpPr/>
-          <p:nvPr/>
-        </p:nvSpPr>
-        <p:spPr>
-          <a:xfrm>
-            <a:off x="7576947" y="4169664"/>
-            <a:ext cx="685800" cy="384048"/>
-          </a:xfrm>
-          <a:prstGeom prst="rect">
-            <a:avLst/>
-          </a:prstGeom>
-          <a:noFill/>
-          <a:ln/>
-        </p:spPr>
-        <p:txBody>
-          <a:bodyPr wrap="square" lIns="0" tIns="0" rIns="0" bIns="0" rtlCol="0" anchor="ctr"/>
-          <a:lstStyle/>
-          <a:p>
-            <a:pPr algn="ctr" indent="0" marL="0">
-              <a:buNone/>
-            </a:pPr>
-            <a:r>
-              <a:rPr lang="en-US" sz="900" b="1" dirty="0">
-                <a:solidFill>
-                  <a:srgbClr val="9D174D"/>
-                </a:solidFill>
-                <a:latin typeface="Trebuchet MS" pitchFamily="34" charset="0"/>
-                <a:ea typeface="Trebuchet MS" pitchFamily="34" charset="-122"/>
-                <a:cs typeface="Trebuchet MS" pitchFamily="34" charset="-120"/>
-              </a:rPr>
-              <a:t>le</a:t>
+              <a:t>ble</a:t>
             </a:r>
             <a:endParaRPr lang="en-US" sz="900" dirty="0"/>
           </a:p>
@@ -11573,7 +11441,7 @@
                 <a:ea typeface="Trebuchet MS" pitchFamily="34" charset="-122"/>
                 <a:cs typeface="Trebuchet MS" pitchFamily="34" charset="-120"/>
               </a:rPr>
-              <a:t>reflexes</a:t>
+              <a:t>reflex</a:t>
             </a:r>
             <a:endParaRPr lang="en-US" sz="2800" dirty="0"/>
           </a:p>
@@ -12400,7 +12268,7 @@
                 <a:ea typeface="Trebuchet MS" pitchFamily="34" charset="-122"/>
                 <a:cs typeface="Trebuchet MS" pitchFamily="34" charset="-120"/>
               </a:rPr>
-              <a:t>reflexes</a:t>
+              <a:t>reflex</a:t>
             </a:r>
             <a:endParaRPr lang="en-US" sz="2800" dirty="0"/>
           </a:p>
@@ -12480,7 +12348,7 @@
         </p:nvSpPr>
         <p:spPr>
           <a:xfrm>
-            <a:off x="2221992" y="2258568"/>
+            <a:off x="2938272" y="2258568"/>
             <a:ext cx="1828800" cy="292608"/>
           </a:xfrm>
           <a:prstGeom prst="rect">
@@ -12514,7 +12382,7 @@
         </p:nvSpPr>
         <p:spPr>
           <a:xfrm>
-            <a:off x="2221992" y="2258568"/>
+            <a:off x="2938272" y="2258568"/>
             <a:ext cx="1828800" cy="292608"/>
           </a:xfrm>
           <a:prstGeom prst="rect">
@@ -12553,7 +12421,7 @@
         </p:nvSpPr>
         <p:spPr>
           <a:xfrm>
-            <a:off x="2221992" y="2569464"/>
+            <a:off x="2938272" y="2569464"/>
             <a:ext cx="1828800" cy="201168"/>
           </a:xfrm>
           <a:prstGeom prst="rect">
@@ -12578,7 +12446,7 @@
                 <a:ea typeface="Calibri" pitchFamily="34" charset="-122"/>
                 <a:cs typeface="Calibri" pitchFamily="34" charset="-120"/>
               </a:rPr>
-              <a:t>back</a:t>
+              <a:t>back or again</a:t>
             </a:r>
             <a:endParaRPr lang="en-US" sz="850" dirty="0"/>
           </a:p>
@@ -12592,7 +12460,7 @@
         </p:nvSpPr>
         <p:spPr>
           <a:xfrm>
-            <a:off x="4370832" y="2258568"/>
+            <a:off x="5803392" y="2258568"/>
             <a:ext cx="1828800" cy="292608"/>
           </a:xfrm>
           <a:prstGeom prst="rect">
@@ -12626,7 +12494,7 @@
         </p:nvSpPr>
         <p:spPr>
           <a:xfrm>
-            <a:off x="4370832" y="2258568"/>
+            <a:off x="5803392" y="2258568"/>
             <a:ext cx="1828800" cy="292608"/>
           </a:xfrm>
           <a:prstGeom prst="rect">
@@ -12665,7 +12533,7 @@
         </p:nvSpPr>
         <p:spPr>
           <a:xfrm>
-            <a:off x="4370832" y="2569464"/>
+            <a:off x="5803392" y="2569464"/>
             <a:ext cx="1828800" cy="201168"/>
           </a:xfrm>
           <a:prstGeom prst="rect">
@@ -12704,30 +12572,23 @@
         </p:nvSpPr>
         <p:spPr>
           <a:xfrm>
-            <a:off x="6519672" y="2258568"/>
-            <a:ext cx="1828800" cy="292608"/>
+            <a:off x="365760" y="3273552"/>
+            <a:ext cx="1371600" cy="658368"/>
           </a:xfrm>
           <a:prstGeom prst="rect">
             <a:avLst>
-              <a:gd name="adj" fmla="val 25000"/>
+              <a:gd name="adj" fmla="val 8333"/>
             </a:avLst>
           </a:prstGeom>
           <a:solidFill>
-            <a:srgbClr val="FCE7F3"/>
-          </a:solidFill>
-          <a:ln w="19050">
-            <a:solidFill>
-              <a:srgbClr val="DB2777"/>
-            </a:solidFill>
-            <a:prstDash val="solid"/>
-          </a:ln>
-          <a:effectLst>
-            <a:outerShdw sx="100000" sy="100000" kx="0" ky="0" algn="bl" rotWithShape="0" blurRad="101600" dist="38100" dir="8100000">
-              <a:srgbClr val="000000">
-                <a:alpha val="12000"/>
-              </a:srgbClr>
-            </a:outerShdw>
-          </a:effectLst>
+            <a:srgbClr val="E2E8F0"/>
+          </a:solidFill>
+          <a:ln w="12700">
+            <a:solidFill>
+              <a:srgbClr val="E2E8F0"/>
+            </a:solidFill>
+            <a:prstDash val="solid"/>
+          </a:ln>
         </p:spPr>
       </p:sp>
       <p:sp>
@@ -12738,90 +12599,117 @@
         </p:nvSpPr>
         <p:spPr>
           <a:xfrm>
-            <a:off x="6519672" y="2258568"/>
-            <a:ext cx="1828800" cy="292608"/>
-          </a:xfrm>
-          <a:prstGeom prst="rect">
-            <a:avLst/>
-          </a:prstGeom>
-          <a:noFill/>
-          <a:ln/>
-        </p:spPr>
-        <p:txBody>
-          <a:bodyPr wrap="square" lIns="0" tIns="0" rIns="0" bIns="0" rtlCol="0" anchor="ctr"/>
-          <a:lstStyle/>
-          <a:p>
-            <a:pPr algn="ctr" indent="0" marL="0">
-              <a:buNone/>
-            </a:pPr>
-            <a:r>
-              <a:rPr lang="en-US" sz="1300" b="1" dirty="0">
-                <a:solidFill>
-                  <a:srgbClr val="9D174D"/>
+            <a:off x="365760" y="3273552"/>
+            <a:ext cx="1371600" cy="658368"/>
+          </a:xfrm>
+          <a:prstGeom prst="rect">
+            <a:avLst/>
+          </a:prstGeom>
+          <a:noFill/>
+          <a:ln/>
+        </p:spPr>
+        <p:txBody>
+          <a:bodyPr wrap="square" lIns="0" tIns="0" rIns="0" bIns="0" rtlCol="0" anchor="ctr"/>
+          <a:lstStyle/>
+          <a:p>
+            <a:pPr algn="ctr" indent="0" marL="0">
+              <a:buNone/>
+            </a:pPr>
+            <a:r>
+              <a:rPr lang="en-US" sz="1100" b="1" dirty="0">
+                <a:solidFill>
+                  <a:srgbClr val="475569"/>
                 </a:solidFill>
                 <a:latin typeface="Trebuchet MS" pitchFamily="34" charset="0"/>
                 <a:ea typeface="Trebuchet MS" pitchFamily="34" charset="-122"/>
                 <a:cs typeface="Trebuchet MS" pitchFamily="34" charset="-120"/>
               </a:rPr>
-              <a:t>es</a:t>
-            </a:r>
-            <a:endParaRPr lang="en-US" sz="1300" dirty="0"/>
-          </a:p>
-        </p:txBody>
-      </p:sp>
-      <p:sp>
-        <p:nvSpPr>
-          <p:cNvPr id="24" name="Text 22"/>
-          <p:cNvSpPr/>
-          <p:nvPr/>
-        </p:nvSpPr>
-        <p:spPr>
-          <a:xfrm>
-            <a:off x="6519672" y="2569464"/>
-            <a:ext cx="1828800" cy="201168"/>
-          </a:xfrm>
-          <a:prstGeom prst="rect">
-            <a:avLst/>
-          </a:prstGeom>
-          <a:noFill/>
-          <a:ln/>
-        </p:spPr>
-        <p:txBody>
-          <a:bodyPr wrap="square" lIns="0" tIns="0" rIns="0" bIns="0" rtlCol="0" anchor="t"/>
-          <a:lstStyle/>
-          <a:p>
-            <a:pPr algn="ctr" indent="0" marL="0">
-              <a:buNone/>
-            </a:pPr>
-            <a:r>
-              <a:rPr lang="en-US" sz="850" dirty="0">
-                <a:solidFill>
-                  <a:srgbClr val="475569"/>
+              <a:t>Syllables</a:t>
+            </a:r>
+            <a:endParaRPr lang="en-US" sz="1100" dirty="0"/>
+          </a:p>
+        </p:txBody>
+      </p:sp>
+      <p:sp>
+        <p:nvSpPr>
+          <p:cNvPr id="24" name="Shape 22"/>
+          <p:cNvSpPr/>
+          <p:nvPr/>
+        </p:nvSpPr>
+        <p:spPr>
+          <a:xfrm>
+            <a:off x="1874520" y="3273552"/>
+            <a:ext cx="6903720" cy="658368"/>
+          </a:xfrm>
+          <a:prstGeom prst="rect">
+            <a:avLst>
+              <a:gd name="adj" fmla="val 8333"/>
+            </a:avLst>
+          </a:prstGeom>
+          <a:solidFill>
+            <a:srgbClr val="F8FAFC"/>
+          </a:solidFill>
+          <a:ln w="12700">
+            <a:solidFill>
+              <a:srgbClr val="E2E8F0"/>
+            </a:solidFill>
+            <a:prstDash val="dash"/>
+          </a:ln>
+        </p:spPr>
+      </p:sp>
+      <p:sp>
+        <p:nvSpPr>
+          <p:cNvPr id="25" name="Text 23"/>
+          <p:cNvSpPr/>
+          <p:nvPr/>
+        </p:nvSpPr>
+        <p:spPr>
+          <a:xfrm>
+            <a:off x="1874520" y="3273552"/>
+            <a:ext cx="6903720" cy="658368"/>
+          </a:xfrm>
+          <a:prstGeom prst="rect">
+            <a:avLst/>
+          </a:prstGeom>
+          <a:noFill/>
+          <a:ln/>
+        </p:spPr>
+        <p:txBody>
+          <a:bodyPr wrap="square" rtlCol="0" anchor="ctr"/>
+          <a:lstStyle/>
+          <a:p>
+            <a:pPr algn="ctr" indent="0" marL="0">
+              <a:buNone/>
+            </a:pPr>
+            <a:r>
+              <a:rPr lang="en-US" sz="1100" i="1" dirty="0">
+                <a:solidFill>
+                  <a:srgbClr val="CBD5E1"/>
                 </a:solidFill>
                 <a:latin typeface="Calibri" pitchFamily="34" charset="0"/>
                 <a:ea typeface="Calibri" pitchFamily="34" charset="-122"/>
                 <a:cs typeface="Calibri" pitchFamily="34" charset="-120"/>
               </a:rPr>
-              <a:t>plural (more than one)</a:t>
-            </a:r>
-            <a:endParaRPr lang="en-US" sz="850" dirty="0"/>
-          </a:p>
-        </p:txBody>
-      </p:sp>
-      <p:sp>
-        <p:nvSpPr>
-          <p:cNvPr id="25" name="Shape 23"/>
-          <p:cNvSpPr/>
-          <p:nvPr/>
-        </p:nvSpPr>
-        <p:spPr>
-          <a:xfrm>
-            <a:off x="365760" y="3273552"/>
-            <a:ext cx="1371600" cy="658368"/>
+              <a:t>Write here...</a:t>
+            </a:r>
+            <a:endParaRPr lang="en-US" sz="1100" dirty="0"/>
+          </a:p>
+        </p:txBody>
+      </p:sp>
+      <p:sp>
+        <p:nvSpPr>
+          <p:cNvPr id="26" name="Shape 24"/>
+          <p:cNvSpPr/>
+          <p:nvPr/>
+        </p:nvSpPr>
+        <p:spPr>
+          <a:xfrm>
+            <a:off x="365760" y="4096512"/>
+            <a:ext cx="1371600" cy="804672"/>
           </a:xfrm>
           <a:prstGeom prst="rect">
             <a:avLst>
-              <a:gd name="adj" fmla="val 8333"/>
+              <a:gd name="adj" fmla="val 6818"/>
             </a:avLst>
           </a:prstGeom>
           <a:solidFill>
@@ -12837,14 +12725,14 @@
       </p:sp>
       <p:sp>
         <p:nvSpPr>
-          <p:cNvPr id="26" name="Text 24"/>
-          <p:cNvSpPr/>
-          <p:nvPr/>
-        </p:nvSpPr>
-        <p:spPr>
-          <a:xfrm>
-            <a:off x="365760" y="3273552"/>
-            <a:ext cx="1371600" cy="658368"/>
+          <p:cNvPr id="27" name="Text 25"/>
+          <p:cNvSpPr/>
+          <p:nvPr/>
+        </p:nvSpPr>
+        <p:spPr>
+          <a:xfrm>
+            <a:off x="365760" y="4096512"/>
+            <a:ext cx="1371600" cy="804672"/>
           </a:xfrm>
           <a:prstGeom prst="rect">
             <a:avLst/>
@@ -12868,7 +12756,7 @@
                 <a:ea typeface="Trebuchet MS" pitchFamily="34" charset="-122"/>
                 <a:cs typeface="Trebuchet MS" pitchFamily="34" charset="-120"/>
               </a:rPr>
-              <a:t>Syllables</a:t>
+              <a:t>Phonemes</a:t>
             </a:r>
             <a:endParaRPr lang="en-US" sz="1100" dirty="0"/>
           </a:p>
@@ -12876,80 +12764,14 @@
       </p:sp>
       <p:sp>
         <p:nvSpPr>
-          <p:cNvPr id="27" name="Shape 25"/>
-          <p:cNvSpPr/>
-          <p:nvPr/>
-        </p:nvSpPr>
-        <p:spPr>
-          <a:xfrm>
-            <a:off x="1874520" y="3273552"/>
-            <a:ext cx="6903720" cy="658368"/>
-          </a:xfrm>
-          <a:prstGeom prst="rect">
-            <a:avLst>
-              <a:gd name="adj" fmla="val 8333"/>
-            </a:avLst>
-          </a:prstGeom>
-          <a:solidFill>
-            <a:srgbClr val="F8FAFC"/>
-          </a:solidFill>
-          <a:ln w="12700">
-            <a:solidFill>
-              <a:srgbClr val="E2E8F0"/>
-            </a:solidFill>
-            <a:prstDash val="dash"/>
-          </a:ln>
-        </p:spPr>
-      </p:sp>
-      <p:sp>
-        <p:nvSpPr>
-          <p:cNvPr id="28" name="Text 26"/>
-          <p:cNvSpPr/>
-          <p:nvPr/>
-        </p:nvSpPr>
-        <p:spPr>
-          <a:xfrm>
-            <a:off x="1874520" y="3273552"/>
-            <a:ext cx="6903720" cy="658368"/>
-          </a:xfrm>
-          <a:prstGeom prst="rect">
-            <a:avLst/>
-          </a:prstGeom>
-          <a:noFill/>
-          <a:ln/>
-        </p:spPr>
-        <p:txBody>
-          <a:bodyPr wrap="square" rtlCol="0" anchor="ctr"/>
-          <a:lstStyle/>
-          <a:p>
-            <a:pPr algn="ctr" indent="0" marL="0">
-              <a:buNone/>
-            </a:pPr>
-            <a:r>
-              <a:rPr lang="en-US" sz="1100" i="1" dirty="0">
-                <a:solidFill>
-                  <a:srgbClr val="CBD5E1"/>
-                </a:solidFill>
-                <a:latin typeface="Calibri" pitchFamily="34" charset="0"/>
-                <a:ea typeface="Calibri" pitchFamily="34" charset="-122"/>
-                <a:cs typeface="Calibri" pitchFamily="34" charset="-120"/>
-              </a:rPr>
-              <a:t>Write here...</a:t>
-            </a:r>
-            <a:endParaRPr lang="en-US" sz="1100" dirty="0"/>
-          </a:p>
-        </p:txBody>
-      </p:sp>
-      <p:sp>
-        <p:nvSpPr>
-          <p:cNvPr id="29" name="Shape 27"/>
-          <p:cNvSpPr/>
-          <p:nvPr/>
-        </p:nvSpPr>
-        <p:spPr>
-          <a:xfrm>
-            <a:off x="365760" y="4096512"/>
-            <a:ext cx="1371600" cy="804672"/>
+          <p:cNvPr id="28" name="Shape 26"/>
+          <p:cNvSpPr/>
+          <p:nvPr/>
+        </p:nvSpPr>
+        <p:spPr>
+          <a:xfrm>
+            <a:off x="1874520" y="4096512"/>
+            <a:ext cx="6903720" cy="804672"/>
           </a:xfrm>
           <a:prstGeom prst="rect">
             <a:avLst>
@@ -12957,85 +12779,19 @@
             </a:avLst>
           </a:prstGeom>
           <a:solidFill>
-            <a:srgbClr val="E2E8F0"/>
+            <a:srgbClr val="F8FAFC"/>
           </a:solidFill>
           <a:ln w="12700">
             <a:solidFill>
               <a:srgbClr val="E2E8F0"/>
             </a:solidFill>
-            <a:prstDash val="solid"/>
-          </a:ln>
-        </p:spPr>
-      </p:sp>
-      <p:sp>
-        <p:nvSpPr>
-          <p:cNvPr id="30" name="Text 28"/>
-          <p:cNvSpPr/>
-          <p:nvPr/>
-        </p:nvSpPr>
-        <p:spPr>
-          <a:xfrm>
-            <a:off x="365760" y="4096512"/>
-            <a:ext cx="1371600" cy="804672"/>
-          </a:xfrm>
-          <a:prstGeom prst="rect">
-            <a:avLst/>
-          </a:prstGeom>
-          <a:noFill/>
-          <a:ln/>
-        </p:spPr>
-        <p:txBody>
-          <a:bodyPr wrap="square" lIns="0" tIns="0" rIns="0" bIns="0" rtlCol="0" anchor="ctr"/>
-          <a:lstStyle/>
-          <a:p>
-            <a:pPr algn="ctr" indent="0" marL="0">
-              <a:buNone/>
-            </a:pPr>
-            <a:r>
-              <a:rPr lang="en-US" sz="1100" b="1" dirty="0">
-                <a:solidFill>
-                  <a:srgbClr val="475569"/>
-                </a:solidFill>
-                <a:latin typeface="Trebuchet MS" pitchFamily="34" charset="0"/>
-                <a:ea typeface="Trebuchet MS" pitchFamily="34" charset="-122"/>
-                <a:cs typeface="Trebuchet MS" pitchFamily="34" charset="-120"/>
-              </a:rPr>
-              <a:t>Phonemes</a:t>
-            </a:r>
-            <a:endParaRPr lang="en-US" sz="1100" dirty="0"/>
-          </a:p>
-        </p:txBody>
-      </p:sp>
-      <p:sp>
-        <p:nvSpPr>
-          <p:cNvPr id="31" name="Shape 29"/>
-          <p:cNvSpPr/>
-          <p:nvPr/>
-        </p:nvSpPr>
-        <p:spPr>
-          <a:xfrm>
-            <a:off x="1874520" y="4096512"/>
-            <a:ext cx="6903720" cy="804672"/>
-          </a:xfrm>
-          <a:prstGeom prst="rect">
-            <a:avLst>
-              <a:gd name="adj" fmla="val 6818"/>
-            </a:avLst>
-          </a:prstGeom>
-          <a:solidFill>
-            <a:srgbClr val="F8FAFC"/>
-          </a:solidFill>
-          <a:ln w="12700">
-            <a:solidFill>
-              <a:srgbClr val="E2E8F0"/>
-            </a:solidFill>
             <a:prstDash val="dash"/>
           </a:ln>
         </p:spPr>
       </p:sp>
       <p:sp>
         <p:nvSpPr>
-          <p:cNvPr id="32" name="Text 30"/>
+          <p:cNvPr id="29" name="Text 27"/>
           <p:cNvSpPr/>
           <p:nvPr/>
         </p:nvSpPr>
@@ -13497,7 +13253,7 @@
                 <a:ea typeface="Trebuchet MS" pitchFamily="34" charset="-122"/>
                 <a:cs typeface="Trebuchet MS" pitchFamily="34" charset="-120"/>
               </a:rPr>
-              <a:t>reflexes</a:t>
+              <a:t>reflex</a:t>
             </a:r>
             <a:endParaRPr lang="en-US" sz="2800" dirty="0"/>
           </a:p>
@@ -13577,7 +13333,7 @@
         </p:nvSpPr>
         <p:spPr>
           <a:xfrm>
-            <a:off x="2221992" y="2258568"/>
+            <a:off x="2938272" y="2258568"/>
             <a:ext cx="1828800" cy="292608"/>
           </a:xfrm>
           <a:prstGeom prst="rect">
@@ -13611,7 +13367,7 @@
         </p:nvSpPr>
         <p:spPr>
           <a:xfrm>
-            <a:off x="2221992" y="2258568"/>
+            <a:off x="2938272" y="2258568"/>
             <a:ext cx="1828800" cy="292608"/>
           </a:xfrm>
           <a:prstGeom prst="rect">
@@ -13650,7 +13406,7 @@
         </p:nvSpPr>
         <p:spPr>
           <a:xfrm>
-            <a:off x="2221992" y="2569464"/>
+            <a:off x="2938272" y="2569464"/>
             <a:ext cx="1828800" cy="201168"/>
           </a:xfrm>
           <a:prstGeom prst="rect">
@@ -13675,7 +13431,7 @@
                 <a:ea typeface="Calibri" pitchFamily="34" charset="-122"/>
                 <a:cs typeface="Calibri" pitchFamily="34" charset="-120"/>
               </a:rPr>
-              <a:t>back</a:t>
+              <a:t>back or again</a:t>
             </a:r>
             <a:endParaRPr lang="en-US" sz="850" dirty="0"/>
           </a:p>
@@ -13689,7 +13445,7 @@
         </p:nvSpPr>
         <p:spPr>
           <a:xfrm>
-            <a:off x="4370832" y="2258568"/>
+            <a:off x="5803392" y="2258568"/>
             <a:ext cx="1828800" cy="292608"/>
           </a:xfrm>
           <a:prstGeom prst="rect">
@@ -13723,7 +13479,7 @@
         </p:nvSpPr>
         <p:spPr>
           <a:xfrm>
-            <a:off x="4370832" y="2258568"/>
+            <a:off x="5803392" y="2258568"/>
             <a:ext cx="1828800" cy="292608"/>
           </a:xfrm>
           <a:prstGeom prst="rect">
@@ -13762,7 +13518,7 @@
         </p:nvSpPr>
         <p:spPr>
           <a:xfrm>
-            <a:off x="4370832" y="2569464"/>
+            <a:off x="5803392" y="2569464"/>
             <a:ext cx="1828800" cy="201168"/>
           </a:xfrm>
           <a:prstGeom prst="rect">
@@ -13801,30 +13557,23 @@
         </p:nvSpPr>
         <p:spPr>
           <a:xfrm>
-            <a:off x="6519672" y="2258568"/>
-            <a:ext cx="1828800" cy="292608"/>
+            <a:off x="365760" y="3273552"/>
+            <a:ext cx="1371600" cy="658368"/>
           </a:xfrm>
           <a:prstGeom prst="rect">
             <a:avLst>
-              <a:gd name="adj" fmla="val 25000"/>
+              <a:gd name="adj" fmla="val 8333"/>
             </a:avLst>
           </a:prstGeom>
           <a:solidFill>
-            <a:srgbClr val="FCE7F3"/>
-          </a:solidFill>
-          <a:ln w="19050">
-            <a:solidFill>
-              <a:srgbClr val="DB2777"/>
-            </a:solidFill>
-            <a:prstDash val="solid"/>
-          </a:ln>
-          <a:effectLst>
-            <a:outerShdw sx="100000" sy="100000" kx="0" ky="0" algn="bl" rotWithShape="0" blurRad="101600" dist="38100" dir="8100000">
-              <a:srgbClr val="000000">
-                <a:alpha val="12000"/>
-              </a:srgbClr>
-            </a:outerShdw>
-          </a:effectLst>
+            <a:srgbClr val="E2E8F0"/>
+          </a:solidFill>
+          <a:ln w="12700">
+            <a:solidFill>
+              <a:srgbClr val="E2E8F0"/>
+            </a:solidFill>
+            <a:prstDash val="solid"/>
+          </a:ln>
         </p:spPr>
       </p:sp>
       <p:sp>
@@ -13835,86 +13584,47 @@
         </p:nvSpPr>
         <p:spPr>
           <a:xfrm>
-            <a:off x="6519672" y="2258568"/>
-            <a:ext cx="1828800" cy="292608"/>
-          </a:xfrm>
-          <a:prstGeom prst="rect">
-            <a:avLst/>
-          </a:prstGeom>
-          <a:noFill/>
-          <a:ln/>
-        </p:spPr>
-        <p:txBody>
-          <a:bodyPr wrap="square" lIns="0" tIns="0" rIns="0" bIns="0" rtlCol="0" anchor="ctr"/>
-          <a:lstStyle/>
-          <a:p>
-            <a:pPr algn="ctr" indent="0" marL="0">
-              <a:buNone/>
-            </a:pPr>
-            <a:r>
-              <a:rPr lang="en-US" sz="1300" b="1" dirty="0">
-                <a:solidFill>
-                  <a:srgbClr val="9D174D"/>
+            <a:off x="365760" y="3273552"/>
+            <a:ext cx="1371600" cy="658368"/>
+          </a:xfrm>
+          <a:prstGeom prst="rect">
+            <a:avLst/>
+          </a:prstGeom>
+          <a:noFill/>
+          <a:ln/>
+        </p:spPr>
+        <p:txBody>
+          <a:bodyPr wrap="square" lIns="0" tIns="0" rIns="0" bIns="0" rtlCol="0" anchor="ctr"/>
+          <a:lstStyle/>
+          <a:p>
+            <a:pPr algn="ctr" indent="0" marL="0">
+              <a:buNone/>
+            </a:pPr>
+            <a:r>
+              <a:rPr lang="en-US" sz="1100" b="1" dirty="0">
+                <a:solidFill>
+                  <a:srgbClr val="475569"/>
                 </a:solidFill>
                 <a:latin typeface="Trebuchet MS" pitchFamily="34" charset="0"/>
                 <a:ea typeface="Trebuchet MS" pitchFamily="34" charset="-122"/>
                 <a:cs typeface="Trebuchet MS" pitchFamily="34" charset="-120"/>
               </a:rPr>
-              <a:t>es</a:t>
-            </a:r>
-            <a:endParaRPr lang="en-US" sz="1300" dirty="0"/>
-          </a:p>
-        </p:txBody>
-      </p:sp>
-      <p:sp>
-        <p:nvSpPr>
-          <p:cNvPr id="24" name="Text 22"/>
-          <p:cNvSpPr/>
-          <p:nvPr/>
-        </p:nvSpPr>
-        <p:spPr>
-          <a:xfrm>
-            <a:off x="6519672" y="2569464"/>
-            <a:ext cx="1828800" cy="201168"/>
-          </a:xfrm>
-          <a:prstGeom prst="rect">
-            <a:avLst/>
-          </a:prstGeom>
-          <a:noFill/>
-          <a:ln/>
-        </p:spPr>
-        <p:txBody>
-          <a:bodyPr wrap="square" lIns="0" tIns="0" rIns="0" bIns="0" rtlCol="0" anchor="t"/>
-          <a:lstStyle/>
-          <a:p>
-            <a:pPr algn="ctr" indent="0" marL="0">
-              <a:buNone/>
-            </a:pPr>
-            <a:r>
-              <a:rPr lang="en-US" sz="850" dirty="0">
-                <a:solidFill>
-                  <a:srgbClr val="475569"/>
-                </a:solidFill>
-                <a:latin typeface="Calibri" pitchFamily="34" charset="0"/>
-                <a:ea typeface="Calibri" pitchFamily="34" charset="-122"/>
-                <a:cs typeface="Calibri" pitchFamily="34" charset="-120"/>
-              </a:rPr>
-              <a:t>plural (more than one)</a:t>
-            </a:r>
-            <a:endParaRPr lang="en-US" sz="850" dirty="0"/>
-          </a:p>
-        </p:txBody>
-      </p:sp>
-      <p:sp>
-        <p:nvSpPr>
-          <p:cNvPr id="25" name="Shape 23"/>
-          <p:cNvSpPr/>
-          <p:nvPr/>
-        </p:nvSpPr>
-        <p:spPr>
-          <a:xfrm>
-            <a:off x="365760" y="3273552"/>
-            <a:ext cx="1371600" cy="658368"/>
+              <a:t>Syllables</a:t>
+            </a:r>
+            <a:endParaRPr lang="en-US" sz="1100" dirty="0"/>
+          </a:p>
+        </p:txBody>
+      </p:sp>
+      <p:sp>
+        <p:nvSpPr>
+          <p:cNvPr id="24" name="Shape 22"/>
+          <p:cNvSpPr/>
+          <p:nvPr/>
+        </p:nvSpPr>
+        <p:spPr>
+          <a:xfrm>
+            <a:off x="1874520" y="3273552"/>
+            <a:ext cx="6903720" cy="658368"/>
           </a:xfrm>
           <a:prstGeom prst="rect">
             <a:avLst>
@@ -13922,11 +13632,38 @@
             </a:avLst>
           </a:prstGeom>
           <a:solidFill>
-            <a:srgbClr val="E2E8F0"/>
-          </a:solidFill>
-          <a:ln w="12700">
-            <a:solidFill>
-              <a:srgbClr val="E2E8F0"/>
+            <a:srgbClr val="CCFBF1"/>
+          </a:solidFill>
+          <a:ln w="12700">
+            <a:solidFill>
+              <a:srgbClr val="0D9488"/>
+            </a:solidFill>
+            <a:prstDash val="solid"/>
+          </a:ln>
+        </p:spPr>
+      </p:sp>
+      <p:sp>
+        <p:nvSpPr>
+          <p:cNvPr id="25" name="Shape 23"/>
+          <p:cNvSpPr/>
+          <p:nvPr/>
+        </p:nvSpPr>
+        <p:spPr>
+          <a:xfrm>
+            <a:off x="2999232" y="3364992"/>
+            <a:ext cx="1645920" cy="475488"/>
+          </a:xfrm>
+          <a:prstGeom prst="rect">
+            <a:avLst>
+              <a:gd name="adj" fmla="val 9615"/>
+            </a:avLst>
+          </a:prstGeom>
+          <a:solidFill>
+            <a:srgbClr val="FFFFFF"/>
+          </a:solidFill>
+          <a:ln w="12700">
+            <a:solidFill>
+              <a:srgbClr val="0D9488"/>
             </a:solidFill>
             <a:prstDash val="solid"/>
           </a:ln>
@@ -13940,63 +13677,75 @@
         </p:nvSpPr>
         <p:spPr>
           <a:xfrm>
-            <a:off x="365760" y="3273552"/>
-            <a:ext cx="1371600" cy="658368"/>
-          </a:xfrm>
-          <a:prstGeom prst="rect">
-            <a:avLst/>
-          </a:prstGeom>
-          <a:noFill/>
-          <a:ln/>
-        </p:spPr>
-        <p:txBody>
-          <a:bodyPr wrap="square" lIns="0" tIns="0" rIns="0" bIns="0" rtlCol="0" anchor="ctr"/>
-          <a:lstStyle/>
-          <a:p>
-            <a:pPr algn="ctr" indent="0" marL="0">
-              <a:buNone/>
-            </a:pPr>
-            <a:r>
-              <a:rPr lang="en-US" sz="1100" b="1" dirty="0">
-                <a:solidFill>
-                  <a:srgbClr val="475569"/>
+            <a:off x="2999232" y="3364992"/>
+            <a:ext cx="1645920" cy="475488"/>
+          </a:xfrm>
+          <a:prstGeom prst="rect">
+            <a:avLst/>
+          </a:prstGeom>
+          <a:noFill/>
+          <a:ln/>
+        </p:spPr>
+        <p:txBody>
+          <a:bodyPr wrap="square" lIns="0" tIns="0" rIns="0" bIns="0" rtlCol="0" anchor="ctr"/>
+          <a:lstStyle/>
+          <a:p>
+            <a:pPr algn="ctr" indent="0" marL="0">
+              <a:buNone/>
+            </a:pPr>
+            <a:r>
+              <a:rPr lang="en-US" sz="1400" b="1" dirty="0">
+                <a:solidFill>
+                  <a:srgbClr val="0D9488"/>
                 </a:solidFill>
                 <a:latin typeface="Trebuchet MS" pitchFamily="34" charset="0"/>
                 <a:ea typeface="Trebuchet MS" pitchFamily="34" charset="-122"/>
                 <a:cs typeface="Trebuchet MS" pitchFamily="34" charset="-120"/>
               </a:rPr>
-              <a:t>Syllables</a:t>
-            </a:r>
-            <a:endParaRPr lang="en-US" sz="1100" dirty="0"/>
-          </a:p>
-        </p:txBody>
-      </p:sp>
-      <p:sp>
-        <p:nvSpPr>
-          <p:cNvPr id="27" name="Shape 25"/>
-          <p:cNvSpPr/>
-          <p:nvPr/>
-        </p:nvSpPr>
-        <p:spPr>
-          <a:xfrm>
-            <a:off x="1874520" y="3273552"/>
-            <a:ext cx="6903720" cy="658368"/>
-          </a:xfrm>
-          <a:prstGeom prst="rect">
-            <a:avLst>
-              <a:gd name="adj" fmla="val 8333"/>
-            </a:avLst>
-          </a:prstGeom>
-          <a:solidFill>
-            <a:srgbClr val="CCFBF1"/>
-          </a:solidFill>
-          <a:ln w="12700">
-            <a:solidFill>
-              <a:srgbClr val="0D9488"/>
-            </a:solidFill>
-            <a:prstDash val="solid"/>
-          </a:ln>
-        </p:spPr>
+              <a:t>re</a:t>
+            </a:r>
+            <a:endParaRPr lang="en-US" sz="1400" dirty="0"/>
+          </a:p>
+        </p:txBody>
+      </p:sp>
+      <p:sp>
+        <p:nvSpPr>
+          <p:cNvPr id="27" name="Text 25"/>
+          <p:cNvSpPr/>
+          <p:nvPr/>
+        </p:nvSpPr>
+        <p:spPr>
+          <a:xfrm>
+            <a:off x="4645152" y="3364992"/>
+            <a:ext cx="1097280" cy="475488"/>
+          </a:xfrm>
+          <a:prstGeom prst="rect">
+            <a:avLst/>
+          </a:prstGeom>
+          <a:noFill/>
+          <a:ln/>
+        </p:spPr>
+        <p:txBody>
+          <a:bodyPr wrap="square" lIns="0" tIns="0" rIns="0" bIns="0" rtlCol="0" anchor="ctr"/>
+          <a:lstStyle/>
+          <a:p>
+            <a:pPr algn="ctr" indent="0" marL="0">
+              <a:buNone/>
+            </a:pPr>
+            <a:r>
+              <a:rPr lang="en-US" sz="1600" b="1" dirty="0">
+                <a:solidFill>
+                  <a:srgbClr val="0D9488"/>
+                </a:solidFill>
+                <a:latin typeface="Trebuchet MS" pitchFamily="34" charset="0"/>
+                <a:ea typeface="Trebuchet MS" pitchFamily="34" charset="-122"/>
+                <a:cs typeface="Trebuchet MS" pitchFamily="34" charset="-120"/>
+              </a:rPr>
+              <a:t>·</a:t>
+            </a:r>
+            <a:endParaRPr lang="en-US" sz="1600" dirty="0"/>
+          </a:p>
+        </p:txBody>
       </p:sp>
       <p:sp>
         <p:nvSpPr>
@@ -14006,7 +13755,7 @@
         </p:nvSpPr>
         <p:spPr>
           <a:xfrm>
-            <a:off x="2313432" y="3364992"/>
+            <a:off x="5742432" y="3364992"/>
             <a:ext cx="1645920" cy="475488"/>
           </a:xfrm>
           <a:prstGeom prst="rect">
@@ -14033,7 +13782,7 @@
         </p:nvSpPr>
         <p:spPr>
           <a:xfrm>
-            <a:off x="2313432" y="3364992"/>
+            <a:off x="5742432" y="3364992"/>
             <a:ext cx="1645920" cy="475488"/>
           </a:xfrm>
           <a:prstGeom prst="rect">
@@ -14058,7 +13807,7 @@
                 <a:ea typeface="Trebuchet MS" pitchFamily="34" charset="-122"/>
                 <a:cs typeface="Trebuchet MS" pitchFamily="34" charset="-120"/>
               </a:rPr>
-              <a:t>re</a:t>
+              <a:t>flex</a:t>
             </a:r>
             <a:endParaRPr lang="en-US" sz="1400" dirty="0"/>
           </a:p>
@@ -14066,224 +13815,80 @@
       </p:sp>
       <p:sp>
         <p:nvSpPr>
-          <p:cNvPr id="30" name="Text 28"/>
-          <p:cNvSpPr/>
-          <p:nvPr/>
-        </p:nvSpPr>
-        <p:spPr>
-          <a:xfrm>
-            <a:off x="3959352" y="3364992"/>
-            <a:ext cx="411480" cy="475488"/>
-          </a:xfrm>
-          <a:prstGeom prst="rect">
-            <a:avLst/>
-          </a:prstGeom>
-          <a:noFill/>
-          <a:ln/>
-        </p:spPr>
-        <p:txBody>
-          <a:bodyPr wrap="square" lIns="0" tIns="0" rIns="0" bIns="0" rtlCol="0" anchor="ctr"/>
-          <a:lstStyle/>
-          <a:p>
-            <a:pPr algn="ctr" indent="0" marL="0">
-              <a:buNone/>
-            </a:pPr>
-            <a:r>
-              <a:rPr lang="en-US" sz="1600" b="1" dirty="0">
-                <a:solidFill>
-                  <a:srgbClr val="0D9488"/>
+          <p:cNvPr id="30" name="Shape 28"/>
+          <p:cNvSpPr/>
+          <p:nvPr/>
+        </p:nvSpPr>
+        <p:spPr>
+          <a:xfrm>
+            <a:off x="365760" y="4096512"/>
+            <a:ext cx="1371600" cy="804672"/>
+          </a:xfrm>
+          <a:prstGeom prst="rect">
+            <a:avLst>
+              <a:gd name="adj" fmla="val 6818"/>
+            </a:avLst>
+          </a:prstGeom>
+          <a:solidFill>
+            <a:srgbClr val="E2E8F0"/>
+          </a:solidFill>
+          <a:ln w="12700">
+            <a:solidFill>
+              <a:srgbClr val="E2E8F0"/>
+            </a:solidFill>
+            <a:prstDash val="solid"/>
+          </a:ln>
+        </p:spPr>
+      </p:sp>
+      <p:sp>
+        <p:nvSpPr>
+          <p:cNvPr id="31" name="Text 29"/>
+          <p:cNvSpPr/>
+          <p:nvPr/>
+        </p:nvSpPr>
+        <p:spPr>
+          <a:xfrm>
+            <a:off x="365760" y="4096512"/>
+            <a:ext cx="1371600" cy="804672"/>
+          </a:xfrm>
+          <a:prstGeom prst="rect">
+            <a:avLst/>
+          </a:prstGeom>
+          <a:noFill/>
+          <a:ln/>
+        </p:spPr>
+        <p:txBody>
+          <a:bodyPr wrap="square" lIns="0" tIns="0" rIns="0" bIns="0" rtlCol="0" anchor="ctr"/>
+          <a:lstStyle/>
+          <a:p>
+            <a:pPr algn="ctr" indent="0" marL="0">
+              <a:buNone/>
+            </a:pPr>
+            <a:r>
+              <a:rPr lang="en-US" sz="1100" b="1" dirty="0">
+                <a:solidFill>
+                  <a:srgbClr val="475569"/>
                 </a:solidFill>
                 <a:latin typeface="Trebuchet MS" pitchFamily="34" charset="0"/>
                 <a:ea typeface="Trebuchet MS" pitchFamily="34" charset="-122"/>
                 <a:cs typeface="Trebuchet MS" pitchFamily="34" charset="-120"/>
               </a:rPr>
-              <a:t>·</a:t>
-            </a:r>
-            <a:endParaRPr lang="en-US" sz="1600" dirty="0"/>
-          </a:p>
-        </p:txBody>
-      </p:sp>
-      <p:sp>
-        <p:nvSpPr>
-          <p:cNvPr id="31" name="Shape 29"/>
-          <p:cNvSpPr/>
-          <p:nvPr/>
-        </p:nvSpPr>
-        <p:spPr>
-          <a:xfrm>
-            <a:off x="4370832" y="3364992"/>
-            <a:ext cx="1645920" cy="475488"/>
-          </a:xfrm>
-          <a:prstGeom prst="rect">
-            <a:avLst>
-              <a:gd name="adj" fmla="val 9615"/>
-            </a:avLst>
-          </a:prstGeom>
-          <a:solidFill>
-            <a:srgbClr val="FFFFFF"/>
-          </a:solidFill>
-          <a:ln w="12700">
-            <a:solidFill>
-              <a:srgbClr val="0D9488"/>
-            </a:solidFill>
-            <a:prstDash val="solid"/>
-          </a:ln>
-        </p:spPr>
-      </p:sp>
-      <p:sp>
-        <p:nvSpPr>
-          <p:cNvPr id="32" name="Text 30"/>
-          <p:cNvSpPr/>
-          <p:nvPr/>
-        </p:nvSpPr>
-        <p:spPr>
-          <a:xfrm>
-            <a:off x="4370832" y="3364992"/>
-            <a:ext cx="1645920" cy="475488"/>
-          </a:xfrm>
-          <a:prstGeom prst="rect">
-            <a:avLst/>
-          </a:prstGeom>
-          <a:noFill/>
-          <a:ln/>
-        </p:spPr>
-        <p:txBody>
-          <a:bodyPr wrap="square" lIns="0" tIns="0" rIns="0" bIns="0" rtlCol="0" anchor="ctr"/>
-          <a:lstStyle/>
-          <a:p>
-            <a:pPr algn="ctr" indent="0" marL="0">
-              <a:buNone/>
-            </a:pPr>
-            <a:r>
-              <a:rPr lang="en-US" sz="1400" b="1" dirty="0">
-                <a:solidFill>
-                  <a:srgbClr val="0D9488"/>
-                </a:solidFill>
-                <a:latin typeface="Trebuchet MS" pitchFamily="34" charset="0"/>
-                <a:ea typeface="Trebuchet MS" pitchFamily="34" charset="-122"/>
-                <a:cs typeface="Trebuchet MS" pitchFamily="34" charset="-120"/>
-              </a:rPr>
-              <a:t>flex</a:t>
-            </a:r>
-            <a:endParaRPr lang="en-US" sz="1400" dirty="0"/>
-          </a:p>
-        </p:txBody>
-      </p:sp>
-      <p:sp>
-        <p:nvSpPr>
-          <p:cNvPr id="33" name="Text 31"/>
-          <p:cNvSpPr/>
-          <p:nvPr/>
-        </p:nvSpPr>
-        <p:spPr>
-          <a:xfrm>
-            <a:off x="6016752" y="3364992"/>
-            <a:ext cx="411480" cy="475488"/>
-          </a:xfrm>
-          <a:prstGeom prst="rect">
-            <a:avLst/>
-          </a:prstGeom>
-          <a:noFill/>
-          <a:ln/>
-        </p:spPr>
-        <p:txBody>
-          <a:bodyPr wrap="square" lIns="0" tIns="0" rIns="0" bIns="0" rtlCol="0" anchor="ctr"/>
-          <a:lstStyle/>
-          <a:p>
-            <a:pPr algn="ctr" indent="0" marL="0">
-              <a:buNone/>
-            </a:pPr>
-            <a:r>
-              <a:rPr lang="en-US" sz="1600" b="1" dirty="0">
-                <a:solidFill>
-                  <a:srgbClr val="0D9488"/>
-                </a:solidFill>
-                <a:latin typeface="Trebuchet MS" pitchFamily="34" charset="0"/>
-                <a:ea typeface="Trebuchet MS" pitchFamily="34" charset="-122"/>
-                <a:cs typeface="Trebuchet MS" pitchFamily="34" charset="-120"/>
-              </a:rPr>
-              <a:t>·</a:t>
-            </a:r>
-            <a:endParaRPr lang="en-US" sz="1600" dirty="0"/>
-          </a:p>
-        </p:txBody>
-      </p:sp>
-      <p:sp>
-        <p:nvSpPr>
-          <p:cNvPr id="34" name="Shape 32"/>
-          <p:cNvSpPr/>
-          <p:nvPr/>
-        </p:nvSpPr>
-        <p:spPr>
-          <a:xfrm>
-            <a:off x="6428232" y="3364992"/>
-            <a:ext cx="1645920" cy="475488"/>
-          </a:xfrm>
-          <a:prstGeom prst="rect">
-            <a:avLst>
-              <a:gd name="adj" fmla="val 9615"/>
-            </a:avLst>
-          </a:prstGeom>
-          <a:solidFill>
-            <a:srgbClr val="FFFFFF"/>
-          </a:solidFill>
-          <a:ln w="12700">
-            <a:solidFill>
-              <a:srgbClr val="0D9488"/>
-            </a:solidFill>
-            <a:prstDash val="solid"/>
-          </a:ln>
-        </p:spPr>
-      </p:sp>
-      <p:sp>
-        <p:nvSpPr>
-          <p:cNvPr id="35" name="Text 33"/>
-          <p:cNvSpPr/>
-          <p:nvPr/>
-        </p:nvSpPr>
-        <p:spPr>
-          <a:xfrm>
-            <a:off x="6428232" y="3364992"/>
-            <a:ext cx="1645920" cy="475488"/>
-          </a:xfrm>
-          <a:prstGeom prst="rect">
-            <a:avLst/>
-          </a:prstGeom>
-          <a:noFill/>
-          <a:ln/>
-        </p:spPr>
-        <p:txBody>
-          <a:bodyPr wrap="square" lIns="0" tIns="0" rIns="0" bIns="0" rtlCol="0" anchor="ctr"/>
-          <a:lstStyle/>
-          <a:p>
-            <a:pPr algn="ctr" indent="0" marL="0">
-              <a:buNone/>
-            </a:pPr>
-            <a:r>
-              <a:rPr lang="en-US" sz="1400" b="1" dirty="0">
-                <a:solidFill>
-                  <a:srgbClr val="0D9488"/>
-                </a:solidFill>
-                <a:latin typeface="Trebuchet MS" pitchFamily="34" charset="0"/>
-                <a:ea typeface="Trebuchet MS" pitchFamily="34" charset="-122"/>
-                <a:cs typeface="Trebuchet MS" pitchFamily="34" charset="-120"/>
-              </a:rPr>
-              <a:t>es</a:t>
-            </a:r>
-            <a:endParaRPr lang="en-US" sz="1400" dirty="0"/>
-          </a:p>
-        </p:txBody>
-      </p:sp>
-      <p:sp>
-        <p:nvSpPr>
-          <p:cNvPr id="36" name="Shape 34"/>
-          <p:cNvSpPr/>
-          <p:nvPr/>
-        </p:nvSpPr>
-        <p:spPr>
-          <a:xfrm>
-            <a:off x="365760" y="4096512"/>
-            <a:ext cx="1371600" cy="804672"/>
+              <a:t>Phonemes</a:t>
+            </a:r>
+            <a:endParaRPr lang="en-US" sz="1100" dirty="0"/>
+          </a:p>
+        </p:txBody>
+      </p:sp>
+      <p:sp>
+        <p:nvSpPr>
+          <p:cNvPr id="32" name="Shape 30"/>
+          <p:cNvSpPr/>
+          <p:nvPr/>
+        </p:nvSpPr>
+        <p:spPr>
+          <a:xfrm>
+            <a:off x="1874520" y="4096512"/>
+            <a:ext cx="6903720" cy="804672"/>
           </a:xfrm>
           <a:prstGeom prst="rect">
             <a:avLst>
@@ -14291,85 +13896,19 @@
             </a:avLst>
           </a:prstGeom>
           <a:solidFill>
-            <a:srgbClr val="E2E8F0"/>
+            <a:srgbClr val="F8FAFC"/>
           </a:solidFill>
           <a:ln w="12700">
             <a:solidFill>
               <a:srgbClr val="E2E8F0"/>
             </a:solidFill>
-            <a:prstDash val="solid"/>
-          </a:ln>
-        </p:spPr>
-      </p:sp>
-      <p:sp>
-        <p:nvSpPr>
-          <p:cNvPr id="37" name="Text 35"/>
-          <p:cNvSpPr/>
-          <p:nvPr/>
-        </p:nvSpPr>
-        <p:spPr>
-          <a:xfrm>
-            <a:off x="365760" y="4096512"/>
-            <a:ext cx="1371600" cy="804672"/>
-          </a:xfrm>
-          <a:prstGeom prst="rect">
-            <a:avLst/>
-          </a:prstGeom>
-          <a:noFill/>
-          <a:ln/>
-        </p:spPr>
-        <p:txBody>
-          <a:bodyPr wrap="square" lIns="0" tIns="0" rIns="0" bIns="0" rtlCol="0" anchor="ctr"/>
-          <a:lstStyle/>
-          <a:p>
-            <a:pPr algn="ctr" indent="0" marL="0">
-              <a:buNone/>
-            </a:pPr>
-            <a:r>
-              <a:rPr lang="en-US" sz="1100" b="1" dirty="0">
-                <a:solidFill>
-                  <a:srgbClr val="475569"/>
-                </a:solidFill>
-                <a:latin typeface="Trebuchet MS" pitchFamily="34" charset="0"/>
-                <a:ea typeface="Trebuchet MS" pitchFamily="34" charset="-122"/>
-                <a:cs typeface="Trebuchet MS" pitchFamily="34" charset="-120"/>
-              </a:rPr>
-              <a:t>Phonemes</a:t>
-            </a:r>
-            <a:endParaRPr lang="en-US" sz="1100" dirty="0"/>
-          </a:p>
-        </p:txBody>
-      </p:sp>
-      <p:sp>
-        <p:nvSpPr>
-          <p:cNvPr id="38" name="Shape 36"/>
-          <p:cNvSpPr/>
-          <p:nvPr/>
-        </p:nvSpPr>
-        <p:spPr>
-          <a:xfrm>
-            <a:off x="1874520" y="4096512"/>
-            <a:ext cx="6903720" cy="804672"/>
-          </a:xfrm>
-          <a:prstGeom prst="rect">
-            <a:avLst>
-              <a:gd name="adj" fmla="val 6818"/>
-            </a:avLst>
-          </a:prstGeom>
-          <a:solidFill>
-            <a:srgbClr val="F8FAFC"/>
-          </a:solidFill>
-          <a:ln w="12700">
-            <a:solidFill>
-              <a:srgbClr val="E2E8F0"/>
-            </a:solidFill>
             <a:prstDash val="dash"/>
           </a:ln>
         </p:spPr>
       </p:sp>
       <p:sp>
         <p:nvSpPr>
-          <p:cNvPr id="39" name="Text 37"/>
+          <p:cNvPr id="33" name="Text 31"/>
           <p:cNvSpPr/>
           <p:nvPr/>
         </p:nvSpPr>
@@ -15096,7 +14635,7 @@
                 <a:ea typeface="Trebuchet MS" pitchFamily="34" charset="-122"/>
                 <a:cs typeface="Trebuchet MS" pitchFamily="34" charset="-120"/>
               </a:rPr>
-              <a:t>reflexes</a:t>
+              <a:t>reflex</a:t>
             </a:r>
             <a:endParaRPr lang="en-US" sz="2800" dirty="0"/>
           </a:p>
@@ -15176,7 +14715,7 @@
         </p:nvSpPr>
         <p:spPr>
           <a:xfrm>
-            <a:off x="2221992" y="2258568"/>
+            <a:off x="2938272" y="2258568"/>
             <a:ext cx="1828800" cy="292608"/>
           </a:xfrm>
           <a:prstGeom prst="rect">
@@ -15210,7 +14749,7 @@
         </p:nvSpPr>
         <p:spPr>
           <a:xfrm>
-            <a:off x="2221992" y="2258568"/>
+            <a:off x="2938272" y="2258568"/>
             <a:ext cx="1828800" cy="292608"/>
           </a:xfrm>
           <a:prstGeom prst="rect">
@@ -15249,7 +14788,7 @@
         </p:nvSpPr>
         <p:spPr>
           <a:xfrm>
-            <a:off x="2221992" y="2569464"/>
+            <a:off x="2938272" y="2569464"/>
             <a:ext cx="1828800" cy="201168"/>
           </a:xfrm>
           <a:prstGeom prst="rect">
@@ -15274,7 +14813,7 @@
                 <a:ea typeface="Calibri" pitchFamily="34" charset="-122"/>
                 <a:cs typeface="Calibri" pitchFamily="34" charset="-120"/>
               </a:rPr>
-              <a:t>back</a:t>
+              <a:t>back or again</a:t>
             </a:r>
             <a:endParaRPr lang="en-US" sz="850" dirty="0"/>
           </a:p>
@@ -15288,7 +14827,7 @@
         </p:nvSpPr>
         <p:spPr>
           <a:xfrm>
-            <a:off x="4370832" y="2258568"/>
+            <a:off x="5803392" y="2258568"/>
             <a:ext cx="1828800" cy="292608"/>
           </a:xfrm>
           <a:prstGeom prst="rect">
@@ -15322,7 +14861,7 @@
         </p:nvSpPr>
         <p:spPr>
           <a:xfrm>
-            <a:off x="4370832" y="2258568"/>
+            <a:off x="5803392" y="2258568"/>
             <a:ext cx="1828800" cy="292608"/>
           </a:xfrm>
           <a:prstGeom prst="rect">
@@ -15361,7 +14900,7 @@
         </p:nvSpPr>
         <p:spPr>
           <a:xfrm>
-            <a:off x="4370832" y="2569464"/>
+            <a:off x="5803392" y="2569464"/>
             <a:ext cx="1828800" cy="201168"/>
           </a:xfrm>
           <a:prstGeom prst="rect">
@@ -15400,30 +14939,23 @@
         </p:nvSpPr>
         <p:spPr>
           <a:xfrm>
-            <a:off x="6519672" y="2258568"/>
-            <a:ext cx="1828800" cy="292608"/>
+            <a:off x="365760" y="3273552"/>
+            <a:ext cx="1371600" cy="658368"/>
           </a:xfrm>
           <a:prstGeom prst="rect">
             <a:avLst>
-              <a:gd name="adj" fmla="val 25000"/>
+              <a:gd name="adj" fmla="val 8333"/>
             </a:avLst>
           </a:prstGeom>
           <a:solidFill>
-            <a:srgbClr val="FCE7F3"/>
-          </a:solidFill>
-          <a:ln w="19050">
-            <a:solidFill>
-              <a:srgbClr val="DB2777"/>
-            </a:solidFill>
-            <a:prstDash val="solid"/>
-          </a:ln>
-          <a:effectLst>
-            <a:outerShdw sx="100000" sy="100000" kx="0" ky="0" algn="bl" rotWithShape="0" blurRad="101600" dist="38100" dir="8100000">
-              <a:srgbClr val="000000">
-                <a:alpha val="12000"/>
-              </a:srgbClr>
-            </a:outerShdw>
-          </a:effectLst>
+            <a:srgbClr val="E2E8F0"/>
+          </a:solidFill>
+          <a:ln w="12700">
+            <a:solidFill>
+              <a:srgbClr val="E2E8F0"/>
+            </a:solidFill>
+            <a:prstDash val="solid"/>
+          </a:ln>
         </p:spPr>
       </p:sp>
       <p:sp>
@@ -15434,47 +14966,668 @@
         </p:nvSpPr>
         <p:spPr>
           <a:xfrm>
-            <a:off x="6519672" y="2258568"/>
-            <a:ext cx="1828800" cy="292608"/>
-          </a:xfrm>
-          <a:prstGeom prst="rect">
-            <a:avLst/>
-          </a:prstGeom>
-          <a:noFill/>
-          <a:ln/>
-        </p:spPr>
-        <p:txBody>
-          <a:bodyPr wrap="square" lIns="0" tIns="0" rIns="0" bIns="0" rtlCol="0" anchor="ctr"/>
-          <a:lstStyle/>
-          <a:p>
-            <a:pPr algn="ctr" indent="0" marL="0">
-              <a:buNone/>
-            </a:pPr>
-            <a:r>
-              <a:rPr lang="en-US" sz="1300" b="1" dirty="0">
-                <a:solidFill>
-                  <a:srgbClr val="9D174D"/>
+            <a:off x="365760" y="3273552"/>
+            <a:ext cx="1371600" cy="658368"/>
+          </a:xfrm>
+          <a:prstGeom prst="rect">
+            <a:avLst/>
+          </a:prstGeom>
+          <a:noFill/>
+          <a:ln/>
+        </p:spPr>
+        <p:txBody>
+          <a:bodyPr wrap="square" lIns="0" tIns="0" rIns="0" bIns="0" rtlCol="0" anchor="ctr"/>
+          <a:lstStyle/>
+          <a:p>
+            <a:pPr algn="ctr" indent="0" marL="0">
+              <a:buNone/>
+            </a:pPr>
+            <a:r>
+              <a:rPr lang="en-US" sz="1100" b="1" dirty="0">
+                <a:solidFill>
+                  <a:srgbClr val="475569"/>
                 </a:solidFill>
                 <a:latin typeface="Trebuchet MS" pitchFamily="34" charset="0"/>
                 <a:ea typeface="Trebuchet MS" pitchFamily="34" charset="-122"/>
                 <a:cs typeface="Trebuchet MS" pitchFamily="34" charset="-120"/>
               </a:rPr>
-              <a:t>es</a:t>
-            </a:r>
-            <a:endParaRPr lang="en-US" sz="1300" dirty="0"/>
-          </a:p>
-        </p:txBody>
-      </p:sp>
-      <p:sp>
-        <p:nvSpPr>
-          <p:cNvPr id="24" name="Text 22"/>
-          <p:cNvSpPr/>
-          <p:nvPr/>
-        </p:nvSpPr>
-        <p:spPr>
-          <a:xfrm>
-            <a:off x="6519672" y="2569464"/>
-            <a:ext cx="1828800" cy="201168"/>
+              <a:t>Syllables</a:t>
+            </a:r>
+            <a:endParaRPr lang="en-US" sz="1100" dirty="0"/>
+          </a:p>
+        </p:txBody>
+      </p:sp>
+      <p:sp>
+        <p:nvSpPr>
+          <p:cNvPr id="24" name="Shape 22"/>
+          <p:cNvSpPr/>
+          <p:nvPr/>
+        </p:nvSpPr>
+        <p:spPr>
+          <a:xfrm>
+            <a:off x="1874520" y="3273552"/>
+            <a:ext cx="6903720" cy="658368"/>
+          </a:xfrm>
+          <a:prstGeom prst="rect">
+            <a:avLst>
+              <a:gd name="adj" fmla="val 8333"/>
+            </a:avLst>
+          </a:prstGeom>
+          <a:solidFill>
+            <a:srgbClr val="CCFBF1"/>
+          </a:solidFill>
+          <a:ln w="12700">
+            <a:solidFill>
+              <a:srgbClr val="0D9488"/>
+            </a:solidFill>
+            <a:prstDash val="solid"/>
+          </a:ln>
+        </p:spPr>
+      </p:sp>
+      <p:sp>
+        <p:nvSpPr>
+          <p:cNvPr id="25" name="Shape 23"/>
+          <p:cNvSpPr/>
+          <p:nvPr/>
+        </p:nvSpPr>
+        <p:spPr>
+          <a:xfrm>
+            <a:off x="2999232" y="3364992"/>
+            <a:ext cx="1645920" cy="475488"/>
+          </a:xfrm>
+          <a:prstGeom prst="rect">
+            <a:avLst>
+              <a:gd name="adj" fmla="val 9615"/>
+            </a:avLst>
+          </a:prstGeom>
+          <a:solidFill>
+            <a:srgbClr val="FFFFFF"/>
+          </a:solidFill>
+          <a:ln w="12700">
+            <a:solidFill>
+              <a:srgbClr val="0D9488"/>
+            </a:solidFill>
+            <a:prstDash val="solid"/>
+          </a:ln>
+        </p:spPr>
+      </p:sp>
+      <p:sp>
+        <p:nvSpPr>
+          <p:cNvPr id="26" name="Text 24"/>
+          <p:cNvSpPr/>
+          <p:nvPr/>
+        </p:nvSpPr>
+        <p:spPr>
+          <a:xfrm>
+            <a:off x="2999232" y="3364992"/>
+            <a:ext cx="1645920" cy="475488"/>
+          </a:xfrm>
+          <a:prstGeom prst="rect">
+            <a:avLst/>
+          </a:prstGeom>
+          <a:noFill/>
+          <a:ln/>
+        </p:spPr>
+        <p:txBody>
+          <a:bodyPr wrap="square" lIns="0" tIns="0" rIns="0" bIns="0" rtlCol="0" anchor="ctr"/>
+          <a:lstStyle/>
+          <a:p>
+            <a:pPr algn="ctr" indent="0" marL="0">
+              <a:buNone/>
+            </a:pPr>
+            <a:r>
+              <a:rPr lang="en-US" sz="1400" b="1" dirty="0">
+                <a:solidFill>
+                  <a:srgbClr val="0D9488"/>
+                </a:solidFill>
+                <a:latin typeface="Trebuchet MS" pitchFamily="34" charset="0"/>
+                <a:ea typeface="Trebuchet MS" pitchFamily="34" charset="-122"/>
+                <a:cs typeface="Trebuchet MS" pitchFamily="34" charset="-120"/>
+              </a:rPr>
+              <a:t>re</a:t>
+            </a:r>
+            <a:endParaRPr lang="en-US" sz="1400" dirty="0"/>
+          </a:p>
+        </p:txBody>
+      </p:sp>
+      <p:sp>
+        <p:nvSpPr>
+          <p:cNvPr id="27" name="Text 25"/>
+          <p:cNvSpPr/>
+          <p:nvPr/>
+        </p:nvSpPr>
+        <p:spPr>
+          <a:xfrm>
+            <a:off x="4645152" y="3364992"/>
+            <a:ext cx="1097280" cy="475488"/>
+          </a:xfrm>
+          <a:prstGeom prst="rect">
+            <a:avLst/>
+          </a:prstGeom>
+          <a:noFill/>
+          <a:ln/>
+        </p:spPr>
+        <p:txBody>
+          <a:bodyPr wrap="square" lIns="0" tIns="0" rIns="0" bIns="0" rtlCol="0" anchor="ctr"/>
+          <a:lstStyle/>
+          <a:p>
+            <a:pPr algn="ctr" indent="0" marL="0">
+              <a:buNone/>
+            </a:pPr>
+            <a:r>
+              <a:rPr lang="en-US" sz="1600" b="1" dirty="0">
+                <a:solidFill>
+                  <a:srgbClr val="0D9488"/>
+                </a:solidFill>
+                <a:latin typeface="Trebuchet MS" pitchFamily="34" charset="0"/>
+                <a:ea typeface="Trebuchet MS" pitchFamily="34" charset="-122"/>
+                <a:cs typeface="Trebuchet MS" pitchFamily="34" charset="-120"/>
+              </a:rPr>
+              <a:t>·</a:t>
+            </a:r>
+            <a:endParaRPr lang="en-US" sz="1600" dirty="0"/>
+          </a:p>
+        </p:txBody>
+      </p:sp>
+      <p:sp>
+        <p:nvSpPr>
+          <p:cNvPr id="28" name="Shape 26"/>
+          <p:cNvSpPr/>
+          <p:nvPr/>
+        </p:nvSpPr>
+        <p:spPr>
+          <a:xfrm>
+            <a:off x="5742432" y="3364992"/>
+            <a:ext cx="1645920" cy="475488"/>
+          </a:xfrm>
+          <a:prstGeom prst="rect">
+            <a:avLst>
+              <a:gd name="adj" fmla="val 9615"/>
+            </a:avLst>
+          </a:prstGeom>
+          <a:solidFill>
+            <a:srgbClr val="FFFFFF"/>
+          </a:solidFill>
+          <a:ln w="12700">
+            <a:solidFill>
+              <a:srgbClr val="0D9488"/>
+            </a:solidFill>
+            <a:prstDash val="solid"/>
+          </a:ln>
+        </p:spPr>
+      </p:sp>
+      <p:sp>
+        <p:nvSpPr>
+          <p:cNvPr id="29" name="Text 27"/>
+          <p:cNvSpPr/>
+          <p:nvPr/>
+        </p:nvSpPr>
+        <p:spPr>
+          <a:xfrm>
+            <a:off x="5742432" y="3364992"/>
+            <a:ext cx="1645920" cy="475488"/>
+          </a:xfrm>
+          <a:prstGeom prst="rect">
+            <a:avLst/>
+          </a:prstGeom>
+          <a:noFill/>
+          <a:ln/>
+        </p:spPr>
+        <p:txBody>
+          <a:bodyPr wrap="square" lIns="0" tIns="0" rIns="0" bIns="0" rtlCol="0" anchor="ctr"/>
+          <a:lstStyle/>
+          <a:p>
+            <a:pPr algn="ctr" indent="0" marL="0">
+              <a:buNone/>
+            </a:pPr>
+            <a:r>
+              <a:rPr lang="en-US" sz="1400" b="1" dirty="0">
+                <a:solidFill>
+                  <a:srgbClr val="0D9488"/>
+                </a:solidFill>
+                <a:latin typeface="Trebuchet MS" pitchFamily="34" charset="0"/>
+                <a:ea typeface="Trebuchet MS" pitchFamily="34" charset="-122"/>
+                <a:cs typeface="Trebuchet MS" pitchFamily="34" charset="-120"/>
+              </a:rPr>
+              <a:t>flex</a:t>
+            </a:r>
+            <a:endParaRPr lang="en-US" sz="1400" dirty="0"/>
+          </a:p>
+        </p:txBody>
+      </p:sp>
+      <p:sp>
+        <p:nvSpPr>
+          <p:cNvPr id="30" name="Shape 28"/>
+          <p:cNvSpPr/>
+          <p:nvPr/>
+        </p:nvSpPr>
+        <p:spPr>
+          <a:xfrm>
+            <a:off x="365760" y="4096512"/>
+            <a:ext cx="1371600" cy="804672"/>
+          </a:xfrm>
+          <a:prstGeom prst="rect">
+            <a:avLst>
+              <a:gd name="adj" fmla="val 6818"/>
+            </a:avLst>
+          </a:prstGeom>
+          <a:solidFill>
+            <a:srgbClr val="E2E8F0"/>
+          </a:solidFill>
+          <a:ln w="12700">
+            <a:solidFill>
+              <a:srgbClr val="E2E8F0"/>
+            </a:solidFill>
+            <a:prstDash val="solid"/>
+          </a:ln>
+        </p:spPr>
+      </p:sp>
+      <p:sp>
+        <p:nvSpPr>
+          <p:cNvPr id="31" name="Text 29"/>
+          <p:cNvSpPr/>
+          <p:nvPr/>
+        </p:nvSpPr>
+        <p:spPr>
+          <a:xfrm>
+            <a:off x="365760" y="4096512"/>
+            <a:ext cx="1371600" cy="804672"/>
+          </a:xfrm>
+          <a:prstGeom prst="rect">
+            <a:avLst/>
+          </a:prstGeom>
+          <a:noFill/>
+          <a:ln/>
+        </p:spPr>
+        <p:txBody>
+          <a:bodyPr wrap="square" lIns="0" tIns="0" rIns="0" bIns="0" rtlCol="0" anchor="ctr"/>
+          <a:lstStyle/>
+          <a:p>
+            <a:pPr algn="ctr" indent="0" marL="0">
+              <a:buNone/>
+            </a:pPr>
+            <a:r>
+              <a:rPr lang="en-US" sz="1100" b="1" dirty="0">
+                <a:solidFill>
+                  <a:srgbClr val="475569"/>
+                </a:solidFill>
+                <a:latin typeface="Trebuchet MS" pitchFamily="34" charset="0"/>
+                <a:ea typeface="Trebuchet MS" pitchFamily="34" charset="-122"/>
+                <a:cs typeface="Trebuchet MS" pitchFamily="34" charset="-120"/>
+              </a:rPr>
+              <a:t>Phonemes</a:t>
+            </a:r>
+            <a:endParaRPr lang="en-US" sz="1100" dirty="0"/>
+          </a:p>
+        </p:txBody>
+      </p:sp>
+      <p:sp>
+        <p:nvSpPr>
+          <p:cNvPr id="32" name="Shape 30"/>
+          <p:cNvSpPr/>
+          <p:nvPr/>
+        </p:nvSpPr>
+        <p:spPr>
+          <a:xfrm>
+            <a:off x="1874520" y="4096512"/>
+            <a:ext cx="6903720" cy="804672"/>
+          </a:xfrm>
+          <a:prstGeom prst="rect">
+            <a:avLst>
+              <a:gd name="adj" fmla="val 6818"/>
+            </a:avLst>
+          </a:prstGeom>
+          <a:solidFill>
+            <a:srgbClr val="FCE7F3"/>
+          </a:solidFill>
+          <a:ln w="12700">
+            <a:solidFill>
+              <a:srgbClr val="DB2777"/>
+            </a:solidFill>
+            <a:prstDash val="solid"/>
+          </a:ln>
+        </p:spPr>
+      </p:sp>
+      <p:sp>
+        <p:nvSpPr>
+          <p:cNvPr id="33" name="Shape 31"/>
+          <p:cNvSpPr/>
+          <p:nvPr/>
+        </p:nvSpPr>
+        <p:spPr>
+          <a:xfrm>
+            <a:off x="2427732" y="4169664"/>
+            <a:ext cx="685800" cy="384048"/>
+          </a:xfrm>
+          <a:prstGeom prst="rect">
+            <a:avLst>
+              <a:gd name="adj" fmla="val 9524"/>
+            </a:avLst>
+          </a:prstGeom>
+          <a:solidFill>
+            <a:srgbClr val="FFFFFF"/>
+          </a:solidFill>
+          <a:ln w="12700">
+            <a:solidFill>
+              <a:srgbClr val="DB2777"/>
+            </a:solidFill>
+            <a:prstDash val="solid"/>
+          </a:ln>
+        </p:spPr>
+      </p:sp>
+      <p:sp>
+        <p:nvSpPr>
+          <p:cNvPr id="34" name="Text 32"/>
+          <p:cNvSpPr/>
+          <p:nvPr/>
+        </p:nvSpPr>
+        <p:spPr>
+          <a:xfrm>
+            <a:off x="2427732" y="4169664"/>
+            <a:ext cx="685800" cy="384048"/>
+          </a:xfrm>
+          <a:prstGeom prst="rect">
+            <a:avLst/>
+          </a:prstGeom>
+          <a:noFill/>
+          <a:ln/>
+        </p:spPr>
+        <p:txBody>
+          <a:bodyPr wrap="square" lIns="0" tIns="0" rIns="0" bIns="0" rtlCol="0" anchor="ctr"/>
+          <a:lstStyle/>
+          <a:p>
+            <a:pPr algn="ctr" indent="0" marL="0">
+              <a:buNone/>
+            </a:pPr>
+            <a:r>
+              <a:rPr lang="en-US" sz="900" b="1" dirty="0">
+                <a:solidFill>
+                  <a:srgbClr val="9D174D"/>
+                </a:solidFill>
+                <a:latin typeface="Trebuchet MS" pitchFamily="34" charset="0"/>
+                <a:ea typeface="Trebuchet MS" pitchFamily="34" charset="-122"/>
+                <a:cs typeface="Trebuchet MS" pitchFamily="34" charset="-120"/>
+              </a:rPr>
+              <a:t>r</a:t>
+            </a:r>
+            <a:endParaRPr lang="en-US" sz="900" dirty="0"/>
+          </a:p>
+        </p:txBody>
+      </p:sp>
+      <p:sp>
+        <p:nvSpPr>
+          <p:cNvPr id="35" name="Shape 33"/>
+          <p:cNvSpPr/>
+          <p:nvPr/>
+        </p:nvSpPr>
+        <p:spPr>
+          <a:xfrm>
+            <a:off x="3639312" y="4169664"/>
+            <a:ext cx="685800" cy="384048"/>
+          </a:xfrm>
+          <a:prstGeom prst="rect">
+            <a:avLst>
+              <a:gd name="adj" fmla="val 9524"/>
+            </a:avLst>
+          </a:prstGeom>
+          <a:solidFill>
+            <a:srgbClr val="FFFFFF"/>
+          </a:solidFill>
+          <a:ln w="12700">
+            <a:solidFill>
+              <a:srgbClr val="DB2777"/>
+            </a:solidFill>
+            <a:prstDash val="solid"/>
+          </a:ln>
+        </p:spPr>
+      </p:sp>
+      <p:sp>
+        <p:nvSpPr>
+          <p:cNvPr id="36" name="Text 34"/>
+          <p:cNvSpPr/>
+          <p:nvPr/>
+        </p:nvSpPr>
+        <p:spPr>
+          <a:xfrm>
+            <a:off x="3639312" y="4169664"/>
+            <a:ext cx="685800" cy="384048"/>
+          </a:xfrm>
+          <a:prstGeom prst="rect">
+            <a:avLst/>
+          </a:prstGeom>
+          <a:noFill/>
+          <a:ln/>
+        </p:spPr>
+        <p:txBody>
+          <a:bodyPr wrap="square" lIns="0" tIns="0" rIns="0" bIns="0" rtlCol="0" anchor="ctr"/>
+          <a:lstStyle/>
+          <a:p>
+            <a:pPr algn="ctr" indent="0" marL="0">
+              <a:buNone/>
+            </a:pPr>
+            <a:r>
+              <a:rPr lang="en-US" sz="900" b="1" dirty="0">
+                <a:solidFill>
+                  <a:srgbClr val="9D174D"/>
+                </a:solidFill>
+                <a:latin typeface="Trebuchet MS" pitchFamily="34" charset="0"/>
+                <a:ea typeface="Trebuchet MS" pitchFamily="34" charset="-122"/>
+                <a:cs typeface="Trebuchet MS" pitchFamily="34" charset="-120"/>
+              </a:rPr>
+              <a:t>e</a:t>
+            </a:r>
+            <a:endParaRPr lang="en-US" sz="900" dirty="0"/>
+          </a:p>
+        </p:txBody>
+      </p:sp>
+      <p:sp>
+        <p:nvSpPr>
+          <p:cNvPr id="37" name="Shape 35"/>
+          <p:cNvSpPr/>
+          <p:nvPr/>
+        </p:nvSpPr>
+        <p:spPr>
+          <a:xfrm>
+            <a:off x="4850892" y="4169664"/>
+            <a:ext cx="685800" cy="384048"/>
+          </a:xfrm>
+          <a:prstGeom prst="rect">
+            <a:avLst>
+              <a:gd name="adj" fmla="val 9524"/>
+            </a:avLst>
+          </a:prstGeom>
+          <a:solidFill>
+            <a:srgbClr val="FFFFFF"/>
+          </a:solidFill>
+          <a:ln w="12700">
+            <a:solidFill>
+              <a:srgbClr val="DB2777"/>
+            </a:solidFill>
+            <a:prstDash val="solid"/>
+          </a:ln>
+        </p:spPr>
+      </p:sp>
+      <p:sp>
+        <p:nvSpPr>
+          <p:cNvPr id="38" name="Text 36"/>
+          <p:cNvSpPr/>
+          <p:nvPr/>
+        </p:nvSpPr>
+        <p:spPr>
+          <a:xfrm>
+            <a:off x="4850892" y="4169664"/>
+            <a:ext cx="685800" cy="384048"/>
+          </a:xfrm>
+          <a:prstGeom prst="rect">
+            <a:avLst/>
+          </a:prstGeom>
+          <a:noFill/>
+          <a:ln/>
+        </p:spPr>
+        <p:txBody>
+          <a:bodyPr wrap="square" lIns="0" tIns="0" rIns="0" bIns="0" rtlCol="0" anchor="ctr"/>
+          <a:lstStyle/>
+          <a:p>
+            <a:pPr algn="ctr" indent="0" marL="0">
+              <a:buNone/>
+            </a:pPr>
+            <a:r>
+              <a:rPr lang="en-US" sz="900" b="1" dirty="0">
+                <a:solidFill>
+                  <a:srgbClr val="9D174D"/>
+                </a:solidFill>
+                <a:latin typeface="Trebuchet MS" pitchFamily="34" charset="0"/>
+                <a:ea typeface="Trebuchet MS" pitchFamily="34" charset="-122"/>
+                <a:cs typeface="Trebuchet MS" pitchFamily="34" charset="-120"/>
+              </a:rPr>
+              <a:t>fl</a:t>
+            </a:r>
+            <a:endParaRPr lang="en-US" sz="900" dirty="0"/>
+          </a:p>
+        </p:txBody>
+      </p:sp>
+      <p:sp>
+        <p:nvSpPr>
+          <p:cNvPr id="39" name="Shape 37"/>
+          <p:cNvSpPr/>
+          <p:nvPr/>
+        </p:nvSpPr>
+        <p:spPr>
+          <a:xfrm>
+            <a:off x="6062472" y="4169664"/>
+            <a:ext cx="685800" cy="384048"/>
+          </a:xfrm>
+          <a:prstGeom prst="rect">
+            <a:avLst>
+              <a:gd name="adj" fmla="val 9524"/>
+            </a:avLst>
+          </a:prstGeom>
+          <a:solidFill>
+            <a:srgbClr val="FFFFFF"/>
+          </a:solidFill>
+          <a:ln w="12700">
+            <a:solidFill>
+              <a:srgbClr val="DB2777"/>
+            </a:solidFill>
+            <a:prstDash val="solid"/>
+          </a:ln>
+        </p:spPr>
+      </p:sp>
+      <p:sp>
+        <p:nvSpPr>
+          <p:cNvPr id="40" name="Text 38"/>
+          <p:cNvSpPr/>
+          <p:nvPr/>
+        </p:nvSpPr>
+        <p:spPr>
+          <a:xfrm>
+            <a:off x="6062472" y="4169664"/>
+            <a:ext cx="685800" cy="384048"/>
+          </a:xfrm>
+          <a:prstGeom prst="rect">
+            <a:avLst/>
+          </a:prstGeom>
+          <a:noFill/>
+          <a:ln/>
+        </p:spPr>
+        <p:txBody>
+          <a:bodyPr wrap="square" lIns="0" tIns="0" rIns="0" bIns="0" rtlCol="0" anchor="ctr"/>
+          <a:lstStyle/>
+          <a:p>
+            <a:pPr algn="ctr" indent="0" marL="0">
+              <a:buNone/>
+            </a:pPr>
+            <a:r>
+              <a:rPr lang="en-US" sz="900" b="1" dirty="0">
+                <a:solidFill>
+                  <a:srgbClr val="9D174D"/>
+                </a:solidFill>
+                <a:latin typeface="Trebuchet MS" pitchFamily="34" charset="0"/>
+                <a:ea typeface="Trebuchet MS" pitchFamily="34" charset="-122"/>
+                <a:cs typeface="Trebuchet MS" pitchFamily="34" charset="-120"/>
+              </a:rPr>
+              <a:t>e</a:t>
+            </a:r>
+            <a:endParaRPr lang="en-US" sz="900" dirty="0"/>
+          </a:p>
+        </p:txBody>
+      </p:sp>
+      <p:sp>
+        <p:nvSpPr>
+          <p:cNvPr id="41" name="Shape 39"/>
+          <p:cNvSpPr/>
+          <p:nvPr/>
+        </p:nvSpPr>
+        <p:spPr>
+          <a:xfrm>
+            <a:off x="7274052" y="4169664"/>
+            <a:ext cx="685800" cy="384048"/>
+          </a:xfrm>
+          <a:prstGeom prst="rect">
+            <a:avLst>
+              <a:gd name="adj" fmla="val 9524"/>
+            </a:avLst>
+          </a:prstGeom>
+          <a:solidFill>
+            <a:srgbClr val="FFFFFF"/>
+          </a:solidFill>
+          <a:ln w="12700">
+            <a:solidFill>
+              <a:srgbClr val="DB2777"/>
+            </a:solidFill>
+            <a:prstDash val="solid"/>
+          </a:ln>
+        </p:spPr>
+      </p:sp>
+      <p:sp>
+        <p:nvSpPr>
+          <p:cNvPr id="42" name="Text 40"/>
+          <p:cNvSpPr/>
+          <p:nvPr/>
+        </p:nvSpPr>
+        <p:spPr>
+          <a:xfrm>
+            <a:off x="7274052" y="4169664"/>
+            <a:ext cx="685800" cy="384048"/>
+          </a:xfrm>
+          <a:prstGeom prst="rect">
+            <a:avLst/>
+          </a:prstGeom>
+          <a:noFill/>
+          <a:ln/>
+        </p:spPr>
+        <p:txBody>
+          <a:bodyPr wrap="square" lIns="0" tIns="0" rIns="0" bIns="0" rtlCol="0" anchor="ctr"/>
+          <a:lstStyle/>
+          <a:p>
+            <a:pPr algn="ctr" indent="0" marL="0">
+              <a:buNone/>
+            </a:pPr>
+            <a:r>
+              <a:rPr lang="en-US" sz="900" b="1" dirty="0">
+                <a:solidFill>
+                  <a:srgbClr val="9D174D"/>
+                </a:solidFill>
+                <a:latin typeface="Trebuchet MS" pitchFamily="34" charset="0"/>
+                <a:ea typeface="Trebuchet MS" pitchFamily="34" charset="-122"/>
+                <a:cs typeface="Trebuchet MS" pitchFamily="34" charset="-120"/>
+              </a:rPr>
+              <a:t>x</a:t>
+            </a:r>
+            <a:endParaRPr lang="en-US" sz="900" dirty="0"/>
+          </a:p>
+        </p:txBody>
+      </p:sp>
+      <p:sp>
+        <p:nvSpPr>
+          <p:cNvPr id="43" name="Text 41"/>
+          <p:cNvSpPr/>
+          <p:nvPr/>
+        </p:nvSpPr>
+        <p:spPr>
+          <a:xfrm>
+            <a:off x="7274052" y="4572000"/>
+            <a:ext cx="685800" cy="219456"/>
           </a:xfrm>
           <a:prstGeom prst="rect">
             <a:avLst/>
@@ -15490,1046 +15643,17 @@
               <a:buNone/>
             </a:pPr>
             <a:r>
-              <a:rPr lang="en-US" sz="850" dirty="0">
-                <a:solidFill>
-                  <a:srgbClr val="475569"/>
+              <a:rPr lang="en-US" sz="750" i="1" dirty="0">
+                <a:solidFill>
+                  <a:srgbClr val="94A3B8"/>
                 </a:solidFill>
                 <a:latin typeface="Calibri" pitchFamily="34" charset="0"/>
                 <a:ea typeface="Calibri" pitchFamily="34" charset="-122"/>
                 <a:cs typeface="Calibri" pitchFamily="34" charset="-120"/>
               </a:rPr>
-              <a:t>plural (more than one)</a:t>
-            </a:r>
-            <a:endParaRPr lang="en-US" sz="850" dirty="0"/>
-          </a:p>
-        </p:txBody>
-      </p:sp>
-      <p:sp>
-        <p:nvSpPr>
-          <p:cNvPr id="25" name="Shape 23"/>
-          <p:cNvSpPr/>
-          <p:nvPr/>
-        </p:nvSpPr>
-        <p:spPr>
-          <a:xfrm>
-            <a:off x="365760" y="3273552"/>
-            <a:ext cx="1371600" cy="658368"/>
-          </a:xfrm>
-          <a:prstGeom prst="rect">
-            <a:avLst>
-              <a:gd name="adj" fmla="val 8333"/>
-            </a:avLst>
-          </a:prstGeom>
-          <a:solidFill>
-            <a:srgbClr val="E2E8F0"/>
-          </a:solidFill>
-          <a:ln w="12700">
-            <a:solidFill>
-              <a:srgbClr val="E2E8F0"/>
-            </a:solidFill>
-            <a:prstDash val="solid"/>
-          </a:ln>
-        </p:spPr>
-      </p:sp>
-      <p:sp>
-        <p:nvSpPr>
-          <p:cNvPr id="26" name="Text 24"/>
-          <p:cNvSpPr/>
-          <p:nvPr/>
-        </p:nvSpPr>
-        <p:spPr>
-          <a:xfrm>
-            <a:off x="365760" y="3273552"/>
-            <a:ext cx="1371600" cy="658368"/>
-          </a:xfrm>
-          <a:prstGeom prst="rect">
-            <a:avLst/>
-          </a:prstGeom>
-          <a:noFill/>
-          <a:ln/>
-        </p:spPr>
-        <p:txBody>
-          <a:bodyPr wrap="square" lIns="0" tIns="0" rIns="0" bIns="0" rtlCol="0" anchor="ctr"/>
-          <a:lstStyle/>
-          <a:p>
-            <a:pPr algn="ctr" indent="0" marL="0">
-              <a:buNone/>
-            </a:pPr>
-            <a:r>
-              <a:rPr lang="en-US" sz="1100" b="1" dirty="0">
-                <a:solidFill>
-                  <a:srgbClr val="475569"/>
-                </a:solidFill>
-                <a:latin typeface="Trebuchet MS" pitchFamily="34" charset="0"/>
-                <a:ea typeface="Trebuchet MS" pitchFamily="34" charset="-122"/>
-                <a:cs typeface="Trebuchet MS" pitchFamily="34" charset="-120"/>
-              </a:rPr>
-              <a:t>Syllables</a:t>
-            </a:r>
-            <a:endParaRPr lang="en-US" sz="1100" dirty="0"/>
-          </a:p>
-        </p:txBody>
-      </p:sp>
-      <p:sp>
-        <p:nvSpPr>
-          <p:cNvPr id="27" name="Shape 25"/>
-          <p:cNvSpPr/>
-          <p:nvPr/>
-        </p:nvSpPr>
-        <p:spPr>
-          <a:xfrm>
-            <a:off x="1874520" y="3273552"/>
-            <a:ext cx="6903720" cy="658368"/>
-          </a:xfrm>
-          <a:prstGeom prst="rect">
-            <a:avLst>
-              <a:gd name="adj" fmla="val 8333"/>
-            </a:avLst>
-          </a:prstGeom>
-          <a:solidFill>
-            <a:srgbClr val="CCFBF1"/>
-          </a:solidFill>
-          <a:ln w="12700">
-            <a:solidFill>
-              <a:srgbClr val="0D9488"/>
-            </a:solidFill>
-            <a:prstDash val="solid"/>
-          </a:ln>
-        </p:spPr>
-      </p:sp>
-      <p:sp>
-        <p:nvSpPr>
-          <p:cNvPr id="28" name="Shape 26"/>
-          <p:cNvSpPr/>
-          <p:nvPr/>
-        </p:nvSpPr>
-        <p:spPr>
-          <a:xfrm>
-            <a:off x="2313432" y="3364992"/>
-            <a:ext cx="1645920" cy="475488"/>
-          </a:xfrm>
-          <a:prstGeom prst="rect">
-            <a:avLst>
-              <a:gd name="adj" fmla="val 9615"/>
-            </a:avLst>
-          </a:prstGeom>
-          <a:solidFill>
-            <a:srgbClr val="FFFFFF"/>
-          </a:solidFill>
-          <a:ln w="12700">
-            <a:solidFill>
-              <a:srgbClr val="0D9488"/>
-            </a:solidFill>
-            <a:prstDash val="solid"/>
-          </a:ln>
-        </p:spPr>
-      </p:sp>
-      <p:sp>
-        <p:nvSpPr>
-          <p:cNvPr id="29" name="Text 27"/>
-          <p:cNvSpPr/>
-          <p:nvPr/>
-        </p:nvSpPr>
-        <p:spPr>
-          <a:xfrm>
-            <a:off x="2313432" y="3364992"/>
-            <a:ext cx="1645920" cy="475488"/>
-          </a:xfrm>
-          <a:prstGeom prst="rect">
-            <a:avLst/>
-          </a:prstGeom>
-          <a:noFill/>
-          <a:ln/>
-        </p:spPr>
-        <p:txBody>
-          <a:bodyPr wrap="square" lIns="0" tIns="0" rIns="0" bIns="0" rtlCol="0" anchor="ctr"/>
-          <a:lstStyle/>
-          <a:p>
-            <a:pPr algn="ctr" indent="0" marL="0">
-              <a:buNone/>
-            </a:pPr>
-            <a:r>
-              <a:rPr lang="en-US" sz="1400" b="1" dirty="0">
-                <a:solidFill>
-                  <a:srgbClr val="0D9488"/>
-                </a:solidFill>
-                <a:latin typeface="Trebuchet MS" pitchFamily="34" charset="0"/>
-                <a:ea typeface="Trebuchet MS" pitchFamily="34" charset="-122"/>
-                <a:cs typeface="Trebuchet MS" pitchFamily="34" charset="-120"/>
-              </a:rPr>
-              <a:t>re</a:t>
-            </a:r>
-            <a:endParaRPr lang="en-US" sz="1400" dirty="0"/>
-          </a:p>
-        </p:txBody>
-      </p:sp>
-      <p:sp>
-        <p:nvSpPr>
-          <p:cNvPr id="30" name="Text 28"/>
-          <p:cNvSpPr/>
-          <p:nvPr/>
-        </p:nvSpPr>
-        <p:spPr>
-          <a:xfrm>
-            <a:off x="3959352" y="3364992"/>
-            <a:ext cx="411480" cy="475488"/>
-          </a:xfrm>
-          <a:prstGeom prst="rect">
-            <a:avLst/>
-          </a:prstGeom>
-          <a:noFill/>
-          <a:ln/>
-        </p:spPr>
-        <p:txBody>
-          <a:bodyPr wrap="square" lIns="0" tIns="0" rIns="0" bIns="0" rtlCol="0" anchor="ctr"/>
-          <a:lstStyle/>
-          <a:p>
-            <a:pPr algn="ctr" indent="0" marL="0">
-              <a:buNone/>
-            </a:pPr>
-            <a:r>
-              <a:rPr lang="en-US" sz="1600" b="1" dirty="0">
-                <a:solidFill>
-                  <a:srgbClr val="0D9488"/>
-                </a:solidFill>
-                <a:latin typeface="Trebuchet MS" pitchFamily="34" charset="0"/>
-                <a:ea typeface="Trebuchet MS" pitchFamily="34" charset="-122"/>
-                <a:cs typeface="Trebuchet MS" pitchFamily="34" charset="-120"/>
-              </a:rPr>
-              <a:t>·</a:t>
-            </a:r>
-            <a:endParaRPr lang="en-US" sz="1600" dirty="0"/>
-          </a:p>
-        </p:txBody>
-      </p:sp>
-      <p:sp>
-        <p:nvSpPr>
-          <p:cNvPr id="31" name="Shape 29"/>
-          <p:cNvSpPr/>
-          <p:nvPr/>
-        </p:nvSpPr>
-        <p:spPr>
-          <a:xfrm>
-            <a:off x="4370832" y="3364992"/>
-            <a:ext cx="1645920" cy="475488"/>
-          </a:xfrm>
-          <a:prstGeom prst="rect">
-            <a:avLst>
-              <a:gd name="adj" fmla="val 9615"/>
-            </a:avLst>
-          </a:prstGeom>
-          <a:solidFill>
-            <a:srgbClr val="FFFFFF"/>
-          </a:solidFill>
-          <a:ln w="12700">
-            <a:solidFill>
-              <a:srgbClr val="0D9488"/>
-            </a:solidFill>
-            <a:prstDash val="solid"/>
-          </a:ln>
-        </p:spPr>
-      </p:sp>
-      <p:sp>
-        <p:nvSpPr>
-          <p:cNvPr id="32" name="Text 30"/>
-          <p:cNvSpPr/>
-          <p:nvPr/>
-        </p:nvSpPr>
-        <p:spPr>
-          <a:xfrm>
-            <a:off x="4370832" y="3364992"/>
-            <a:ext cx="1645920" cy="475488"/>
-          </a:xfrm>
-          <a:prstGeom prst="rect">
-            <a:avLst/>
-          </a:prstGeom>
-          <a:noFill/>
-          <a:ln/>
-        </p:spPr>
-        <p:txBody>
-          <a:bodyPr wrap="square" lIns="0" tIns="0" rIns="0" bIns="0" rtlCol="0" anchor="ctr"/>
-          <a:lstStyle/>
-          <a:p>
-            <a:pPr algn="ctr" indent="0" marL="0">
-              <a:buNone/>
-            </a:pPr>
-            <a:r>
-              <a:rPr lang="en-US" sz="1400" b="1" dirty="0">
-                <a:solidFill>
-                  <a:srgbClr val="0D9488"/>
-                </a:solidFill>
-                <a:latin typeface="Trebuchet MS" pitchFamily="34" charset="0"/>
-                <a:ea typeface="Trebuchet MS" pitchFamily="34" charset="-122"/>
-                <a:cs typeface="Trebuchet MS" pitchFamily="34" charset="-120"/>
-              </a:rPr>
-              <a:t>flex</a:t>
-            </a:r>
-            <a:endParaRPr lang="en-US" sz="1400" dirty="0"/>
-          </a:p>
-        </p:txBody>
-      </p:sp>
-      <p:sp>
-        <p:nvSpPr>
-          <p:cNvPr id="33" name="Text 31"/>
-          <p:cNvSpPr/>
-          <p:nvPr/>
-        </p:nvSpPr>
-        <p:spPr>
-          <a:xfrm>
-            <a:off x="6016752" y="3364992"/>
-            <a:ext cx="411480" cy="475488"/>
-          </a:xfrm>
-          <a:prstGeom prst="rect">
-            <a:avLst/>
-          </a:prstGeom>
-          <a:noFill/>
-          <a:ln/>
-        </p:spPr>
-        <p:txBody>
-          <a:bodyPr wrap="square" lIns="0" tIns="0" rIns="0" bIns="0" rtlCol="0" anchor="ctr"/>
-          <a:lstStyle/>
-          <a:p>
-            <a:pPr algn="ctr" indent="0" marL="0">
-              <a:buNone/>
-            </a:pPr>
-            <a:r>
-              <a:rPr lang="en-US" sz="1600" b="1" dirty="0">
-                <a:solidFill>
-                  <a:srgbClr val="0D9488"/>
-                </a:solidFill>
-                <a:latin typeface="Trebuchet MS" pitchFamily="34" charset="0"/>
-                <a:ea typeface="Trebuchet MS" pitchFamily="34" charset="-122"/>
-                <a:cs typeface="Trebuchet MS" pitchFamily="34" charset="-120"/>
-              </a:rPr>
-              <a:t>·</a:t>
-            </a:r>
-            <a:endParaRPr lang="en-US" sz="1600" dirty="0"/>
-          </a:p>
-        </p:txBody>
-      </p:sp>
-      <p:sp>
-        <p:nvSpPr>
-          <p:cNvPr id="34" name="Shape 32"/>
-          <p:cNvSpPr/>
-          <p:nvPr/>
-        </p:nvSpPr>
-        <p:spPr>
-          <a:xfrm>
-            <a:off x="6428232" y="3364992"/>
-            <a:ext cx="1645920" cy="475488"/>
-          </a:xfrm>
-          <a:prstGeom prst="rect">
-            <a:avLst>
-              <a:gd name="adj" fmla="val 9615"/>
-            </a:avLst>
-          </a:prstGeom>
-          <a:solidFill>
-            <a:srgbClr val="FFFFFF"/>
-          </a:solidFill>
-          <a:ln w="12700">
-            <a:solidFill>
-              <a:srgbClr val="0D9488"/>
-            </a:solidFill>
-            <a:prstDash val="solid"/>
-          </a:ln>
-        </p:spPr>
-      </p:sp>
-      <p:sp>
-        <p:nvSpPr>
-          <p:cNvPr id="35" name="Text 33"/>
-          <p:cNvSpPr/>
-          <p:nvPr/>
-        </p:nvSpPr>
-        <p:spPr>
-          <a:xfrm>
-            <a:off x="6428232" y="3364992"/>
-            <a:ext cx="1645920" cy="475488"/>
-          </a:xfrm>
-          <a:prstGeom prst="rect">
-            <a:avLst/>
-          </a:prstGeom>
-          <a:noFill/>
-          <a:ln/>
-        </p:spPr>
-        <p:txBody>
-          <a:bodyPr wrap="square" lIns="0" tIns="0" rIns="0" bIns="0" rtlCol="0" anchor="ctr"/>
-          <a:lstStyle/>
-          <a:p>
-            <a:pPr algn="ctr" indent="0" marL="0">
-              <a:buNone/>
-            </a:pPr>
-            <a:r>
-              <a:rPr lang="en-US" sz="1400" b="1" dirty="0">
-                <a:solidFill>
-                  <a:srgbClr val="0D9488"/>
-                </a:solidFill>
-                <a:latin typeface="Trebuchet MS" pitchFamily="34" charset="0"/>
-                <a:ea typeface="Trebuchet MS" pitchFamily="34" charset="-122"/>
-                <a:cs typeface="Trebuchet MS" pitchFamily="34" charset="-120"/>
-              </a:rPr>
-              <a:t>es</a:t>
-            </a:r>
-            <a:endParaRPr lang="en-US" sz="1400" dirty="0"/>
-          </a:p>
-        </p:txBody>
-      </p:sp>
-      <p:sp>
-        <p:nvSpPr>
-          <p:cNvPr id="36" name="Shape 34"/>
-          <p:cNvSpPr/>
-          <p:nvPr/>
-        </p:nvSpPr>
-        <p:spPr>
-          <a:xfrm>
-            <a:off x="365760" y="4096512"/>
-            <a:ext cx="1371600" cy="804672"/>
-          </a:xfrm>
-          <a:prstGeom prst="rect">
-            <a:avLst>
-              <a:gd name="adj" fmla="val 6818"/>
-            </a:avLst>
-          </a:prstGeom>
-          <a:solidFill>
-            <a:srgbClr val="E2E8F0"/>
-          </a:solidFill>
-          <a:ln w="12700">
-            <a:solidFill>
-              <a:srgbClr val="E2E8F0"/>
-            </a:solidFill>
-            <a:prstDash val="solid"/>
-          </a:ln>
-        </p:spPr>
-      </p:sp>
-      <p:sp>
-        <p:nvSpPr>
-          <p:cNvPr id="37" name="Text 35"/>
-          <p:cNvSpPr/>
-          <p:nvPr/>
-        </p:nvSpPr>
-        <p:spPr>
-          <a:xfrm>
-            <a:off x="365760" y="4096512"/>
-            <a:ext cx="1371600" cy="804672"/>
-          </a:xfrm>
-          <a:prstGeom prst="rect">
-            <a:avLst/>
-          </a:prstGeom>
-          <a:noFill/>
-          <a:ln/>
-        </p:spPr>
-        <p:txBody>
-          <a:bodyPr wrap="square" lIns="0" tIns="0" rIns="0" bIns="0" rtlCol="0" anchor="ctr"/>
-          <a:lstStyle/>
-          <a:p>
-            <a:pPr algn="ctr" indent="0" marL="0">
-              <a:buNone/>
-            </a:pPr>
-            <a:r>
-              <a:rPr lang="en-US" sz="1100" b="1" dirty="0">
-                <a:solidFill>
-                  <a:srgbClr val="475569"/>
-                </a:solidFill>
-                <a:latin typeface="Trebuchet MS" pitchFamily="34" charset="0"/>
-                <a:ea typeface="Trebuchet MS" pitchFamily="34" charset="-122"/>
-                <a:cs typeface="Trebuchet MS" pitchFamily="34" charset="-120"/>
-              </a:rPr>
-              <a:t>Phonemes</a:t>
-            </a:r>
-            <a:endParaRPr lang="en-US" sz="1100" dirty="0"/>
-          </a:p>
-        </p:txBody>
-      </p:sp>
-      <p:sp>
-        <p:nvSpPr>
-          <p:cNvPr id="38" name="Shape 36"/>
-          <p:cNvSpPr/>
-          <p:nvPr/>
-        </p:nvSpPr>
-        <p:spPr>
-          <a:xfrm>
-            <a:off x="1874520" y="4096512"/>
-            <a:ext cx="6903720" cy="804672"/>
-          </a:xfrm>
-          <a:prstGeom prst="rect">
-            <a:avLst>
-              <a:gd name="adj" fmla="val 6818"/>
-            </a:avLst>
-          </a:prstGeom>
-          <a:solidFill>
-            <a:srgbClr val="FCE7F3"/>
-          </a:solidFill>
-          <a:ln w="12700">
-            <a:solidFill>
-              <a:srgbClr val="DB2777"/>
-            </a:solidFill>
-            <a:prstDash val="solid"/>
-          </a:ln>
-        </p:spPr>
-      </p:sp>
-      <p:sp>
-        <p:nvSpPr>
-          <p:cNvPr id="39" name="Shape 37"/>
-          <p:cNvSpPr/>
-          <p:nvPr/>
-        </p:nvSpPr>
-        <p:spPr>
-          <a:xfrm>
-            <a:off x="2023872" y="4169664"/>
-            <a:ext cx="685800" cy="384048"/>
-          </a:xfrm>
-          <a:prstGeom prst="rect">
-            <a:avLst>
-              <a:gd name="adj" fmla="val 9524"/>
-            </a:avLst>
-          </a:prstGeom>
-          <a:solidFill>
-            <a:srgbClr val="FFFFFF"/>
-          </a:solidFill>
-          <a:ln w="12700">
-            <a:solidFill>
-              <a:srgbClr val="DB2777"/>
-            </a:solidFill>
-            <a:prstDash val="solid"/>
-          </a:ln>
-        </p:spPr>
-      </p:sp>
-      <p:sp>
-        <p:nvSpPr>
-          <p:cNvPr id="40" name="Text 38"/>
-          <p:cNvSpPr/>
-          <p:nvPr/>
-        </p:nvSpPr>
-        <p:spPr>
-          <a:xfrm>
-            <a:off x="2023872" y="4169664"/>
-            <a:ext cx="685800" cy="384048"/>
-          </a:xfrm>
-          <a:prstGeom prst="rect">
-            <a:avLst/>
-          </a:prstGeom>
-          <a:noFill/>
-          <a:ln/>
-        </p:spPr>
-        <p:txBody>
-          <a:bodyPr wrap="square" lIns="0" tIns="0" rIns="0" bIns="0" rtlCol="0" anchor="ctr"/>
-          <a:lstStyle/>
-          <a:p>
-            <a:pPr algn="ctr" indent="0" marL="0">
-              <a:buNone/>
-            </a:pPr>
-            <a:r>
-              <a:rPr lang="en-US" sz="900" b="1" dirty="0">
-                <a:solidFill>
-                  <a:srgbClr val="9D174D"/>
-                </a:solidFill>
-                <a:latin typeface="Trebuchet MS" pitchFamily="34" charset="0"/>
-                <a:ea typeface="Trebuchet MS" pitchFamily="34" charset="-122"/>
-                <a:cs typeface="Trebuchet MS" pitchFamily="34" charset="-120"/>
-              </a:rPr>
-              <a:t>r</a:t>
-            </a:r>
-            <a:endParaRPr lang="en-US" sz="900" dirty="0"/>
-          </a:p>
-        </p:txBody>
-      </p:sp>
-      <p:sp>
-        <p:nvSpPr>
-          <p:cNvPr id="41" name="Shape 39"/>
-          <p:cNvSpPr/>
-          <p:nvPr/>
-        </p:nvSpPr>
-        <p:spPr>
-          <a:xfrm>
-            <a:off x="2831592" y="4169664"/>
-            <a:ext cx="685800" cy="384048"/>
-          </a:xfrm>
-          <a:prstGeom prst="rect">
-            <a:avLst>
-              <a:gd name="adj" fmla="val 9524"/>
-            </a:avLst>
-          </a:prstGeom>
-          <a:solidFill>
-            <a:srgbClr val="FFFFFF"/>
-          </a:solidFill>
-          <a:ln w="12700">
-            <a:solidFill>
-              <a:srgbClr val="DB2777"/>
-            </a:solidFill>
-            <a:prstDash val="solid"/>
-          </a:ln>
-        </p:spPr>
-      </p:sp>
-      <p:sp>
-        <p:nvSpPr>
-          <p:cNvPr id="42" name="Text 40"/>
-          <p:cNvSpPr/>
-          <p:nvPr/>
-        </p:nvSpPr>
-        <p:spPr>
-          <a:xfrm>
-            <a:off x="2831592" y="4169664"/>
-            <a:ext cx="685800" cy="384048"/>
-          </a:xfrm>
-          <a:prstGeom prst="rect">
-            <a:avLst/>
-          </a:prstGeom>
-          <a:noFill/>
-          <a:ln/>
-        </p:spPr>
-        <p:txBody>
-          <a:bodyPr wrap="square" lIns="0" tIns="0" rIns="0" bIns="0" rtlCol="0" anchor="ctr"/>
-          <a:lstStyle/>
-          <a:p>
-            <a:pPr algn="ctr" indent="0" marL="0">
-              <a:buNone/>
-            </a:pPr>
-            <a:r>
-              <a:rPr lang="en-US" sz="900" b="1" dirty="0">
-                <a:solidFill>
-                  <a:srgbClr val="9D174D"/>
-                </a:solidFill>
-                <a:latin typeface="Trebuchet MS" pitchFamily="34" charset="0"/>
-                <a:ea typeface="Trebuchet MS" pitchFamily="34" charset="-122"/>
-                <a:cs typeface="Trebuchet MS" pitchFamily="34" charset="-120"/>
-              </a:rPr>
-              <a:t>e</a:t>
-            </a:r>
-            <a:endParaRPr lang="en-US" sz="900" dirty="0"/>
-          </a:p>
-        </p:txBody>
-      </p:sp>
-      <p:sp>
-        <p:nvSpPr>
-          <p:cNvPr id="43" name="Shape 41"/>
-          <p:cNvSpPr/>
-          <p:nvPr/>
-        </p:nvSpPr>
-        <p:spPr>
-          <a:xfrm>
-            <a:off x="3639312" y="4169664"/>
-            <a:ext cx="685800" cy="384048"/>
-          </a:xfrm>
-          <a:prstGeom prst="rect">
-            <a:avLst>
-              <a:gd name="adj" fmla="val 9524"/>
-            </a:avLst>
-          </a:prstGeom>
-          <a:solidFill>
-            <a:srgbClr val="FFFFFF"/>
-          </a:solidFill>
-          <a:ln w="12700">
-            <a:solidFill>
-              <a:srgbClr val="DB2777"/>
-            </a:solidFill>
-            <a:prstDash val="solid"/>
-          </a:ln>
-        </p:spPr>
-      </p:sp>
-      <p:sp>
-        <p:nvSpPr>
-          <p:cNvPr id="44" name="Text 42"/>
-          <p:cNvSpPr/>
-          <p:nvPr/>
-        </p:nvSpPr>
-        <p:spPr>
-          <a:xfrm>
-            <a:off x="3639312" y="4169664"/>
-            <a:ext cx="685800" cy="384048"/>
-          </a:xfrm>
-          <a:prstGeom prst="rect">
-            <a:avLst/>
-          </a:prstGeom>
-          <a:noFill/>
-          <a:ln/>
-        </p:spPr>
-        <p:txBody>
-          <a:bodyPr wrap="square" lIns="0" tIns="0" rIns="0" bIns="0" rtlCol="0" anchor="ctr"/>
-          <a:lstStyle/>
-          <a:p>
-            <a:pPr algn="ctr" indent="0" marL="0">
-              <a:buNone/>
-            </a:pPr>
-            <a:r>
-              <a:rPr lang="en-US" sz="900" b="1" dirty="0">
-                <a:solidFill>
-                  <a:srgbClr val="9D174D"/>
-                </a:solidFill>
-                <a:latin typeface="Trebuchet MS" pitchFamily="34" charset="0"/>
-                <a:ea typeface="Trebuchet MS" pitchFamily="34" charset="-122"/>
-                <a:cs typeface="Trebuchet MS" pitchFamily="34" charset="-120"/>
-              </a:rPr>
-              <a:t>f</a:t>
-            </a:r>
-            <a:endParaRPr lang="en-US" sz="900" dirty="0"/>
-          </a:p>
-        </p:txBody>
-      </p:sp>
-      <p:sp>
-        <p:nvSpPr>
-          <p:cNvPr id="45" name="Shape 43"/>
-          <p:cNvSpPr/>
-          <p:nvPr/>
-        </p:nvSpPr>
-        <p:spPr>
-          <a:xfrm>
-            <a:off x="4447032" y="4169664"/>
-            <a:ext cx="685800" cy="384048"/>
-          </a:xfrm>
-          <a:prstGeom prst="rect">
-            <a:avLst>
-              <a:gd name="adj" fmla="val 9524"/>
-            </a:avLst>
-          </a:prstGeom>
-          <a:solidFill>
-            <a:srgbClr val="FFFFFF"/>
-          </a:solidFill>
-          <a:ln w="12700">
-            <a:solidFill>
-              <a:srgbClr val="DB2777"/>
-            </a:solidFill>
-            <a:prstDash val="solid"/>
-          </a:ln>
-        </p:spPr>
-      </p:sp>
-      <p:sp>
-        <p:nvSpPr>
-          <p:cNvPr id="46" name="Text 44"/>
-          <p:cNvSpPr/>
-          <p:nvPr/>
-        </p:nvSpPr>
-        <p:spPr>
-          <a:xfrm>
-            <a:off x="4447032" y="4169664"/>
-            <a:ext cx="685800" cy="384048"/>
-          </a:xfrm>
-          <a:prstGeom prst="rect">
-            <a:avLst/>
-          </a:prstGeom>
-          <a:noFill/>
-          <a:ln/>
-        </p:spPr>
-        <p:txBody>
-          <a:bodyPr wrap="square" lIns="0" tIns="0" rIns="0" bIns="0" rtlCol="0" anchor="ctr"/>
-          <a:lstStyle/>
-          <a:p>
-            <a:pPr algn="ctr" indent="0" marL="0">
-              <a:buNone/>
-            </a:pPr>
-            <a:r>
-              <a:rPr lang="en-US" sz="900" b="1" dirty="0">
-                <a:solidFill>
-                  <a:srgbClr val="9D174D"/>
-                </a:solidFill>
-                <a:latin typeface="Trebuchet MS" pitchFamily="34" charset="0"/>
-                <a:ea typeface="Trebuchet MS" pitchFamily="34" charset="-122"/>
-                <a:cs typeface="Trebuchet MS" pitchFamily="34" charset="-120"/>
-              </a:rPr>
-              <a:t>l</a:t>
-            </a:r>
-            <a:endParaRPr lang="en-US" sz="900" dirty="0"/>
-          </a:p>
-        </p:txBody>
-      </p:sp>
-      <p:sp>
-        <p:nvSpPr>
-          <p:cNvPr id="47" name="Shape 45"/>
-          <p:cNvSpPr/>
-          <p:nvPr/>
-        </p:nvSpPr>
-        <p:spPr>
-          <a:xfrm>
-            <a:off x="5254752" y="4169664"/>
-            <a:ext cx="685800" cy="384048"/>
-          </a:xfrm>
-          <a:prstGeom prst="rect">
-            <a:avLst>
-              <a:gd name="adj" fmla="val 9524"/>
-            </a:avLst>
-          </a:prstGeom>
-          <a:solidFill>
-            <a:srgbClr val="FFFFFF"/>
-          </a:solidFill>
-          <a:ln w="12700">
-            <a:solidFill>
-              <a:srgbClr val="DB2777"/>
-            </a:solidFill>
-            <a:prstDash val="solid"/>
-          </a:ln>
-        </p:spPr>
-      </p:sp>
-      <p:sp>
-        <p:nvSpPr>
-          <p:cNvPr id="48" name="Text 46"/>
-          <p:cNvSpPr/>
-          <p:nvPr/>
-        </p:nvSpPr>
-        <p:spPr>
-          <a:xfrm>
-            <a:off x="5254752" y="4169664"/>
-            <a:ext cx="685800" cy="384048"/>
-          </a:xfrm>
-          <a:prstGeom prst="rect">
-            <a:avLst/>
-          </a:prstGeom>
-          <a:noFill/>
-          <a:ln/>
-        </p:spPr>
-        <p:txBody>
-          <a:bodyPr wrap="square" lIns="0" tIns="0" rIns="0" bIns="0" rtlCol="0" anchor="ctr"/>
-          <a:lstStyle/>
-          <a:p>
-            <a:pPr algn="ctr" indent="0" marL="0">
-              <a:buNone/>
-            </a:pPr>
-            <a:r>
-              <a:rPr lang="en-US" sz="900" b="1" dirty="0">
-                <a:solidFill>
-                  <a:srgbClr val="9D174D"/>
-                </a:solidFill>
-                <a:latin typeface="Trebuchet MS" pitchFamily="34" charset="0"/>
-                <a:ea typeface="Trebuchet MS" pitchFamily="34" charset="-122"/>
-                <a:cs typeface="Trebuchet MS" pitchFamily="34" charset="-120"/>
-              </a:rPr>
-              <a:t>e</a:t>
-            </a:r>
-            <a:endParaRPr lang="en-US" sz="900" dirty="0"/>
-          </a:p>
-        </p:txBody>
-      </p:sp>
-      <p:sp>
-        <p:nvSpPr>
-          <p:cNvPr id="49" name="Shape 47"/>
-          <p:cNvSpPr/>
-          <p:nvPr/>
-        </p:nvSpPr>
-        <p:spPr>
-          <a:xfrm>
-            <a:off x="6062472" y="4169664"/>
-            <a:ext cx="685800" cy="384048"/>
-          </a:xfrm>
-          <a:prstGeom prst="rect">
-            <a:avLst>
-              <a:gd name="adj" fmla="val 9524"/>
-            </a:avLst>
-          </a:prstGeom>
-          <a:solidFill>
-            <a:srgbClr val="FFFFFF"/>
-          </a:solidFill>
-          <a:ln w="12700">
-            <a:solidFill>
-              <a:srgbClr val="DB2777"/>
-            </a:solidFill>
-            <a:prstDash val="solid"/>
-          </a:ln>
-        </p:spPr>
-      </p:sp>
-      <p:sp>
-        <p:nvSpPr>
-          <p:cNvPr id="50" name="Text 48"/>
-          <p:cNvSpPr/>
-          <p:nvPr/>
-        </p:nvSpPr>
-        <p:spPr>
-          <a:xfrm>
-            <a:off x="6062472" y="4169664"/>
-            <a:ext cx="685800" cy="384048"/>
-          </a:xfrm>
-          <a:prstGeom prst="rect">
-            <a:avLst/>
-          </a:prstGeom>
-          <a:noFill/>
-          <a:ln/>
-        </p:spPr>
-        <p:txBody>
-          <a:bodyPr wrap="square" lIns="0" tIns="0" rIns="0" bIns="0" rtlCol="0" anchor="ctr"/>
-          <a:lstStyle/>
-          <a:p>
-            <a:pPr algn="ctr" indent="0" marL="0">
-              <a:buNone/>
-            </a:pPr>
-            <a:r>
-              <a:rPr lang="en-US" sz="900" b="1" dirty="0">
-                <a:solidFill>
-                  <a:srgbClr val="9D174D"/>
-                </a:solidFill>
-                <a:latin typeface="Trebuchet MS" pitchFamily="34" charset="0"/>
-                <a:ea typeface="Trebuchet MS" pitchFamily="34" charset="-122"/>
-                <a:cs typeface="Trebuchet MS" pitchFamily="34" charset="-120"/>
-              </a:rPr>
-              <a:t>x</a:t>
-            </a:r>
-            <a:endParaRPr lang="en-US" sz="900" dirty="0"/>
-          </a:p>
-        </p:txBody>
-      </p:sp>
-      <p:sp>
-        <p:nvSpPr>
-          <p:cNvPr id="51" name="Text 49"/>
-          <p:cNvSpPr/>
-          <p:nvPr/>
-        </p:nvSpPr>
-        <p:spPr>
-          <a:xfrm>
-            <a:off x="6062472" y="4572000"/>
-            <a:ext cx="685800" cy="219456"/>
-          </a:xfrm>
-          <a:prstGeom prst="rect">
-            <a:avLst/>
-          </a:prstGeom>
-          <a:noFill/>
-          <a:ln/>
-        </p:spPr>
-        <p:txBody>
-          <a:bodyPr wrap="square" lIns="0" tIns="0" rIns="0" bIns="0" rtlCol="0" anchor="t"/>
-          <a:lstStyle/>
-          <a:p>
-            <a:pPr algn="ctr" indent="0" marL="0">
-              <a:buNone/>
-            </a:pPr>
-            <a:r>
-              <a:rPr lang="en-US" sz="750" i="1" dirty="0">
-                <a:solidFill>
-                  <a:srgbClr val="94A3B8"/>
-                </a:solidFill>
-                <a:latin typeface="Calibri" pitchFamily="34" charset="0"/>
-                <a:ea typeface="Calibri" pitchFamily="34" charset="-122"/>
-                <a:cs typeface="Calibri" pitchFamily="34" charset="-120"/>
-              </a:rPr>
               <a:t>/ks/</a:t>
             </a:r>
             <a:endParaRPr lang="en-US" sz="750" dirty="0"/>
-          </a:p>
-        </p:txBody>
-      </p:sp>
-      <p:sp>
-        <p:nvSpPr>
-          <p:cNvPr id="52" name="Shape 50"/>
-          <p:cNvSpPr/>
-          <p:nvPr/>
-        </p:nvSpPr>
-        <p:spPr>
-          <a:xfrm>
-            <a:off x="6870192" y="4169664"/>
-            <a:ext cx="685800" cy="384048"/>
-          </a:xfrm>
-          <a:prstGeom prst="rect">
-            <a:avLst>
-              <a:gd name="adj" fmla="val 9524"/>
-            </a:avLst>
-          </a:prstGeom>
-          <a:solidFill>
-            <a:srgbClr val="FFFFFF"/>
-          </a:solidFill>
-          <a:ln w="12700">
-            <a:solidFill>
-              <a:srgbClr val="DB2777"/>
-            </a:solidFill>
-            <a:prstDash val="solid"/>
-          </a:ln>
-        </p:spPr>
-      </p:sp>
-      <p:sp>
-        <p:nvSpPr>
-          <p:cNvPr id="53" name="Text 51"/>
-          <p:cNvSpPr/>
-          <p:nvPr/>
-        </p:nvSpPr>
-        <p:spPr>
-          <a:xfrm>
-            <a:off x="6870192" y="4169664"/>
-            <a:ext cx="685800" cy="384048"/>
-          </a:xfrm>
-          <a:prstGeom prst="rect">
-            <a:avLst/>
-          </a:prstGeom>
-          <a:noFill/>
-          <a:ln/>
-        </p:spPr>
-        <p:txBody>
-          <a:bodyPr wrap="square" lIns="0" tIns="0" rIns="0" bIns="0" rtlCol="0" anchor="ctr"/>
-          <a:lstStyle/>
-          <a:p>
-            <a:pPr algn="ctr" indent="0" marL="0">
-              <a:buNone/>
-            </a:pPr>
-            <a:r>
-              <a:rPr lang="en-US" sz="900" b="1" dirty="0">
-                <a:solidFill>
-                  <a:srgbClr val="9D174D"/>
-                </a:solidFill>
-                <a:latin typeface="Trebuchet MS" pitchFamily="34" charset="0"/>
-                <a:ea typeface="Trebuchet MS" pitchFamily="34" charset="-122"/>
-                <a:cs typeface="Trebuchet MS" pitchFamily="34" charset="-120"/>
-              </a:rPr>
-              <a:t>e</a:t>
-            </a:r>
-            <a:endParaRPr lang="en-US" sz="900" dirty="0"/>
-          </a:p>
-        </p:txBody>
-      </p:sp>
-      <p:sp>
-        <p:nvSpPr>
-          <p:cNvPr id="54" name="Shape 52"/>
-          <p:cNvSpPr/>
-          <p:nvPr/>
-        </p:nvSpPr>
-        <p:spPr>
-          <a:xfrm>
-            <a:off x="7677912" y="4169664"/>
-            <a:ext cx="685800" cy="384048"/>
-          </a:xfrm>
-          <a:prstGeom prst="rect">
-            <a:avLst>
-              <a:gd name="adj" fmla="val 9524"/>
-            </a:avLst>
-          </a:prstGeom>
-          <a:solidFill>
-            <a:srgbClr val="FFFFFF"/>
-          </a:solidFill>
-          <a:ln w="12700">
-            <a:solidFill>
-              <a:srgbClr val="DB2777"/>
-            </a:solidFill>
-            <a:prstDash val="solid"/>
-          </a:ln>
-        </p:spPr>
-      </p:sp>
-      <p:sp>
-        <p:nvSpPr>
-          <p:cNvPr id="55" name="Text 53"/>
-          <p:cNvSpPr/>
-          <p:nvPr/>
-        </p:nvSpPr>
-        <p:spPr>
-          <a:xfrm>
-            <a:off x="7677912" y="4169664"/>
-            <a:ext cx="685800" cy="384048"/>
-          </a:xfrm>
-          <a:prstGeom prst="rect">
-            <a:avLst/>
-          </a:prstGeom>
-          <a:noFill/>
-          <a:ln/>
-        </p:spPr>
-        <p:txBody>
-          <a:bodyPr wrap="square" lIns="0" tIns="0" rIns="0" bIns="0" rtlCol="0" anchor="ctr"/>
-          <a:lstStyle/>
-          <a:p>
-            <a:pPr algn="ctr" indent="0" marL="0">
-              <a:buNone/>
-            </a:pPr>
-            <a:r>
-              <a:rPr lang="en-US" sz="900" b="1" dirty="0">
-                <a:solidFill>
-                  <a:srgbClr val="9D174D"/>
-                </a:solidFill>
-                <a:latin typeface="Trebuchet MS" pitchFamily="34" charset="0"/>
-                <a:ea typeface="Trebuchet MS" pitchFamily="34" charset="-122"/>
-                <a:cs typeface="Trebuchet MS" pitchFamily="34" charset="-120"/>
-              </a:rPr>
-              <a:t>s</a:t>
-            </a:r>
-            <a:endParaRPr lang="en-US" sz="900" dirty="0"/>
           </a:p>
         </p:txBody>
       </p:sp>
@@ -17853,7 +16977,7 @@
                 <a:ea typeface="Calibri" pitchFamily="34" charset="-122"/>
                 <a:cs typeface="Calibri" pitchFamily="34" charset="-120"/>
               </a:rPr>
-              <a:t>The </a:t>
+              <a:t>Her </a:t>
             </a:r>
             <a:pPr algn="l" indent="0" marL="0">
               <a:buNone/>
@@ -17870,7 +16994,7 @@
                 <a:ea typeface="Calibri" pitchFamily="34" charset="-122"/>
                 <a:cs typeface="Calibri" pitchFamily="34" charset="-120"/>
               </a:rPr>
-              <a:t>inflexible</a:t>
+              <a:t>inflexibility</a:t>
             </a:r>
             <a:pPr algn="l" indent="0" marL="0">
               <a:buNone/>
@@ -17884,7 +17008,7 @@
                 <a:ea typeface="Calibri" pitchFamily="34" charset="-122"/>
                 <a:cs typeface="Calibri" pitchFamily="34" charset="-120"/>
               </a:rPr>
-              <a:t> old branch could not </a:t>
+              <a:t> surprised us; however, the coach used </a:t>
             </a:r>
             <a:pPr algn="l" indent="0" marL="0">
               <a:buNone/>
@@ -17901,7 +17025,7 @@
                 <a:ea typeface="Calibri" pitchFamily="34" charset="-122"/>
                 <a:cs typeface="Calibri" pitchFamily="34" charset="-120"/>
               </a:rPr>
-              <a:t>deflect</a:t>
+              <a:t>deflection</a:t>
             </a:r>
             <a:pPr algn="l" indent="0" marL="0">
               <a:buNone/>
@@ -17915,7 +17039,7 @@
                 <a:ea typeface="Calibri" pitchFamily="34" charset="-122"/>
                 <a:cs typeface="Calibri" pitchFamily="34" charset="-120"/>
               </a:rPr>
-              <a:t> the wind, but the </a:t>
+              <a:t> and </a:t>
             </a:r>
             <a:pPr algn="l" indent="0" marL="0">
               <a:buNone/>
@@ -17932,7 +17056,7 @@
                 <a:ea typeface="Calibri" pitchFamily="34" charset="-122"/>
                 <a:cs typeface="Calibri" pitchFamily="34" charset="-120"/>
               </a:rPr>
-              <a:t>flexible</a:t>
+              <a:t>reflexive</a:t>
             </a:r>
             <a:pPr algn="l" indent="0" marL="0">
               <a:buNone/>
@@ -17946,7 +17070,7 @@
                 <a:ea typeface="Calibri" pitchFamily="34" charset="-122"/>
                 <a:cs typeface="Calibri" pitchFamily="34" charset="-120"/>
               </a:rPr>
-              <a:t> young sapling bent and swayed without breaking.</a:t>
+              <a:t> drills to help her improve.</a:t>
             </a:r>
             <a:endParaRPr lang="en-US" sz="1800" dirty="0"/>
           </a:p>
@@ -18101,7 +17225,7 @@
                 <a:ea typeface="Trebuchet MS" pitchFamily="34" charset="-122"/>
                 <a:cs typeface="Trebuchet MS" pitchFamily="34" charset="-120"/>
               </a:rPr>
-              <a:t>inflexible</a:t>
+              <a:t>inflexibility</a:t>
             </a:r>
             <a:endParaRPr lang="en-US" sz="1400" dirty="0"/>
           </a:p>
@@ -18229,7 +17353,7 @@
                 <a:ea typeface="Trebuchet MS" pitchFamily="34" charset="-122"/>
                 <a:cs typeface="Trebuchet MS" pitchFamily="34" charset="-120"/>
               </a:rPr>
-              <a:t>deflect</a:t>
+              <a:t>deflection</a:t>
             </a:r>
             <a:endParaRPr lang="en-US" sz="1400" dirty="0"/>
           </a:p>
@@ -18357,7 +17481,7 @@
                 <a:ea typeface="Trebuchet MS" pitchFamily="34" charset="-122"/>
                 <a:cs typeface="Trebuchet MS" pitchFamily="34" charset="-120"/>
               </a:rPr>
-              <a:t>flexible</a:t>
+              <a:t>reflexive</a:t>
             </a:r>
             <a:endParaRPr lang="en-US" sz="1400" dirty="0"/>
           </a:p>
@@ -18827,7 +17951,7 @@
                 <a:ea typeface="Trebuchet MS" pitchFamily="34" charset="-122"/>
                 <a:cs typeface="Trebuchet MS" pitchFamily="34" charset="-120"/>
               </a:rPr>
-              <a:t>inflexible</a:t>
+              <a:t>inflexibility</a:t>
             </a:r>
             <a:endParaRPr lang="en-US" sz="2800" dirty="0"/>
           </a:p>
@@ -19654,7 +18778,7 @@
                 <a:ea typeface="Trebuchet MS" pitchFamily="34" charset="-122"/>
                 <a:cs typeface="Trebuchet MS" pitchFamily="34" charset="-120"/>
               </a:rPr>
-              <a:t>inflexible</a:t>
+              <a:t>inflexibility</a:t>
             </a:r>
             <a:endParaRPr lang="en-US" sz="2800" dirty="0"/>
           </a:p>
@@ -20017,7 +19141,7 @@
                 <a:ea typeface="Trebuchet MS" pitchFamily="34" charset="-122"/>
                 <a:cs typeface="Trebuchet MS" pitchFamily="34" charset="-120"/>
               </a:rPr>
-              <a:t>ible</a:t>
+              <a:t>ibility</a:t>
             </a:r>
             <a:endParaRPr lang="en-US" sz="1300" dirty="0"/>
           </a:p>
@@ -20056,7 +19180,7 @@
                 <a:ea typeface="Calibri" pitchFamily="34" charset="-122"/>
                 <a:cs typeface="Calibri" pitchFamily="34" charset="-120"/>
               </a:rPr>
-              <a:t>able to be</a:t>
+              <a:t>quality or state of being able to</a:t>
             </a:r>
             <a:endParaRPr lang="en-US" sz="850" dirty="0"/>
           </a:p>
@@ -20751,7 +19875,7 @@
                 <a:ea typeface="Trebuchet MS" pitchFamily="34" charset="-122"/>
                 <a:cs typeface="Trebuchet MS" pitchFamily="34" charset="-120"/>
               </a:rPr>
-              <a:t>inflexible</a:t>
+              <a:t>inflexibility</a:t>
             </a:r>
             <a:endParaRPr lang="en-US" sz="2800" dirty="0"/>
           </a:p>
@@ -21114,7 +20238,7 @@
                 <a:ea typeface="Trebuchet MS" pitchFamily="34" charset="-122"/>
                 <a:cs typeface="Trebuchet MS" pitchFamily="34" charset="-120"/>
               </a:rPr>
-              <a:t>ible</a:t>
+              <a:t>ibility</a:t>
             </a:r>
             <a:endParaRPr lang="en-US" sz="1300" dirty="0"/>
           </a:p>
@@ -21153,7 +20277,7 @@
                 <a:ea typeface="Calibri" pitchFamily="34" charset="-122"/>
                 <a:cs typeface="Calibri" pitchFamily="34" charset="-120"/>
               </a:rPr>
-              <a:t>able to be</a:t>
+              <a:t>quality or state of being able to</a:t>
             </a:r>
             <a:endParaRPr lang="en-US" sz="850" dirty="0"/>
           </a:p>
@@ -21260,8 +20384,8 @@
         </p:nvSpPr>
         <p:spPr>
           <a:xfrm>
-            <a:off x="1975104" y="3364992"/>
-            <a:ext cx="1554480" cy="475488"/>
+            <a:off x="1980329" y="3364992"/>
+            <a:ext cx="1005840" cy="475488"/>
           </a:xfrm>
           <a:prstGeom prst="rect">
             <a:avLst>
@@ -21287,8 +20411,8 @@
         </p:nvSpPr>
         <p:spPr>
           <a:xfrm>
-            <a:off x="1975104" y="3364992"/>
-            <a:ext cx="1554480" cy="475488"/>
+            <a:off x="1980329" y="3364992"/>
+            <a:ext cx="1005840" cy="475488"/>
           </a:xfrm>
           <a:prstGeom prst="rect">
             <a:avLst/>
@@ -21326,8 +20450,8 @@
         </p:nvSpPr>
         <p:spPr>
           <a:xfrm>
-            <a:off x="3529584" y="3364992"/>
-            <a:ext cx="73152" cy="475488"/>
+            <a:off x="2986169" y="3364992"/>
+            <a:ext cx="78377" cy="475488"/>
           </a:xfrm>
           <a:prstGeom prst="rect">
             <a:avLst/>
@@ -21365,8 +20489,8 @@
         </p:nvSpPr>
         <p:spPr>
           <a:xfrm>
-            <a:off x="3602736" y="3364992"/>
-            <a:ext cx="1554480" cy="475488"/>
+            <a:off x="3064546" y="3364992"/>
+            <a:ext cx="1005840" cy="475488"/>
           </a:xfrm>
           <a:prstGeom prst="rect">
             <a:avLst>
@@ -21392,8 +20516,8 @@
         </p:nvSpPr>
         <p:spPr>
           <a:xfrm>
-            <a:off x="3602736" y="3364992"/>
-            <a:ext cx="1554480" cy="475488"/>
+            <a:off x="3064546" y="3364992"/>
+            <a:ext cx="1005840" cy="475488"/>
           </a:xfrm>
           <a:prstGeom prst="rect">
             <a:avLst/>
@@ -21431,8 +20555,8 @@
         </p:nvSpPr>
         <p:spPr>
           <a:xfrm>
-            <a:off x="5157216" y="3364992"/>
-            <a:ext cx="73152" cy="475488"/>
+            <a:off x="4070386" y="3364992"/>
+            <a:ext cx="78377" cy="475488"/>
           </a:xfrm>
           <a:prstGeom prst="rect">
             <a:avLst/>
@@ -21470,8 +20594,8 @@
         </p:nvSpPr>
         <p:spPr>
           <a:xfrm>
-            <a:off x="5230368" y="3364992"/>
-            <a:ext cx="1554480" cy="475488"/>
+            <a:off x="4148763" y="3364992"/>
+            <a:ext cx="1005840" cy="475488"/>
           </a:xfrm>
           <a:prstGeom prst="rect">
             <a:avLst>
@@ -21497,8 +20621,8 @@
         </p:nvSpPr>
         <p:spPr>
           <a:xfrm>
-            <a:off x="5230368" y="3364992"/>
-            <a:ext cx="1554480" cy="475488"/>
+            <a:off x="4148763" y="3364992"/>
+            <a:ext cx="1005840" cy="475488"/>
           </a:xfrm>
           <a:prstGeom prst="rect">
             <a:avLst/>
@@ -21536,8 +20660,8 @@
         </p:nvSpPr>
         <p:spPr>
           <a:xfrm>
-            <a:off x="6784848" y="3364992"/>
-            <a:ext cx="73152" cy="475488"/>
+            <a:off x="5154603" y="3364992"/>
+            <a:ext cx="78377" cy="475488"/>
           </a:xfrm>
           <a:prstGeom prst="rect">
             <a:avLst/>
@@ -21575,8 +20699,8 @@
         </p:nvSpPr>
         <p:spPr>
           <a:xfrm>
-            <a:off x="6858000" y="3364992"/>
-            <a:ext cx="1554480" cy="475488"/>
+            <a:off x="5232981" y="3364992"/>
+            <a:ext cx="1005840" cy="475488"/>
           </a:xfrm>
           <a:prstGeom prst="rect">
             <a:avLst>
@@ -21602,8 +20726,8 @@
         </p:nvSpPr>
         <p:spPr>
           <a:xfrm>
-            <a:off x="6858000" y="3364992"/>
-            <a:ext cx="1554480" cy="475488"/>
+            <a:off x="5232981" y="3364992"/>
+            <a:ext cx="1005840" cy="475488"/>
           </a:xfrm>
           <a:prstGeom prst="rect">
             <a:avLst/>
@@ -21627,7 +20751,7 @@
                 <a:ea typeface="Trebuchet MS" pitchFamily="34" charset="-122"/>
                 <a:cs typeface="Trebuchet MS" pitchFamily="34" charset="-120"/>
               </a:rPr>
-              <a:t>ble</a:t>
+              <a:t>bil</a:t>
             </a:r>
             <a:endParaRPr lang="en-US" sz="1400" dirty="0"/>
           </a:p>
@@ -21635,7 +20759,217 @@
       </p:sp>
       <p:sp>
         <p:nvSpPr>
-          <p:cNvPr id="39" name="Shape 37"/>
+          <p:cNvPr id="39" name="Text 37"/>
+          <p:cNvSpPr/>
+          <p:nvPr/>
+        </p:nvSpPr>
+        <p:spPr>
+          <a:xfrm>
+            <a:off x="6238821" y="3364992"/>
+            <a:ext cx="78377" cy="475488"/>
+          </a:xfrm>
+          <a:prstGeom prst="rect">
+            <a:avLst/>
+          </a:prstGeom>
+          <a:noFill/>
+          <a:ln/>
+        </p:spPr>
+        <p:txBody>
+          <a:bodyPr wrap="square" lIns="0" tIns="0" rIns="0" bIns="0" rtlCol="0" anchor="ctr"/>
+          <a:lstStyle/>
+          <a:p>
+            <a:pPr algn="ctr" indent="0" marL="0">
+              <a:buNone/>
+            </a:pPr>
+            <a:r>
+              <a:rPr lang="en-US" sz="1600" b="1" dirty="0">
+                <a:solidFill>
+                  <a:srgbClr val="0D9488"/>
+                </a:solidFill>
+                <a:latin typeface="Trebuchet MS" pitchFamily="34" charset="0"/>
+                <a:ea typeface="Trebuchet MS" pitchFamily="34" charset="-122"/>
+                <a:cs typeface="Trebuchet MS" pitchFamily="34" charset="-120"/>
+              </a:rPr>
+              <a:t>·</a:t>
+            </a:r>
+            <a:endParaRPr lang="en-US" sz="1600" dirty="0"/>
+          </a:p>
+        </p:txBody>
+      </p:sp>
+      <p:sp>
+        <p:nvSpPr>
+          <p:cNvPr id="40" name="Shape 38"/>
+          <p:cNvSpPr/>
+          <p:nvPr/>
+        </p:nvSpPr>
+        <p:spPr>
+          <a:xfrm>
+            <a:off x="6317198" y="3364992"/>
+            <a:ext cx="1005840" cy="475488"/>
+          </a:xfrm>
+          <a:prstGeom prst="rect">
+            <a:avLst>
+              <a:gd name="adj" fmla="val 9615"/>
+            </a:avLst>
+          </a:prstGeom>
+          <a:solidFill>
+            <a:srgbClr val="FFFFFF"/>
+          </a:solidFill>
+          <a:ln w="12700">
+            <a:solidFill>
+              <a:srgbClr val="0D9488"/>
+            </a:solidFill>
+            <a:prstDash val="solid"/>
+          </a:ln>
+        </p:spPr>
+      </p:sp>
+      <p:sp>
+        <p:nvSpPr>
+          <p:cNvPr id="41" name="Text 39"/>
+          <p:cNvSpPr/>
+          <p:nvPr/>
+        </p:nvSpPr>
+        <p:spPr>
+          <a:xfrm>
+            <a:off x="6317198" y="3364992"/>
+            <a:ext cx="1005840" cy="475488"/>
+          </a:xfrm>
+          <a:prstGeom prst="rect">
+            <a:avLst/>
+          </a:prstGeom>
+          <a:noFill/>
+          <a:ln/>
+        </p:spPr>
+        <p:txBody>
+          <a:bodyPr wrap="square" lIns="0" tIns="0" rIns="0" bIns="0" rtlCol="0" anchor="ctr"/>
+          <a:lstStyle/>
+          <a:p>
+            <a:pPr algn="ctr" indent="0" marL="0">
+              <a:buNone/>
+            </a:pPr>
+            <a:r>
+              <a:rPr lang="en-US" sz="1400" b="1" dirty="0">
+                <a:solidFill>
+                  <a:srgbClr val="0D9488"/>
+                </a:solidFill>
+                <a:latin typeface="Trebuchet MS" pitchFamily="34" charset="0"/>
+                <a:ea typeface="Trebuchet MS" pitchFamily="34" charset="-122"/>
+                <a:cs typeface="Trebuchet MS" pitchFamily="34" charset="-120"/>
+              </a:rPr>
+              <a:t>i</a:t>
+            </a:r>
+            <a:endParaRPr lang="en-US" sz="1400" dirty="0"/>
+          </a:p>
+        </p:txBody>
+      </p:sp>
+      <p:sp>
+        <p:nvSpPr>
+          <p:cNvPr id="42" name="Text 40"/>
+          <p:cNvSpPr/>
+          <p:nvPr/>
+        </p:nvSpPr>
+        <p:spPr>
+          <a:xfrm>
+            <a:off x="7323038" y="3364992"/>
+            <a:ext cx="78377" cy="475488"/>
+          </a:xfrm>
+          <a:prstGeom prst="rect">
+            <a:avLst/>
+          </a:prstGeom>
+          <a:noFill/>
+          <a:ln/>
+        </p:spPr>
+        <p:txBody>
+          <a:bodyPr wrap="square" lIns="0" tIns="0" rIns="0" bIns="0" rtlCol="0" anchor="ctr"/>
+          <a:lstStyle/>
+          <a:p>
+            <a:pPr algn="ctr" indent="0" marL="0">
+              <a:buNone/>
+            </a:pPr>
+            <a:r>
+              <a:rPr lang="en-US" sz="1600" b="1" dirty="0">
+                <a:solidFill>
+                  <a:srgbClr val="0D9488"/>
+                </a:solidFill>
+                <a:latin typeface="Trebuchet MS" pitchFamily="34" charset="0"/>
+                <a:ea typeface="Trebuchet MS" pitchFamily="34" charset="-122"/>
+                <a:cs typeface="Trebuchet MS" pitchFamily="34" charset="-120"/>
+              </a:rPr>
+              <a:t>·</a:t>
+            </a:r>
+            <a:endParaRPr lang="en-US" sz="1600" dirty="0"/>
+          </a:p>
+        </p:txBody>
+      </p:sp>
+      <p:sp>
+        <p:nvSpPr>
+          <p:cNvPr id="43" name="Shape 41"/>
+          <p:cNvSpPr/>
+          <p:nvPr/>
+        </p:nvSpPr>
+        <p:spPr>
+          <a:xfrm>
+            <a:off x="7401415" y="3364992"/>
+            <a:ext cx="1005840" cy="475488"/>
+          </a:xfrm>
+          <a:prstGeom prst="rect">
+            <a:avLst>
+              <a:gd name="adj" fmla="val 9615"/>
+            </a:avLst>
+          </a:prstGeom>
+          <a:solidFill>
+            <a:srgbClr val="FFFFFF"/>
+          </a:solidFill>
+          <a:ln w="12700">
+            <a:solidFill>
+              <a:srgbClr val="0D9488"/>
+            </a:solidFill>
+            <a:prstDash val="solid"/>
+          </a:ln>
+        </p:spPr>
+      </p:sp>
+      <p:sp>
+        <p:nvSpPr>
+          <p:cNvPr id="44" name="Text 42"/>
+          <p:cNvSpPr/>
+          <p:nvPr/>
+        </p:nvSpPr>
+        <p:spPr>
+          <a:xfrm>
+            <a:off x="7401415" y="3364992"/>
+            <a:ext cx="1005840" cy="475488"/>
+          </a:xfrm>
+          <a:prstGeom prst="rect">
+            <a:avLst/>
+          </a:prstGeom>
+          <a:noFill/>
+          <a:ln/>
+        </p:spPr>
+        <p:txBody>
+          <a:bodyPr wrap="square" lIns="0" tIns="0" rIns="0" bIns="0" rtlCol="0" anchor="ctr"/>
+          <a:lstStyle/>
+          <a:p>
+            <a:pPr algn="ctr" indent="0" marL="0">
+              <a:buNone/>
+            </a:pPr>
+            <a:r>
+              <a:rPr lang="en-US" sz="1400" b="1" dirty="0">
+                <a:solidFill>
+                  <a:srgbClr val="0D9488"/>
+                </a:solidFill>
+                <a:latin typeface="Trebuchet MS" pitchFamily="34" charset="0"/>
+                <a:ea typeface="Trebuchet MS" pitchFamily="34" charset="-122"/>
+                <a:cs typeface="Trebuchet MS" pitchFamily="34" charset="-120"/>
+              </a:rPr>
+              <a:t>ty</a:t>
+            </a:r>
+            <a:endParaRPr lang="en-US" sz="1400" dirty="0"/>
+          </a:p>
+        </p:txBody>
+      </p:sp>
+      <p:sp>
+        <p:nvSpPr>
+          <p:cNvPr id="45" name="Shape 43"/>
           <p:cNvSpPr/>
           <p:nvPr/>
         </p:nvSpPr>
@@ -21662,7 +20996,7 @@
       </p:sp>
       <p:sp>
         <p:nvSpPr>
-          <p:cNvPr id="40" name="Text 38"/>
+          <p:cNvPr id="46" name="Text 44"/>
           <p:cNvSpPr/>
           <p:nvPr/>
         </p:nvSpPr>
@@ -21701,7 +21035,7 @@
       </p:sp>
       <p:sp>
         <p:nvSpPr>
-          <p:cNvPr id="41" name="Shape 39"/>
+          <p:cNvPr id="47" name="Shape 45"/>
           <p:cNvSpPr/>
           <p:nvPr/>
         </p:nvSpPr>
@@ -21728,7 +21062,7 @@
       </p:sp>
       <p:sp>
         <p:nvSpPr>
-          <p:cNvPr id="42" name="Text 40"/>
+          <p:cNvPr id="48" name="Text 46"/>
           <p:cNvSpPr/>
           <p:nvPr/>
         </p:nvSpPr>
@@ -22190,7 +21524,7 @@
                 <a:ea typeface="Trebuchet MS" pitchFamily="34" charset="-122"/>
                 <a:cs typeface="Trebuchet MS" pitchFamily="34" charset="-120"/>
               </a:rPr>
-              <a:t>inflexible</a:t>
+              <a:t>inflexibility</a:t>
             </a:r>
             <a:endParaRPr lang="en-US" sz="2800" dirty="0"/>
           </a:p>
@@ -22553,7 +21887,7 @@
                 <a:ea typeface="Trebuchet MS" pitchFamily="34" charset="-122"/>
                 <a:cs typeface="Trebuchet MS" pitchFamily="34" charset="-120"/>
               </a:rPr>
-              <a:t>ible</a:t>
+              <a:t>ibility</a:t>
             </a:r>
             <a:endParaRPr lang="en-US" sz="1300" dirty="0"/>
           </a:p>
@@ -22592,7 +21926,7 @@
                 <a:ea typeface="Calibri" pitchFamily="34" charset="-122"/>
                 <a:cs typeface="Calibri" pitchFamily="34" charset="-120"/>
               </a:rPr>
-              <a:t>able to be</a:t>
+              <a:t>quality or state of being able to</a:t>
             </a:r>
             <a:endParaRPr lang="en-US" sz="850" dirty="0"/>
           </a:p>
@@ -22699,8 +22033,8 @@
         </p:nvSpPr>
         <p:spPr>
           <a:xfrm>
-            <a:off x="1975104" y="3364992"/>
-            <a:ext cx="1554480" cy="475488"/>
+            <a:off x="1980329" y="3364992"/>
+            <a:ext cx="1005840" cy="475488"/>
           </a:xfrm>
           <a:prstGeom prst="rect">
             <a:avLst>
@@ -22726,8 +22060,8 @@
         </p:nvSpPr>
         <p:spPr>
           <a:xfrm>
-            <a:off x="1975104" y="3364992"/>
-            <a:ext cx="1554480" cy="475488"/>
+            <a:off x="1980329" y="3364992"/>
+            <a:ext cx="1005840" cy="475488"/>
           </a:xfrm>
           <a:prstGeom prst="rect">
             <a:avLst/>
@@ -22765,8 +22099,8 @@
         </p:nvSpPr>
         <p:spPr>
           <a:xfrm>
-            <a:off x="3529584" y="3364992"/>
-            <a:ext cx="73152" cy="475488"/>
+            <a:off x="2986169" y="3364992"/>
+            <a:ext cx="78377" cy="475488"/>
           </a:xfrm>
           <a:prstGeom prst="rect">
             <a:avLst/>
@@ -22804,8 +22138,8 @@
         </p:nvSpPr>
         <p:spPr>
           <a:xfrm>
-            <a:off x="3602736" y="3364992"/>
-            <a:ext cx="1554480" cy="475488"/>
+            <a:off x="3064546" y="3364992"/>
+            <a:ext cx="1005840" cy="475488"/>
           </a:xfrm>
           <a:prstGeom prst="rect">
             <a:avLst>
@@ -22831,8 +22165,8 @@
         </p:nvSpPr>
         <p:spPr>
           <a:xfrm>
-            <a:off x="3602736" y="3364992"/>
-            <a:ext cx="1554480" cy="475488"/>
+            <a:off x="3064546" y="3364992"/>
+            <a:ext cx="1005840" cy="475488"/>
           </a:xfrm>
           <a:prstGeom prst="rect">
             <a:avLst/>
@@ -22870,8 +22204,8 @@
         </p:nvSpPr>
         <p:spPr>
           <a:xfrm>
-            <a:off x="5157216" y="3364992"/>
-            <a:ext cx="73152" cy="475488"/>
+            <a:off x="4070386" y="3364992"/>
+            <a:ext cx="78377" cy="475488"/>
           </a:xfrm>
           <a:prstGeom prst="rect">
             <a:avLst/>
@@ -22909,8 +22243,8 @@
         </p:nvSpPr>
         <p:spPr>
           <a:xfrm>
-            <a:off x="5230368" y="3364992"/>
-            <a:ext cx="1554480" cy="475488"/>
+            <a:off x="4148763" y="3364992"/>
+            <a:ext cx="1005840" cy="475488"/>
           </a:xfrm>
           <a:prstGeom prst="rect">
             <a:avLst>
@@ -22936,8 +22270,8 @@
         </p:nvSpPr>
         <p:spPr>
           <a:xfrm>
-            <a:off x="5230368" y="3364992"/>
-            <a:ext cx="1554480" cy="475488"/>
+            <a:off x="4148763" y="3364992"/>
+            <a:ext cx="1005840" cy="475488"/>
           </a:xfrm>
           <a:prstGeom prst="rect">
             <a:avLst/>
@@ -22975,8 +22309,8 @@
         </p:nvSpPr>
         <p:spPr>
           <a:xfrm>
-            <a:off x="6784848" y="3364992"/>
-            <a:ext cx="73152" cy="475488"/>
+            <a:off x="5154603" y="3364992"/>
+            <a:ext cx="78377" cy="475488"/>
           </a:xfrm>
           <a:prstGeom prst="rect">
             <a:avLst/>
@@ -23014,8 +22348,8 @@
         </p:nvSpPr>
         <p:spPr>
           <a:xfrm>
-            <a:off x="6858000" y="3364992"/>
-            <a:ext cx="1554480" cy="475488"/>
+            <a:off x="5232981" y="3364992"/>
+            <a:ext cx="1005840" cy="475488"/>
           </a:xfrm>
           <a:prstGeom prst="rect">
             <a:avLst>
@@ -23041,8 +22375,8 @@
         </p:nvSpPr>
         <p:spPr>
           <a:xfrm>
-            <a:off x="6858000" y="3364992"/>
-            <a:ext cx="1554480" cy="475488"/>
+            <a:off x="5232981" y="3364992"/>
+            <a:ext cx="1005840" cy="475488"/>
           </a:xfrm>
           <a:prstGeom prst="rect">
             <a:avLst/>
@@ -23066,7 +22400,7 @@
                 <a:ea typeface="Trebuchet MS" pitchFamily="34" charset="-122"/>
                 <a:cs typeface="Trebuchet MS" pitchFamily="34" charset="-120"/>
               </a:rPr>
-              <a:t>ble</a:t>
+              <a:t>bil</a:t>
             </a:r>
             <a:endParaRPr lang="en-US" sz="1400" dirty="0"/>
           </a:p>
@@ -23074,7 +22408,217 @@
       </p:sp>
       <p:sp>
         <p:nvSpPr>
-          <p:cNvPr id="39" name="Shape 37"/>
+          <p:cNvPr id="39" name="Text 37"/>
+          <p:cNvSpPr/>
+          <p:nvPr/>
+        </p:nvSpPr>
+        <p:spPr>
+          <a:xfrm>
+            <a:off x="6238821" y="3364992"/>
+            <a:ext cx="78377" cy="475488"/>
+          </a:xfrm>
+          <a:prstGeom prst="rect">
+            <a:avLst/>
+          </a:prstGeom>
+          <a:noFill/>
+          <a:ln/>
+        </p:spPr>
+        <p:txBody>
+          <a:bodyPr wrap="square" lIns="0" tIns="0" rIns="0" bIns="0" rtlCol="0" anchor="ctr"/>
+          <a:lstStyle/>
+          <a:p>
+            <a:pPr algn="ctr" indent="0" marL="0">
+              <a:buNone/>
+            </a:pPr>
+            <a:r>
+              <a:rPr lang="en-US" sz="1600" b="1" dirty="0">
+                <a:solidFill>
+                  <a:srgbClr val="0D9488"/>
+                </a:solidFill>
+                <a:latin typeface="Trebuchet MS" pitchFamily="34" charset="0"/>
+                <a:ea typeface="Trebuchet MS" pitchFamily="34" charset="-122"/>
+                <a:cs typeface="Trebuchet MS" pitchFamily="34" charset="-120"/>
+              </a:rPr>
+              <a:t>·</a:t>
+            </a:r>
+            <a:endParaRPr lang="en-US" sz="1600" dirty="0"/>
+          </a:p>
+        </p:txBody>
+      </p:sp>
+      <p:sp>
+        <p:nvSpPr>
+          <p:cNvPr id="40" name="Shape 38"/>
+          <p:cNvSpPr/>
+          <p:nvPr/>
+        </p:nvSpPr>
+        <p:spPr>
+          <a:xfrm>
+            <a:off x="6317198" y="3364992"/>
+            <a:ext cx="1005840" cy="475488"/>
+          </a:xfrm>
+          <a:prstGeom prst="rect">
+            <a:avLst>
+              <a:gd name="adj" fmla="val 9615"/>
+            </a:avLst>
+          </a:prstGeom>
+          <a:solidFill>
+            <a:srgbClr val="FFFFFF"/>
+          </a:solidFill>
+          <a:ln w="12700">
+            <a:solidFill>
+              <a:srgbClr val="0D9488"/>
+            </a:solidFill>
+            <a:prstDash val="solid"/>
+          </a:ln>
+        </p:spPr>
+      </p:sp>
+      <p:sp>
+        <p:nvSpPr>
+          <p:cNvPr id="41" name="Text 39"/>
+          <p:cNvSpPr/>
+          <p:nvPr/>
+        </p:nvSpPr>
+        <p:spPr>
+          <a:xfrm>
+            <a:off x="6317198" y="3364992"/>
+            <a:ext cx="1005840" cy="475488"/>
+          </a:xfrm>
+          <a:prstGeom prst="rect">
+            <a:avLst/>
+          </a:prstGeom>
+          <a:noFill/>
+          <a:ln/>
+        </p:spPr>
+        <p:txBody>
+          <a:bodyPr wrap="square" lIns="0" tIns="0" rIns="0" bIns="0" rtlCol="0" anchor="ctr"/>
+          <a:lstStyle/>
+          <a:p>
+            <a:pPr algn="ctr" indent="0" marL="0">
+              <a:buNone/>
+            </a:pPr>
+            <a:r>
+              <a:rPr lang="en-US" sz="1400" b="1" dirty="0">
+                <a:solidFill>
+                  <a:srgbClr val="0D9488"/>
+                </a:solidFill>
+                <a:latin typeface="Trebuchet MS" pitchFamily="34" charset="0"/>
+                <a:ea typeface="Trebuchet MS" pitchFamily="34" charset="-122"/>
+                <a:cs typeface="Trebuchet MS" pitchFamily="34" charset="-120"/>
+              </a:rPr>
+              <a:t>i</a:t>
+            </a:r>
+            <a:endParaRPr lang="en-US" sz="1400" dirty="0"/>
+          </a:p>
+        </p:txBody>
+      </p:sp>
+      <p:sp>
+        <p:nvSpPr>
+          <p:cNvPr id="42" name="Text 40"/>
+          <p:cNvSpPr/>
+          <p:nvPr/>
+        </p:nvSpPr>
+        <p:spPr>
+          <a:xfrm>
+            <a:off x="7323038" y="3364992"/>
+            <a:ext cx="78377" cy="475488"/>
+          </a:xfrm>
+          <a:prstGeom prst="rect">
+            <a:avLst/>
+          </a:prstGeom>
+          <a:noFill/>
+          <a:ln/>
+        </p:spPr>
+        <p:txBody>
+          <a:bodyPr wrap="square" lIns="0" tIns="0" rIns="0" bIns="0" rtlCol="0" anchor="ctr"/>
+          <a:lstStyle/>
+          <a:p>
+            <a:pPr algn="ctr" indent="0" marL="0">
+              <a:buNone/>
+            </a:pPr>
+            <a:r>
+              <a:rPr lang="en-US" sz="1600" b="1" dirty="0">
+                <a:solidFill>
+                  <a:srgbClr val="0D9488"/>
+                </a:solidFill>
+                <a:latin typeface="Trebuchet MS" pitchFamily="34" charset="0"/>
+                <a:ea typeface="Trebuchet MS" pitchFamily="34" charset="-122"/>
+                <a:cs typeface="Trebuchet MS" pitchFamily="34" charset="-120"/>
+              </a:rPr>
+              <a:t>·</a:t>
+            </a:r>
+            <a:endParaRPr lang="en-US" sz="1600" dirty="0"/>
+          </a:p>
+        </p:txBody>
+      </p:sp>
+      <p:sp>
+        <p:nvSpPr>
+          <p:cNvPr id="43" name="Shape 41"/>
+          <p:cNvSpPr/>
+          <p:nvPr/>
+        </p:nvSpPr>
+        <p:spPr>
+          <a:xfrm>
+            <a:off x="7401415" y="3364992"/>
+            <a:ext cx="1005840" cy="475488"/>
+          </a:xfrm>
+          <a:prstGeom prst="rect">
+            <a:avLst>
+              <a:gd name="adj" fmla="val 9615"/>
+            </a:avLst>
+          </a:prstGeom>
+          <a:solidFill>
+            <a:srgbClr val="FFFFFF"/>
+          </a:solidFill>
+          <a:ln w="12700">
+            <a:solidFill>
+              <a:srgbClr val="0D9488"/>
+            </a:solidFill>
+            <a:prstDash val="solid"/>
+          </a:ln>
+        </p:spPr>
+      </p:sp>
+      <p:sp>
+        <p:nvSpPr>
+          <p:cNvPr id="44" name="Text 42"/>
+          <p:cNvSpPr/>
+          <p:nvPr/>
+        </p:nvSpPr>
+        <p:spPr>
+          <a:xfrm>
+            <a:off x="7401415" y="3364992"/>
+            <a:ext cx="1005840" cy="475488"/>
+          </a:xfrm>
+          <a:prstGeom prst="rect">
+            <a:avLst/>
+          </a:prstGeom>
+          <a:noFill/>
+          <a:ln/>
+        </p:spPr>
+        <p:txBody>
+          <a:bodyPr wrap="square" lIns="0" tIns="0" rIns="0" bIns="0" rtlCol="0" anchor="ctr"/>
+          <a:lstStyle/>
+          <a:p>
+            <a:pPr algn="ctr" indent="0" marL="0">
+              <a:buNone/>
+            </a:pPr>
+            <a:r>
+              <a:rPr lang="en-US" sz="1400" b="1" dirty="0">
+                <a:solidFill>
+                  <a:srgbClr val="0D9488"/>
+                </a:solidFill>
+                <a:latin typeface="Trebuchet MS" pitchFamily="34" charset="0"/>
+                <a:ea typeface="Trebuchet MS" pitchFamily="34" charset="-122"/>
+                <a:cs typeface="Trebuchet MS" pitchFamily="34" charset="-120"/>
+              </a:rPr>
+              <a:t>ty</a:t>
+            </a:r>
+            <a:endParaRPr lang="en-US" sz="1400" dirty="0"/>
+          </a:p>
+        </p:txBody>
+      </p:sp>
+      <p:sp>
+        <p:nvSpPr>
+          <p:cNvPr id="45" name="Shape 43"/>
           <p:cNvSpPr/>
           <p:nvPr/>
         </p:nvSpPr>
@@ -23101,7 +22645,7 @@
       </p:sp>
       <p:sp>
         <p:nvSpPr>
-          <p:cNvPr id="40" name="Text 38"/>
+          <p:cNvPr id="46" name="Text 44"/>
           <p:cNvSpPr/>
           <p:nvPr/>
         </p:nvSpPr>
@@ -23140,7 +22684,7 @@
       </p:sp>
       <p:sp>
         <p:nvSpPr>
-          <p:cNvPr id="41" name="Shape 39"/>
+          <p:cNvPr id="47" name="Shape 45"/>
           <p:cNvSpPr/>
           <p:nvPr/>
         </p:nvSpPr>
@@ -23167,14 +22711,14 @@
       </p:sp>
       <p:sp>
         <p:nvSpPr>
-          <p:cNvPr id="42" name="Shape 40"/>
-          <p:cNvSpPr/>
-          <p:nvPr/>
-        </p:nvSpPr>
-        <p:spPr>
-          <a:xfrm>
-            <a:off x="1951330" y="4169664"/>
-            <a:ext cx="676656" cy="384048"/>
+          <p:cNvPr id="48" name="Shape 46"/>
+          <p:cNvSpPr/>
+          <p:nvPr/>
+        </p:nvSpPr>
+        <p:spPr>
+          <a:xfrm>
+            <a:off x="1952596" y="4169664"/>
+            <a:ext cx="493776" cy="384048"/>
           </a:xfrm>
           <a:prstGeom prst="rect">
             <a:avLst>
@@ -23194,14 +22738,14 @@
       </p:sp>
       <p:sp>
         <p:nvSpPr>
-          <p:cNvPr id="43" name="Text 41"/>
-          <p:cNvSpPr/>
-          <p:nvPr/>
-        </p:nvSpPr>
-        <p:spPr>
-          <a:xfrm>
-            <a:off x="1951330" y="4169664"/>
-            <a:ext cx="676656" cy="384048"/>
+          <p:cNvPr id="49" name="Text 47"/>
+          <p:cNvSpPr/>
+          <p:nvPr/>
+        </p:nvSpPr>
+        <p:spPr>
+          <a:xfrm>
+            <a:off x="1952596" y="4169664"/>
+            <a:ext cx="493776" cy="384048"/>
           </a:xfrm>
           <a:prstGeom prst="rect">
             <a:avLst/>
@@ -23233,14 +22777,14 @@
       </p:sp>
       <p:sp>
         <p:nvSpPr>
-          <p:cNvPr id="44" name="Shape 42"/>
-          <p:cNvSpPr/>
-          <p:nvPr/>
-        </p:nvSpPr>
-        <p:spPr>
-          <a:xfrm>
-            <a:off x="2677363" y="4169664"/>
-            <a:ext cx="676656" cy="384048"/>
+          <p:cNvPr id="50" name="Shape 48"/>
+          <p:cNvSpPr/>
+          <p:nvPr/>
+        </p:nvSpPr>
+        <p:spPr>
+          <a:xfrm>
+            <a:off x="2497015" y="4169664"/>
+            <a:ext cx="493776" cy="384048"/>
           </a:xfrm>
           <a:prstGeom prst="rect">
             <a:avLst>
@@ -23260,14 +22804,14 @@
       </p:sp>
       <p:sp>
         <p:nvSpPr>
-          <p:cNvPr id="45" name="Text 43"/>
-          <p:cNvSpPr/>
-          <p:nvPr/>
-        </p:nvSpPr>
-        <p:spPr>
-          <a:xfrm>
-            <a:off x="2677363" y="4169664"/>
-            <a:ext cx="676656" cy="384048"/>
+          <p:cNvPr id="51" name="Text 49"/>
+          <p:cNvSpPr/>
+          <p:nvPr/>
+        </p:nvSpPr>
+        <p:spPr>
+          <a:xfrm>
+            <a:off x="2497015" y="4169664"/>
+            <a:ext cx="493776" cy="384048"/>
           </a:xfrm>
           <a:prstGeom prst="rect">
             <a:avLst/>
@@ -23299,14 +22843,14 @@
       </p:sp>
       <p:sp>
         <p:nvSpPr>
-          <p:cNvPr id="46" name="Shape 44"/>
-          <p:cNvSpPr/>
-          <p:nvPr/>
-        </p:nvSpPr>
-        <p:spPr>
-          <a:xfrm>
-            <a:off x="3403397" y="4169664"/>
-            <a:ext cx="676656" cy="384048"/>
+          <p:cNvPr id="52" name="Shape 50"/>
+          <p:cNvSpPr/>
+          <p:nvPr/>
+        </p:nvSpPr>
+        <p:spPr>
+          <a:xfrm>
+            <a:off x="3041435" y="4169664"/>
+            <a:ext cx="493776" cy="384048"/>
           </a:xfrm>
           <a:prstGeom prst="rect">
             <a:avLst>
@@ -23326,14 +22870,14 @@
       </p:sp>
       <p:sp>
         <p:nvSpPr>
-          <p:cNvPr id="47" name="Text 45"/>
-          <p:cNvSpPr/>
-          <p:nvPr/>
-        </p:nvSpPr>
-        <p:spPr>
-          <a:xfrm>
-            <a:off x="3403397" y="4169664"/>
-            <a:ext cx="676656" cy="384048"/>
+          <p:cNvPr id="53" name="Text 51"/>
+          <p:cNvSpPr/>
+          <p:nvPr/>
+        </p:nvSpPr>
+        <p:spPr>
+          <a:xfrm>
+            <a:off x="3041435" y="4169664"/>
+            <a:ext cx="493776" cy="384048"/>
           </a:xfrm>
           <a:prstGeom prst="rect">
             <a:avLst/>
@@ -23357,7 +22901,7 @@
                 <a:ea typeface="Trebuchet MS" pitchFamily="34" charset="-122"/>
                 <a:cs typeface="Trebuchet MS" pitchFamily="34" charset="-120"/>
               </a:rPr>
-              <a:t>f</a:t>
+              <a:t>fl</a:t>
             </a:r>
             <a:endParaRPr lang="en-US" sz="900" dirty="0"/>
           </a:p>
@@ -23365,14 +22909,14 @@
       </p:sp>
       <p:sp>
         <p:nvSpPr>
-          <p:cNvPr id="48" name="Shape 46"/>
-          <p:cNvSpPr/>
-          <p:nvPr/>
-        </p:nvSpPr>
-        <p:spPr>
-          <a:xfrm>
-            <a:off x="4129430" y="4169664"/>
-            <a:ext cx="676656" cy="384048"/>
+          <p:cNvPr id="54" name="Shape 52"/>
+          <p:cNvSpPr/>
+          <p:nvPr/>
+        </p:nvSpPr>
+        <p:spPr>
+          <a:xfrm>
+            <a:off x="3585855" y="4169664"/>
+            <a:ext cx="493776" cy="384048"/>
           </a:xfrm>
           <a:prstGeom prst="rect">
             <a:avLst>
@@ -23392,14 +22936,14 @@
       </p:sp>
       <p:sp>
         <p:nvSpPr>
-          <p:cNvPr id="49" name="Text 47"/>
-          <p:cNvSpPr/>
-          <p:nvPr/>
-        </p:nvSpPr>
-        <p:spPr>
-          <a:xfrm>
-            <a:off x="4129430" y="4169664"/>
-            <a:ext cx="676656" cy="384048"/>
+          <p:cNvPr id="55" name="Text 53"/>
+          <p:cNvSpPr/>
+          <p:nvPr/>
+        </p:nvSpPr>
+        <p:spPr>
+          <a:xfrm>
+            <a:off x="3585855" y="4169664"/>
+            <a:ext cx="493776" cy="384048"/>
           </a:xfrm>
           <a:prstGeom prst="rect">
             <a:avLst/>
@@ -23423,7 +22967,7 @@
                 <a:ea typeface="Trebuchet MS" pitchFamily="34" charset="-122"/>
                 <a:cs typeface="Trebuchet MS" pitchFamily="34" charset="-120"/>
               </a:rPr>
-              <a:t>l</a:t>
+              <a:t>e</a:t>
             </a:r>
             <a:endParaRPr lang="en-US" sz="900" dirty="0"/>
           </a:p>
@@ -23431,14 +22975,14 @@
       </p:sp>
       <p:sp>
         <p:nvSpPr>
-          <p:cNvPr id="50" name="Shape 48"/>
-          <p:cNvSpPr/>
-          <p:nvPr/>
-        </p:nvSpPr>
-        <p:spPr>
-          <a:xfrm>
-            <a:off x="4855464" y="4169664"/>
-            <a:ext cx="676656" cy="384048"/>
+          <p:cNvPr id="56" name="Shape 54"/>
+          <p:cNvSpPr/>
+          <p:nvPr/>
+        </p:nvSpPr>
+        <p:spPr>
+          <a:xfrm>
+            <a:off x="4130274" y="4169664"/>
+            <a:ext cx="493776" cy="384048"/>
           </a:xfrm>
           <a:prstGeom prst="rect">
             <a:avLst>
@@ -23458,14 +23002,14 @@
       </p:sp>
       <p:sp>
         <p:nvSpPr>
-          <p:cNvPr id="51" name="Text 49"/>
-          <p:cNvSpPr/>
-          <p:nvPr/>
-        </p:nvSpPr>
-        <p:spPr>
-          <a:xfrm>
-            <a:off x="4855464" y="4169664"/>
-            <a:ext cx="676656" cy="384048"/>
+          <p:cNvPr id="57" name="Text 55"/>
+          <p:cNvSpPr/>
+          <p:nvPr/>
+        </p:nvSpPr>
+        <p:spPr>
+          <a:xfrm>
+            <a:off x="4130274" y="4169664"/>
+            <a:ext cx="493776" cy="384048"/>
           </a:xfrm>
           <a:prstGeom prst="rect">
             <a:avLst/>
@@ -23489,7 +23033,7 @@
                 <a:ea typeface="Trebuchet MS" pitchFamily="34" charset="-122"/>
                 <a:cs typeface="Trebuchet MS" pitchFamily="34" charset="-120"/>
               </a:rPr>
-              <a:t>e</a:t>
+              <a:t>x</a:t>
             </a:r>
             <a:endParaRPr lang="en-US" sz="900" dirty="0"/>
           </a:p>
@@ -23497,14 +23041,53 @@
       </p:sp>
       <p:sp>
         <p:nvSpPr>
-          <p:cNvPr id="52" name="Shape 50"/>
-          <p:cNvSpPr/>
-          <p:nvPr/>
-        </p:nvSpPr>
-        <p:spPr>
-          <a:xfrm>
-            <a:off x="5581498" y="4169664"/>
-            <a:ext cx="676656" cy="384048"/>
+          <p:cNvPr id="58" name="Text 56"/>
+          <p:cNvSpPr/>
+          <p:nvPr/>
+        </p:nvSpPr>
+        <p:spPr>
+          <a:xfrm>
+            <a:off x="4130274" y="4572000"/>
+            <a:ext cx="493776" cy="219456"/>
+          </a:xfrm>
+          <a:prstGeom prst="rect">
+            <a:avLst/>
+          </a:prstGeom>
+          <a:noFill/>
+          <a:ln/>
+        </p:spPr>
+        <p:txBody>
+          <a:bodyPr wrap="square" lIns="0" tIns="0" rIns="0" bIns="0" rtlCol="0" anchor="t"/>
+          <a:lstStyle/>
+          <a:p>
+            <a:pPr algn="ctr" indent="0" marL="0">
+              <a:buNone/>
+            </a:pPr>
+            <a:r>
+              <a:rPr lang="en-US" sz="750" i="1" dirty="0">
+                <a:solidFill>
+                  <a:srgbClr val="94A3B8"/>
+                </a:solidFill>
+                <a:latin typeface="Calibri" pitchFamily="34" charset="0"/>
+                <a:ea typeface="Calibri" pitchFamily="34" charset="-122"/>
+                <a:cs typeface="Calibri" pitchFamily="34" charset="-120"/>
+              </a:rPr>
+              <a:t>/ks/</a:t>
+            </a:r>
+            <a:endParaRPr lang="en-US" sz="750" dirty="0"/>
+          </a:p>
+        </p:txBody>
+      </p:sp>
+      <p:sp>
+        <p:nvSpPr>
+          <p:cNvPr id="59" name="Shape 57"/>
+          <p:cNvSpPr/>
+          <p:nvPr/>
+        </p:nvSpPr>
+        <p:spPr>
+          <a:xfrm>
+            <a:off x="4674694" y="4169664"/>
+            <a:ext cx="493776" cy="384048"/>
           </a:xfrm>
           <a:prstGeom prst="rect">
             <a:avLst>
@@ -23524,14 +23107,14 @@
       </p:sp>
       <p:sp>
         <p:nvSpPr>
-          <p:cNvPr id="53" name="Text 51"/>
-          <p:cNvSpPr/>
-          <p:nvPr/>
-        </p:nvSpPr>
-        <p:spPr>
-          <a:xfrm>
-            <a:off x="5581498" y="4169664"/>
-            <a:ext cx="676656" cy="384048"/>
+          <p:cNvPr id="60" name="Text 58"/>
+          <p:cNvSpPr/>
+          <p:nvPr/>
+        </p:nvSpPr>
+        <p:spPr>
+          <a:xfrm>
+            <a:off x="4674694" y="4169664"/>
+            <a:ext cx="493776" cy="384048"/>
           </a:xfrm>
           <a:prstGeom prst="rect">
             <a:avLst/>
@@ -23555,7 +23138,7 @@
                 <a:ea typeface="Trebuchet MS" pitchFamily="34" charset="-122"/>
                 <a:cs typeface="Trebuchet MS" pitchFamily="34" charset="-120"/>
               </a:rPr>
-              <a:t>x</a:t>
+              <a:t>i</a:t>
             </a:r>
             <a:endParaRPr lang="en-US" sz="900" dirty="0"/>
           </a:p>
@@ -23563,14 +23146,410 @@
       </p:sp>
       <p:sp>
         <p:nvSpPr>
-          <p:cNvPr id="54" name="Text 52"/>
-          <p:cNvSpPr/>
-          <p:nvPr/>
-        </p:nvSpPr>
-        <p:spPr>
-          <a:xfrm>
-            <a:off x="5581498" y="4572000"/>
-            <a:ext cx="676656" cy="219456"/>
+          <p:cNvPr id="61" name="Shape 59"/>
+          <p:cNvSpPr/>
+          <p:nvPr/>
+        </p:nvSpPr>
+        <p:spPr>
+          <a:xfrm>
+            <a:off x="5219114" y="4169664"/>
+            <a:ext cx="493776" cy="384048"/>
+          </a:xfrm>
+          <a:prstGeom prst="rect">
+            <a:avLst>
+              <a:gd name="adj" fmla="val 9524"/>
+            </a:avLst>
+          </a:prstGeom>
+          <a:solidFill>
+            <a:srgbClr val="FFFFFF"/>
+          </a:solidFill>
+          <a:ln w="12700">
+            <a:solidFill>
+              <a:srgbClr val="DB2777"/>
+            </a:solidFill>
+            <a:prstDash val="solid"/>
+          </a:ln>
+        </p:spPr>
+      </p:sp>
+      <p:sp>
+        <p:nvSpPr>
+          <p:cNvPr id="62" name="Text 60"/>
+          <p:cNvSpPr/>
+          <p:nvPr/>
+        </p:nvSpPr>
+        <p:spPr>
+          <a:xfrm>
+            <a:off x="5219114" y="4169664"/>
+            <a:ext cx="493776" cy="384048"/>
+          </a:xfrm>
+          <a:prstGeom prst="rect">
+            <a:avLst/>
+          </a:prstGeom>
+          <a:noFill/>
+          <a:ln/>
+        </p:spPr>
+        <p:txBody>
+          <a:bodyPr wrap="square" lIns="0" tIns="0" rIns="0" bIns="0" rtlCol="0" anchor="ctr"/>
+          <a:lstStyle/>
+          <a:p>
+            <a:pPr algn="ctr" indent="0" marL="0">
+              <a:buNone/>
+            </a:pPr>
+            <a:r>
+              <a:rPr lang="en-US" sz="900" b="1" dirty="0">
+                <a:solidFill>
+                  <a:srgbClr val="9D174D"/>
+                </a:solidFill>
+                <a:latin typeface="Trebuchet MS" pitchFamily="34" charset="0"/>
+                <a:ea typeface="Trebuchet MS" pitchFamily="34" charset="-122"/>
+                <a:cs typeface="Trebuchet MS" pitchFamily="34" charset="-120"/>
+              </a:rPr>
+              <a:t>b</a:t>
+            </a:r>
+            <a:endParaRPr lang="en-US" sz="900" dirty="0"/>
+          </a:p>
+        </p:txBody>
+      </p:sp>
+      <p:sp>
+        <p:nvSpPr>
+          <p:cNvPr id="63" name="Shape 61"/>
+          <p:cNvSpPr/>
+          <p:nvPr/>
+        </p:nvSpPr>
+        <p:spPr>
+          <a:xfrm>
+            <a:off x="5763534" y="4169664"/>
+            <a:ext cx="493776" cy="384048"/>
+          </a:xfrm>
+          <a:prstGeom prst="rect">
+            <a:avLst>
+              <a:gd name="adj" fmla="val 9524"/>
+            </a:avLst>
+          </a:prstGeom>
+          <a:solidFill>
+            <a:srgbClr val="FFFFFF"/>
+          </a:solidFill>
+          <a:ln w="12700">
+            <a:solidFill>
+              <a:srgbClr val="DB2777"/>
+            </a:solidFill>
+            <a:prstDash val="solid"/>
+          </a:ln>
+        </p:spPr>
+      </p:sp>
+      <p:sp>
+        <p:nvSpPr>
+          <p:cNvPr id="64" name="Text 62"/>
+          <p:cNvSpPr/>
+          <p:nvPr/>
+        </p:nvSpPr>
+        <p:spPr>
+          <a:xfrm>
+            <a:off x="5763534" y="4169664"/>
+            <a:ext cx="493776" cy="384048"/>
+          </a:xfrm>
+          <a:prstGeom prst="rect">
+            <a:avLst/>
+          </a:prstGeom>
+          <a:noFill/>
+          <a:ln/>
+        </p:spPr>
+        <p:txBody>
+          <a:bodyPr wrap="square" lIns="0" tIns="0" rIns="0" bIns="0" rtlCol="0" anchor="ctr"/>
+          <a:lstStyle/>
+          <a:p>
+            <a:pPr algn="ctr" indent="0" marL="0">
+              <a:buNone/>
+            </a:pPr>
+            <a:r>
+              <a:rPr lang="en-US" sz="900" b="1" dirty="0">
+                <a:solidFill>
+                  <a:srgbClr val="9D174D"/>
+                </a:solidFill>
+                <a:latin typeface="Trebuchet MS" pitchFamily="34" charset="0"/>
+                <a:ea typeface="Trebuchet MS" pitchFamily="34" charset="-122"/>
+                <a:cs typeface="Trebuchet MS" pitchFamily="34" charset="-120"/>
+              </a:rPr>
+              <a:t>i</a:t>
+            </a:r>
+            <a:endParaRPr lang="en-US" sz="900" dirty="0"/>
+          </a:p>
+        </p:txBody>
+      </p:sp>
+      <p:sp>
+        <p:nvSpPr>
+          <p:cNvPr id="65" name="Shape 63"/>
+          <p:cNvSpPr/>
+          <p:nvPr/>
+        </p:nvSpPr>
+        <p:spPr>
+          <a:xfrm>
+            <a:off x="6307953" y="4169664"/>
+            <a:ext cx="493776" cy="384048"/>
+          </a:xfrm>
+          <a:prstGeom prst="rect">
+            <a:avLst>
+              <a:gd name="adj" fmla="val 9524"/>
+            </a:avLst>
+          </a:prstGeom>
+          <a:solidFill>
+            <a:srgbClr val="FFFFFF"/>
+          </a:solidFill>
+          <a:ln w="12700">
+            <a:solidFill>
+              <a:srgbClr val="DB2777"/>
+            </a:solidFill>
+            <a:prstDash val="solid"/>
+          </a:ln>
+        </p:spPr>
+      </p:sp>
+      <p:sp>
+        <p:nvSpPr>
+          <p:cNvPr id="66" name="Text 64"/>
+          <p:cNvSpPr/>
+          <p:nvPr/>
+        </p:nvSpPr>
+        <p:spPr>
+          <a:xfrm>
+            <a:off x="6307953" y="4169664"/>
+            <a:ext cx="493776" cy="384048"/>
+          </a:xfrm>
+          <a:prstGeom prst="rect">
+            <a:avLst/>
+          </a:prstGeom>
+          <a:noFill/>
+          <a:ln/>
+        </p:spPr>
+        <p:txBody>
+          <a:bodyPr wrap="square" lIns="0" tIns="0" rIns="0" bIns="0" rtlCol="0" anchor="ctr"/>
+          <a:lstStyle/>
+          <a:p>
+            <a:pPr algn="ctr" indent="0" marL="0">
+              <a:buNone/>
+            </a:pPr>
+            <a:r>
+              <a:rPr lang="en-US" sz="900" b="1" dirty="0">
+                <a:solidFill>
+                  <a:srgbClr val="9D174D"/>
+                </a:solidFill>
+                <a:latin typeface="Trebuchet MS" pitchFamily="34" charset="0"/>
+                <a:ea typeface="Trebuchet MS" pitchFamily="34" charset="-122"/>
+                <a:cs typeface="Trebuchet MS" pitchFamily="34" charset="-120"/>
+              </a:rPr>
+              <a:t>l</a:t>
+            </a:r>
+            <a:endParaRPr lang="en-US" sz="900" dirty="0"/>
+          </a:p>
+        </p:txBody>
+      </p:sp>
+      <p:sp>
+        <p:nvSpPr>
+          <p:cNvPr id="67" name="Shape 65"/>
+          <p:cNvSpPr/>
+          <p:nvPr/>
+        </p:nvSpPr>
+        <p:spPr>
+          <a:xfrm>
+            <a:off x="6852373" y="4169664"/>
+            <a:ext cx="493776" cy="384048"/>
+          </a:xfrm>
+          <a:prstGeom prst="rect">
+            <a:avLst>
+              <a:gd name="adj" fmla="val 9524"/>
+            </a:avLst>
+          </a:prstGeom>
+          <a:solidFill>
+            <a:srgbClr val="FFFFFF"/>
+          </a:solidFill>
+          <a:ln w="12700">
+            <a:solidFill>
+              <a:srgbClr val="DB2777"/>
+            </a:solidFill>
+            <a:prstDash val="solid"/>
+          </a:ln>
+        </p:spPr>
+      </p:sp>
+      <p:sp>
+        <p:nvSpPr>
+          <p:cNvPr id="68" name="Text 66"/>
+          <p:cNvSpPr/>
+          <p:nvPr/>
+        </p:nvSpPr>
+        <p:spPr>
+          <a:xfrm>
+            <a:off x="6852373" y="4169664"/>
+            <a:ext cx="493776" cy="384048"/>
+          </a:xfrm>
+          <a:prstGeom prst="rect">
+            <a:avLst/>
+          </a:prstGeom>
+          <a:noFill/>
+          <a:ln/>
+        </p:spPr>
+        <p:txBody>
+          <a:bodyPr wrap="square" lIns="0" tIns="0" rIns="0" bIns="0" rtlCol="0" anchor="ctr"/>
+          <a:lstStyle/>
+          <a:p>
+            <a:pPr algn="ctr" indent="0" marL="0">
+              <a:buNone/>
+            </a:pPr>
+            <a:r>
+              <a:rPr lang="en-US" sz="900" b="1" dirty="0">
+                <a:solidFill>
+                  <a:srgbClr val="9D174D"/>
+                </a:solidFill>
+                <a:latin typeface="Trebuchet MS" pitchFamily="34" charset="0"/>
+                <a:ea typeface="Trebuchet MS" pitchFamily="34" charset="-122"/>
+                <a:cs typeface="Trebuchet MS" pitchFamily="34" charset="-120"/>
+              </a:rPr>
+              <a:t>i</a:t>
+            </a:r>
+            <a:endParaRPr lang="en-US" sz="900" dirty="0"/>
+          </a:p>
+        </p:txBody>
+      </p:sp>
+      <p:sp>
+        <p:nvSpPr>
+          <p:cNvPr id="69" name="Shape 67"/>
+          <p:cNvSpPr/>
+          <p:nvPr/>
+        </p:nvSpPr>
+        <p:spPr>
+          <a:xfrm>
+            <a:off x="7396793" y="4169664"/>
+            <a:ext cx="493776" cy="384048"/>
+          </a:xfrm>
+          <a:prstGeom prst="rect">
+            <a:avLst>
+              <a:gd name="adj" fmla="val 9524"/>
+            </a:avLst>
+          </a:prstGeom>
+          <a:solidFill>
+            <a:srgbClr val="FFFFFF"/>
+          </a:solidFill>
+          <a:ln w="12700">
+            <a:solidFill>
+              <a:srgbClr val="DB2777"/>
+            </a:solidFill>
+            <a:prstDash val="solid"/>
+          </a:ln>
+        </p:spPr>
+      </p:sp>
+      <p:sp>
+        <p:nvSpPr>
+          <p:cNvPr id="70" name="Text 68"/>
+          <p:cNvSpPr/>
+          <p:nvPr/>
+        </p:nvSpPr>
+        <p:spPr>
+          <a:xfrm>
+            <a:off x="7396793" y="4169664"/>
+            <a:ext cx="493776" cy="384048"/>
+          </a:xfrm>
+          <a:prstGeom prst="rect">
+            <a:avLst/>
+          </a:prstGeom>
+          <a:noFill/>
+          <a:ln/>
+        </p:spPr>
+        <p:txBody>
+          <a:bodyPr wrap="square" lIns="0" tIns="0" rIns="0" bIns="0" rtlCol="0" anchor="ctr"/>
+          <a:lstStyle/>
+          <a:p>
+            <a:pPr algn="ctr" indent="0" marL="0">
+              <a:buNone/>
+            </a:pPr>
+            <a:r>
+              <a:rPr lang="en-US" sz="900" b="1" dirty="0">
+                <a:solidFill>
+                  <a:srgbClr val="9D174D"/>
+                </a:solidFill>
+                <a:latin typeface="Trebuchet MS" pitchFamily="34" charset="0"/>
+                <a:ea typeface="Trebuchet MS" pitchFamily="34" charset="-122"/>
+                <a:cs typeface="Trebuchet MS" pitchFamily="34" charset="-120"/>
+              </a:rPr>
+              <a:t>t</a:t>
+            </a:r>
+            <a:endParaRPr lang="en-US" sz="900" dirty="0"/>
+          </a:p>
+        </p:txBody>
+      </p:sp>
+      <p:sp>
+        <p:nvSpPr>
+          <p:cNvPr id="71" name="Shape 69"/>
+          <p:cNvSpPr/>
+          <p:nvPr/>
+        </p:nvSpPr>
+        <p:spPr>
+          <a:xfrm>
+            <a:off x="7941212" y="4169664"/>
+            <a:ext cx="493776" cy="384048"/>
+          </a:xfrm>
+          <a:prstGeom prst="rect">
+            <a:avLst>
+              <a:gd name="adj" fmla="val 9524"/>
+            </a:avLst>
+          </a:prstGeom>
+          <a:solidFill>
+            <a:srgbClr val="FFFFFF"/>
+          </a:solidFill>
+          <a:ln w="12700">
+            <a:solidFill>
+              <a:srgbClr val="DB2777"/>
+            </a:solidFill>
+            <a:prstDash val="solid"/>
+          </a:ln>
+        </p:spPr>
+      </p:sp>
+      <p:sp>
+        <p:nvSpPr>
+          <p:cNvPr id="72" name="Text 70"/>
+          <p:cNvSpPr/>
+          <p:nvPr/>
+        </p:nvSpPr>
+        <p:spPr>
+          <a:xfrm>
+            <a:off x="7941212" y="4169664"/>
+            <a:ext cx="493776" cy="384048"/>
+          </a:xfrm>
+          <a:prstGeom prst="rect">
+            <a:avLst/>
+          </a:prstGeom>
+          <a:noFill/>
+          <a:ln/>
+        </p:spPr>
+        <p:txBody>
+          <a:bodyPr wrap="square" lIns="0" tIns="0" rIns="0" bIns="0" rtlCol="0" anchor="ctr"/>
+          <a:lstStyle/>
+          <a:p>
+            <a:pPr algn="ctr" indent="0" marL="0">
+              <a:buNone/>
+            </a:pPr>
+            <a:r>
+              <a:rPr lang="en-US" sz="900" b="1" dirty="0">
+                <a:solidFill>
+                  <a:srgbClr val="9D174D"/>
+                </a:solidFill>
+                <a:latin typeface="Trebuchet MS" pitchFamily="34" charset="0"/>
+                <a:ea typeface="Trebuchet MS" pitchFamily="34" charset="-122"/>
+                <a:cs typeface="Trebuchet MS" pitchFamily="34" charset="-120"/>
+              </a:rPr>
+              <a:t>y</a:t>
+            </a:r>
+            <a:endParaRPr lang="en-US" sz="900" dirty="0"/>
+          </a:p>
+        </p:txBody>
+      </p:sp>
+      <p:sp>
+        <p:nvSpPr>
+          <p:cNvPr id="73" name="Text 71"/>
+          <p:cNvSpPr/>
+          <p:nvPr/>
+        </p:nvSpPr>
+        <p:spPr>
+          <a:xfrm>
+            <a:off x="7941212" y="4572000"/>
+            <a:ext cx="493776" cy="219456"/>
           </a:xfrm>
           <a:prstGeom prst="rect">
             <a:avLst/>
@@ -23594,207 +23573,9 @@
                 <a:ea typeface="Calibri" pitchFamily="34" charset="-122"/>
                 <a:cs typeface="Calibri" pitchFamily="34" charset="-120"/>
               </a:rPr>
-              <a:t>/ks/</a:t>
+              <a:t>/ee/</a:t>
             </a:r>
             <a:endParaRPr lang="en-US" sz="750" dirty="0"/>
-          </a:p>
-        </p:txBody>
-      </p:sp>
-      <p:sp>
-        <p:nvSpPr>
-          <p:cNvPr id="55" name="Shape 53"/>
-          <p:cNvSpPr/>
-          <p:nvPr/>
-        </p:nvSpPr>
-        <p:spPr>
-          <a:xfrm>
-            <a:off x="6307531" y="4169664"/>
-            <a:ext cx="676656" cy="384048"/>
-          </a:xfrm>
-          <a:prstGeom prst="rect">
-            <a:avLst>
-              <a:gd name="adj" fmla="val 9524"/>
-            </a:avLst>
-          </a:prstGeom>
-          <a:solidFill>
-            <a:srgbClr val="FFFFFF"/>
-          </a:solidFill>
-          <a:ln w="12700">
-            <a:solidFill>
-              <a:srgbClr val="DB2777"/>
-            </a:solidFill>
-            <a:prstDash val="solid"/>
-          </a:ln>
-        </p:spPr>
-      </p:sp>
-      <p:sp>
-        <p:nvSpPr>
-          <p:cNvPr id="56" name="Text 54"/>
-          <p:cNvSpPr/>
-          <p:nvPr/>
-        </p:nvSpPr>
-        <p:spPr>
-          <a:xfrm>
-            <a:off x="6307531" y="4169664"/>
-            <a:ext cx="676656" cy="384048"/>
-          </a:xfrm>
-          <a:prstGeom prst="rect">
-            <a:avLst/>
-          </a:prstGeom>
-          <a:noFill/>
-          <a:ln/>
-        </p:spPr>
-        <p:txBody>
-          <a:bodyPr wrap="square" lIns="0" tIns="0" rIns="0" bIns="0" rtlCol="0" anchor="ctr"/>
-          <a:lstStyle/>
-          <a:p>
-            <a:pPr algn="ctr" indent="0" marL="0">
-              <a:buNone/>
-            </a:pPr>
-            <a:r>
-              <a:rPr lang="en-US" sz="900" b="1" dirty="0">
-                <a:solidFill>
-                  <a:srgbClr val="9D174D"/>
-                </a:solidFill>
-                <a:latin typeface="Trebuchet MS" pitchFamily="34" charset="0"/>
-                <a:ea typeface="Trebuchet MS" pitchFamily="34" charset="-122"/>
-                <a:cs typeface="Trebuchet MS" pitchFamily="34" charset="-120"/>
-              </a:rPr>
-              <a:t>i</a:t>
-            </a:r>
-            <a:endParaRPr lang="en-US" sz="900" dirty="0"/>
-          </a:p>
-        </p:txBody>
-      </p:sp>
-      <p:sp>
-        <p:nvSpPr>
-          <p:cNvPr id="57" name="Shape 55"/>
-          <p:cNvSpPr/>
-          <p:nvPr/>
-        </p:nvSpPr>
-        <p:spPr>
-          <a:xfrm>
-            <a:off x="7033565" y="4169664"/>
-            <a:ext cx="676656" cy="384048"/>
-          </a:xfrm>
-          <a:prstGeom prst="rect">
-            <a:avLst>
-              <a:gd name="adj" fmla="val 9524"/>
-            </a:avLst>
-          </a:prstGeom>
-          <a:solidFill>
-            <a:srgbClr val="FFFFFF"/>
-          </a:solidFill>
-          <a:ln w="12700">
-            <a:solidFill>
-              <a:srgbClr val="DB2777"/>
-            </a:solidFill>
-            <a:prstDash val="solid"/>
-          </a:ln>
-        </p:spPr>
-      </p:sp>
-      <p:sp>
-        <p:nvSpPr>
-          <p:cNvPr id="58" name="Text 56"/>
-          <p:cNvSpPr/>
-          <p:nvPr/>
-        </p:nvSpPr>
-        <p:spPr>
-          <a:xfrm>
-            <a:off x="7033565" y="4169664"/>
-            <a:ext cx="676656" cy="384048"/>
-          </a:xfrm>
-          <a:prstGeom prst="rect">
-            <a:avLst/>
-          </a:prstGeom>
-          <a:noFill/>
-          <a:ln/>
-        </p:spPr>
-        <p:txBody>
-          <a:bodyPr wrap="square" lIns="0" tIns="0" rIns="0" bIns="0" rtlCol="0" anchor="ctr"/>
-          <a:lstStyle/>
-          <a:p>
-            <a:pPr algn="ctr" indent="0" marL="0">
-              <a:buNone/>
-            </a:pPr>
-            <a:r>
-              <a:rPr lang="en-US" sz="900" b="1" dirty="0">
-                <a:solidFill>
-                  <a:srgbClr val="9D174D"/>
-                </a:solidFill>
-                <a:latin typeface="Trebuchet MS" pitchFamily="34" charset="0"/>
-                <a:ea typeface="Trebuchet MS" pitchFamily="34" charset="-122"/>
-                <a:cs typeface="Trebuchet MS" pitchFamily="34" charset="-120"/>
-              </a:rPr>
-              <a:t>b</a:t>
-            </a:r>
-            <a:endParaRPr lang="en-US" sz="900" dirty="0"/>
-          </a:p>
-        </p:txBody>
-      </p:sp>
-      <p:sp>
-        <p:nvSpPr>
-          <p:cNvPr id="59" name="Shape 57"/>
-          <p:cNvSpPr/>
-          <p:nvPr/>
-        </p:nvSpPr>
-        <p:spPr>
-          <a:xfrm>
-            <a:off x="7759598" y="4169664"/>
-            <a:ext cx="676656" cy="384048"/>
-          </a:xfrm>
-          <a:prstGeom prst="rect">
-            <a:avLst>
-              <a:gd name="adj" fmla="val 9524"/>
-            </a:avLst>
-          </a:prstGeom>
-          <a:solidFill>
-            <a:srgbClr val="FFFFFF"/>
-          </a:solidFill>
-          <a:ln w="12700">
-            <a:solidFill>
-              <a:srgbClr val="DB2777"/>
-            </a:solidFill>
-            <a:prstDash val="solid"/>
-          </a:ln>
-        </p:spPr>
-      </p:sp>
-      <p:sp>
-        <p:nvSpPr>
-          <p:cNvPr id="60" name="Text 58"/>
-          <p:cNvSpPr/>
-          <p:nvPr/>
-        </p:nvSpPr>
-        <p:spPr>
-          <a:xfrm>
-            <a:off x="7759598" y="4169664"/>
-            <a:ext cx="676656" cy="384048"/>
-          </a:xfrm>
-          <a:prstGeom prst="rect">
-            <a:avLst/>
-          </a:prstGeom>
-          <a:noFill/>
-          <a:ln/>
-        </p:spPr>
-        <p:txBody>
-          <a:bodyPr wrap="square" lIns="0" tIns="0" rIns="0" bIns="0" rtlCol="0" anchor="ctr"/>
-          <a:lstStyle/>
-          <a:p>
-            <a:pPr algn="ctr" indent="0" marL="0">
-              <a:buNone/>
-            </a:pPr>
-            <a:r>
-              <a:rPr lang="en-US" sz="900" b="1" dirty="0">
-                <a:solidFill>
-                  <a:srgbClr val="9D174D"/>
-                </a:solidFill>
-                <a:latin typeface="Trebuchet MS" pitchFamily="34" charset="0"/>
-                <a:ea typeface="Trebuchet MS" pitchFamily="34" charset="-122"/>
-                <a:cs typeface="Trebuchet MS" pitchFamily="34" charset="-120"/>
-              </a:rPr>
-              <a:t>le</a:t>
-            </a:r>
-            <a:endParaRPr lang="en-US" sz="900" dirty="0"/>
           </a:p>
         </p:txBody>
       </p:sp>
@@ -24223,7 +24004,7 @@
                 <a:ea typeface="Trebuchet MS" pitchFamily="34" charset="-122"/>
                 <a:cs typeface="Trebuchet MS" pitchFamily="34" charset="-120"/>
               </a:rPr>
-              <a:t>deflect</a:t>
+              <a:t>deflection</a:t>
             </a:r>
             <a:endParaRPr lang="en-US" sz="2800" dirty="0"/>
           </a:p>
@@ -25050,7 +24831,7 @@
                 <a:ea typeface="Trebuchet MS" pitchFamily="34" charset="-122"/>
                 <a:cs typeface="Trebuchet MS" pitchFamily="34" charset="-120"/>
               </a:rPr>
-              <a:t>deflect</a:t>
+              <a:t>deflection</a:t>
             </a:r>
             <a:endParaRPr lang="en-US" sz="2800" dirty="0"/>
           </a:p>
@@ -25228,7 +25009,7 @@
                 <a:ea typeface="Calibri" pitchFamily="34" charset="-122"/>
                 <a:cs typeface="Calibri" pitchFamily="34" charset="-120"/>
               </a:rPr>
-              <a:t>away, down</a:t>
+              <a:t>away or down</a:t>
             </a:r>
             <a:endParaRPr lang="en-US" sz="850" dirty="0"/>
           </a:p>
@@ -25251,11 +25032,11 @@
             </a:avLst>
           </a:prstGeom>
           <a:solidFill>
-            <a:srgbClr val="CCFBF1"/>
+            <a:srgbClr val="FCE7F3"/>
           </a:solidFill>
           <a:ln w="19050">
             <a:solidFill>
-              <a:srgbClr val="0D9488"/>
+              <a:srgbClr val="DB2777"/>
             </a:solidFill>
             <a:prstDash val="solid"/>
           </a:ln>
@@ -25295,13 +25076,13 @@
             <a:r>
               <a:rPr lang="en-US" sz="1300" b="1" dirty="0">
                 <a:solidFill>
-                  <a:srgbClr val="0F766E"/>
+                  <a:srgbClr val="9D174D"/>
                 </a:solidFill>
                 <a:latin typeface="Trebuchet MS" pitchFamily="34" charset="0"/>
                 <a:ea typeface="Trebuchet MS" pitchFamily="34" charset="-122"/>
                 <a:cs typeface="Trebuchet MS" pitchFamily="34" charset="-120"/>
               </a:rPr>
-              <a:t>flex</a:t>
+              <a:t>flect</a:t>
             </a:r>
             <a:endParaRPr lang="en-US" sz="1300" dirty="0"/>
           </a:p>
@@ -25413,7 +25194,7 @@
                 <a:ea typeface="Trebuchet MS" pitchFamily="34" charset="-122"/>
                 <a:cs typeface="Trebuchet MS" pitchFamily="34" charset="-120"/>
               </a:rPr>
-              <a:t>t</a:t>
+              <a:t>ion</a:t>
             </a:r>
             <a:endParaRPr lang="en-US" sz="1300" dirty="0"/>
           </a:p>
@@ -25452,7 +25233,7 @@
                 <a:ea typeface="Calibri" pitchFamily="34" charset="-122"/>
                 <a:cs typeface="Calibri" pitchFamily="34" charset="-120"/>
               </a:rPr>
-              <a:t>past action marker</a:t>
+              <a:t>act or process of</a:t>
             </a:r>
             <a:endParaRPr lang="en-US" sz="850" dirty="0"/>
           </a:p>
@@ -26866,7 +26647,7 @@
                 <a:ea typeface="Trebuchet MS" pitchFamily="34" charset="-122"/>
                 <a:cs typeface="Trebuchet MS" pitchFamily="34" charset="-120"/>
               </a:rPr>
-              <a:t>deflect</a:t>
+              <a:t>deflection</a:t>
             </a:r>
             <a:endParaRPr lang="en-US" sz="2800" dirty="0"/>
           </a:p>
@@ -27044,7 +26825,7 @@
                 <a:ea typeface="Calibri" pitchFamily="34" charset="-122"/>
                 <a:cs typeface="Calibri" pitchFamily="34" charset="-120"/>
               </a:rPr>
-              <a:t>away, down</a:t>
+              <a:t>away or down</a:t>
             </a:r>
             <a:endParaRPr lang="en-US" sz="850" dirty="0"/>
           </a:p>
@@ -27067,11 +26848,11 @@
             </a:avLst>
           </a:prstGeom>
           <a:solidFill>
-            <a:srgbClr val="CCFBF1"/>
+            <a:srgbClr val="FCE7F3"/>
           </a:solidFill>
           <a:ln w="19050">
             <a:solidFill>
-              <a:srgbClr val="0D9488"/>
+              <a:srgbClr val="DB2777"/>
             </a:solidFill>
             <a:prstDash val="solid"/>
           </a:ln>
@@ -27111,13 +26892,13 @@
             <a:r>
               <a:rPr lang="en-US" sz="1300" b="1" dirty="0">
                 <a:solidFill>
-                  <a:srgbClr val="0F766E"/>
+                  <a:srgbClr val="9D174D"/>
                 </a:solidFill>
                 <a:latin typeface="Trebuchet MS" pitchFamily="34" charset="0"/>
                 <a:ea typeface="Trebuchet MS" pitchFamily="34" charset="-122"/>
                 <a:cs typeface="Trebuchet MS" pitchFamily="34" charset="-120"/>
               </a:rPr>
-              <a:t>flex</a:t>
+              <a:t>flect</a:t>
             </a:r>
             <a:endParaRPr lang="en-US" sz="1300" dirty="0"/>
           </a:p>
@@ -27229,7 +27010,7 @@
                 <a:ea typeface="Trebuchet MS" pitchFamily="34" charset="-122"/>
                 <a:cs typeface="Trebuchet MS" pitchFamily="34" charset="-120"/>
               </a:rPr>
-              <a:t>t</a:t>
+              <a:t>ion</a:t>
             </a:r>
             <a:endParaRPr lang="en-US" sz="1300" dirty="0"/>
           </a:p>
@@ -27268,7 +27049,7 @@
                 <a:ea typeface="Calibri" pitchFamily="34" charset="-122"/>
                 <a:cs typeface="Calibri" pitchFamily="34" charset="-120"/>
               </a:rPr>
-              <a:t>past action marker</a:t>
+              <a:t>act or process of</a:t>
             </a:r>
             <a:endParaRPr lang="en-US" sz="850" dirty="0"/>
           </a:p>
@@ -27375,7 +27156,7 @@
         </p:nvSpPr>
         <p:spPr>
           <a:xfrm>
-            <a:off x="2999232" y="3364992"/>
+            <a:off x="2313432" y="3364992"/>
             <a:ext cx="1645920" cy="475488"/>
           </a:xfrm>
           <a:prstGeom prst="rect">
@@ -27402,7 +27183,7 @@
         </p:nvSpPr>
         <p:spPr>
           <a:xfrm>
-            <a:off x="2999232" y="3364992"/>
+            <a:off x="2313432" y="3364992"/>
             <a:ext cx="1645920" cy="475488"/>
           </a:xfrm>
           <a:prstGeom prst="rect">
@@ -27441,8 +27222,8 @@
         </p:nvSpPr>
         <p:spPr>
           <a:xfrm>
-            <a:off x="4645152" y="3364992"/>
-            <a:ext cx="1097280" cy="475488"/>
+            <a:off x="3959352" y="3364992"/>
+            <a:ext cx="411480" cy="475488"/>
           </a:xfrm>
           <a:prstGeom prst="rect">
             <a:avLst/>
@@ -27480,7 +27261,7 @@
         </p:nvSpPr>
         <p:spPr>
           <a:xfrm>
-            <a:off x="5742432" y="3364992"/>
+            <a:off x="4370832" y="3364992"/>
             <a:ext cx="1645920" cy="475488"/>
           </a:xfrm>
           <a:prstGeom prst="rect">
@@ -27507,7 +27288,7 @@
         </p:nvSpPr>
         <p:spPr>
           <a:xfrm>
-            <a:off x="5742432" y="3364992"/>
+            <a:off x="4370832" y="3364992"/>
             <a:ext cx="1645920" cy="475488"/>
           </a:xfrm>
           <a:prstGeom prst="rect">
@@ -27532,7 +27313,7 @@
                 <a:ea typeface="Trebuchet MS" pitchFamily="34" charset="-122"/>
                 <a:cs typeface="Trebuchet MS" pitchFamily="34" charset="-120"/>
               </a:rPr>
-              <a:t>flect</a:t>
+              <a:t>flec</a:t>
             </a:r>
             <a:endParaRPr lang="en-US" sz="1400" dirty="0"/>
           </a:p>
@@ -27540,7 +27321,112 @@
       </p:sp>
       <p:sp>
         <p:nvSpPr>
-          <p:cNvPr id="33" name="Shape 31"/>
+          <p:cNvPr id="33" name="Text 31"/>
+          <p:cNvSpPr/>
+          <p:nvPr/>
+        </p:nvSpPr>
+        <p:spPr>
+          <a:xfrm>
+            <a:off x="6016752" y="3364992"/>
+            <a:ext cx="411480" cy="475488"/>
+          </a:xfrm>
+          <a:prstGeom prst="rect">
+            <a:avLst/>
+          </a:prstGeom>
+          <a:noFill/>
+          <a:ln/>
+        </p:spPr>
+        <p:txBody>
+          <a:bodyPr wrap="square" lIns="0" tIns="0" rIns="0" bIns="0" rtlCol="0" anchor="ctr"/>
+          <a:lstStyle/>
+          <a:p>
+            <a:pPr algn="ctr" indent="0" marL="0">
+              <a:buNone/>
+            </a:pPr>
+            <a:r>
+              <a:rPr lang="en-US" sz="1600" b="1" dirty="0">
+                <a:solidFill>
+                  <a:srgbClr val="0D9488"/>
+                </a:solidFill>
+                <a:latin typeface="Trebuchet MS" pitchFamily="34" charset="0"/>
+                <a:ea typeface="Trebuchet MS" pitchFamily="34" charset="-122"/>
+                <a:cs typeface="Trebuchet MS" pitchFamily="34" charset="-120"/>
+              </a:rPr>
+              <a:t>·</a:t>
+            </a:r>
+            <a:endParaRPr lang="en-US" sz="1600" dirty="0"/>
+          </a:p>
+        </p:txBody>
+      </p:sp>
+      <p:sp>
+        <p:nvSpPr>
+          <p:cNvPr id="34" name="Shape 32"/>
+          <p:cNvSpPr/>
+          <p:nvPr/>
+        </p:nvSpPr>
+        <p:spPr>
+          <a:xfrm>
+            <a:off x="6428232" y="3364992"/>
+            <a:ext cx="1645920" cy="475488"/>
+          </a:xfrm>
+          <a:prstGeom prst="rect">
+            <a:avLst>
+              <a:gd name="adj" fmla="val 9615"/>
+            </a:avLst>
+          </a:prstGeom>
+          <a:solidFill>
+            <a:srgbClr val="FFFFFF"/>
+          </a:solidFill>
+          <a:ln w="12700">
+            <a:solidFill>
+              <a:srgbClr val="0D9488"/>
+            </a:solidFill>
+            <a:prstDash val="solid"/>
+          </a:ln>
+        </p:spPr>
+      </p:sp>
+      <p:sp>
+        <p:nvSpPr>
+          <p:cNvPr id="35" name="Text 33"/>
+          <p:cNvSpPr/>
+          <p:nvPr/>
+        </p:nvSpPr>
+        <p:spPr>
+          <a:xfrm>
+            <a:off x="6428232" y="3364992"/>
+            <a:ext cx="1645920" cy="475488"/>
+          </a:xfrm>
+          <a:prstGeom prst="rect">
+            <a:avLst/>
+          </a:prstGeom>
+          <a:noFill/>
+          <a:ln/>
+        </p:spPr>
+        <p:txBody>
+          <a:bodyPr wrap="square" lIns="0" tIns="0" rIns="0" bIns="0" rtlCol="0" anchor="ctr"/>
+          <a:lstStyle/>
+          <a:p>
+            <a:pPr algn="ctr" indent="0" marL="0">
+              <a:buNone/>
+            </a:pPr>
+            <a:r>
+              <a:rPr lang="en-US" sz="1400" b="1" dirty="0">
+                <a:solidFill>
+                  <a:srgbClr val="0D9488"/>
+                </a:solidFill>
+                <a:latin typeface="Trebuchet MS" pitchFamily="34" charset="0"/>
+                <a:ea typeface="Trebuchet MS" pitchFamily="34" charset="-122"/>
+                <a:cs typeface="Trebuchet MS" pitchFamily="34" charset="-120"/>
+              </a:rPr>
+              <a:t>tion</a:t>
+            </a:r>
+            <a:endParaRPr lang="en-US" sz="1400" dirty="0"/>
+          </a:p>
+        </p:txBody>
+      </p:sp>
+      <p:sp>
+        <p:nvSpPr>
+          <p:cNvPr id="36" name="Shape 34"/>
           <p:cNvSpPr/>
           <p:nvPr/>
         </p:nvSpPr>
@@ -27567,7 +27453,7 @@
       </p:sp>
       <p:sp>
         <p:nvSpPr>
-          <p:cNvPr id="34" name="Text 32"/>
+          <p:cNvPr id="37" name="Text 35"/>
           <p:cNvSpPr/>
           <p:nvPr/>
         </p:nvSpPr>
@@ -27606,7 +27492,7 @@
       </p:sp>
       <p:sp>
         <p:nvSpPr>
-          <p:cNvPr id="35" name="Shape 33"/>
+          <p:cNvPr id="38" name="Shape 36"/>
           <p:cNvSpPr/>
           <p:nvPr/>
         </p:nvSpPr>
@@ -27633,7 +27519,7 @@
       </p:sp>
       <p:sp>
         <p:nvSpPr>
-          <p:cNvPr id="36" name="Text 34"/>
+          <p:cNvPr id="39" name="Text 37"/>
           <p:cNvSpPr/>
           <p:nvPr/>
         </p:nvSpPr>
@@ -28095,7 +27981,7 @@
                 <a:ea typeface="Trebuchet MS" pitchFamily="34" charset="-122"/>
                 <a:cs typeface="Trebuchet MS" pitchFamily="34" charset="-120"/>
               </a:rPr>
-              <a:t>deflect</a:t>
+              <a:t>deflection</a:t>
             </a:r>
             <a:endParaRPr lang="en-US" sz="2800" dirty="0"/>
           </a:p>
@@ -28273,7 +28159,7 @@
                 <a:ea typeface="Calibri" pitchFamily="34" charset="-122"/>
                 <a:cs typeface="Calibri" pitchFamily="34" charset="-120"/>
               </a:rPr>
-              <a:t>away, down</a:t>
+              <a:t>away or down</a:t>
             </a:r>
             <a:endParaRPr lang="en-US" sz="850" dirty="0"/>
           </a:p>
@@ -28296,11 +28182,11 @@
             </a:avLst>
           </a:prstGeom>
           <a:solidFill>
-            <a:srgbClr val="CCFBF1"/>
+            <a:srgbClr val="FCE7F3"/>
           </a:solidFill>
           <a:ln w="19050">
             <a:solidFill>
-              <a:srgbClr val="0D9488"/>
+              <a:srgbClr val="DB2777"/>
             </a:solidFill>
             <a:prstDash val="solid"/>
           </a:ln>
@@ -28340,13 +28226,13 @@
             <a:r>
               <a:rPr lang="en-US" sz="1300" b="1" dirty="0">
                 <a:solidFill>
-                  <a:srgbClr val="0F766E"/>
+                  <a:srgbClr val="9D174D"/>
                 </a:solidFill>
                 <a:latin typeface="Trebuchet MS" pitchFamily="34" charset="0"/>
                 <a:ea typeface="Trebuchet MS" pitchFamily="34" charset="-122"/>
                 <a:cs typeface="Trebuchet MS" pitchFamily="34" charset="-120"/>
               </a:rPr>
-              <a:t>flex</a:t>
+              <a:t>flect</a:t>
             </a:r>
             <a:endParaRPr lang="en-US" sz="1300" dirty="0"/>
           </a:p>
@@ -28458,7 +28344,7 @@
                 <a:ea typeface="Trebuchet MS" pitchFamily="34" charset="-122"/>
                 <a:cs typeface="Trebuchet MS" pitchFamily="34" charset="-120"/>
               </a:rPr>
-              <a:t>t</a:t>
+              <a:t>ion</a:t>
             </a:r>
             <a:endParaRPr lang="en-US" sz="1300" dirty="0"/>
           </a:p>
@@ -28497,7 +28383,7 @@
                 <a:ea typeface="Calibri" pitchFamily="34" charset="-122"/>
                 <a:cs typeface="Calibri" pitchFamily="34" charset="-120"/>
               </a:rPr>
-              <a:t>past action marker</a:t>
+              <a:t>act or process of</a:t>
             </a:r>
             <a:endParaRPr lang="en-US" sz="850" dirty="0"/>
           </a:p>
@@ -28604,7 +28490,7 @@
         </p:nvSpPr>
         <p:spPr>
           <a:xfrm>
-            <a:off x="2999232" y="3364992"/>
+            <a:off x="2313432" y="3364992"/>
             <a:ext cx="1645920" cy="475488"/>
           </a:xfrm>
           <a:prstGeom prst="rect">
@@ -28631,7 +28517,7 @@
         </p:nvSpPr>
         <p:spPr>
           <a:xfrm>
-            <a:off x="2999232" y="3364992"/>
+            <a:off x="2313432" y="3364992"/>
             <a:ext cx="1645920" cy="475488"/>
           </a:xfrm>
           <a:prstGeom prst="rect">
@@ -28670,8 +28556,8 @@
         </p:nvSpPr>
         <p:spPr>
           <a:xfrm>
-            <a:off x="4645152" y="3364992"/>
-            <a:ext cx="1097280" cy="475488"/>
+            <a:off x="3959352" y="3364992"/>
+            <a:ext cx="411480" cy="475488"/>
           </a:xfrm>
           <a:prstGeom prst="rect">
             <a:avLst/>
@@ -28709,7 +28595,7 @@
         </p:nvSpPr>
         <p:spPr>
           <a:xfrm>
-            <a:off x="5742432" y="3364992"/>
+            <a:off x="4370832" y="3364992"/>
             <a:ext cx="1645920" cy="475488"/>
           </a:xfrm>
           <a:prstGeom prst="rect">
@@ -28736,7 +28622,7 @@
         </p:nvSpPr>
         <p:spPr>
           <a:xfrm>
-            <a:off x="5742432" y="3364992"/>
+            <a:off x="4370832" y="3364992"/>
             <a:ext cx="1645920" cy="475488"/>
           </a:xfrm>
           <a:prstGeom prst="rect">
@@ -28761,7 +28647,7 @@
                 <a:ea typeface="Trebuchet MS" pitchFamily="34" charset="-122"/>
                 <a:cs typeface="Trebuchet MS" pitchFamily="34" charset="-120"/>
               </a:rPr>
-              <a:t>flect</a:t>
+              <a:t>flec</a:t>
             </a:r>
             <a:endParaRPr lang="en-US" sz="1400" dirty="0"/>
           </a:p>
@@ -28769,7 +28655,112 @@
       </p:sp>
       <p:sp>
         <p:nvSpPr>
-          <p:cNvPr id="33" name="Shape 31"/>
+          <p:cNvPr id="33" name="Text 31"/>
+          <p:cNvSpPr/>
+          <p:nvPr/>
+        </p:nvSpPr>
+        <p:spPr>
+          <a:xfrm>
+            <a:off x="6016752" y="3364992"/>
+            <a:ext cx="411480" cy="475488"/>
+          </a:xfrm>
+          <a:prstGeom prst="rect">
+            <a:avLst/>
+          </a:prstGeom>
+          <a:noFill/>
+          <a:ln/>
+        </p:spPr>
+        <p:txBody>
+          <a:bodyPr wrap="square" lIns="0" tIns="0" rIns="0" bIns="0" rtlCol="0" anchor="ctr"/>
+          <a:lstStyle/>
+          <a:p>
+            <a:pPr algn="ctr" indent="0" marL="0">
+              <a:buNone/>
+            </a:pPr>
+            <a:r>
+              <a:rPr lang="en-US" sz="1600" b="1" dirty="0">
+                <a:solidFill>
+                  <a:srgbClr val="0D9488"/>
+                </a:solidFill>
+                <a:latin typeface="Trebuchet MS" pitchFamily="34" charset="0"/>
+                <a:ea typeface="Trebuchet MS" pitchFamily="34" charset="-122"/>
+                <a:cs typeface="Trebuchet MS" pitchFamily="34" charset="-120"/>
+              </a:rPr>
+              <a:t>·</a:t>
+            </a:r>
+            <a:endParaRPr lang="en-US" sz="1600" dirty="0"/>
+          </a:p>
+        </p:txBody>
+      </p:sp>
+      <p:sp>
+        <p:nvSpPr>
+          <p:cNvPr id="34" name="Shape 32"/>
+          <p:cNvSpPr/>
+          <p:nvPr/>
+        </p:nvSpPr>
+        <p:spPr>
+          <a:xfrm>
+            <a:off x="6428232" y="3364992"/>
+            <a:ext cx="1645920" cy="475488"/>
+          </a:xfrm>
+          <a:prstGeom prst="rect">
+            <a:avLst>
+              <a:gd name="adj" fmla="val 9615"/>
+            </a:avLst>
+          </a:prstGeom>
+          <a:solidFill>
+            <a:srgbClr val="FFFFFF"/>
+          </a:solidFill>
+          <a:ln w="12700">
+            <a:solidFill>
+              <a:srgbClr val="0D9488"/>
+            </a:solidFill>
+            <a:prstDash val="solid"/>
+          </a:ln>
+        </p:spPr>
+      </p:sp>
+      <p:sp>
+        <p:nvSpPr>
+          <p:cNvPr id="35" name="Text 33"/>
+          <p:cNvSpPr/>
+          <p:nvPr/>
+        </p:nvSpPr>
+        <p:spPr>
+          <a:xfrm>
+            <a:off x="6428232" y="3364992"/>
+            <a:ext cx="1645920" cy="475488"/>
+          </a:xfrm>
+          <a:prstGeom prst="rect">
+            <a:avLst/>
+          </a:prstGeom>
+          <a:noFill/>
+          <a:ln/>
+        </p:spPr>
+        <p:txBody>
+          <a:bodyPr wrap="square" lIns="0" tIns="0" rIns="0" bIns="0" rtlCol="0" anchor="ctr"/>
+          <a:lstStyle/>
+          <a:p>
+            <a:pPr algn="ctr" indent="0" marL="0">
+              <a:buNone/>
+            </a:pPr>
+            <a:r>
+              <a:rPr lang="en-US" sz="1400" b="1" dirty="0">
+                <a:solidFill>
+                  <a:srgbClr val="0D9488"/>
+                </a:solidFill>
+                <a:latin typeface="Trebuchet MS" pitchFamily="34" charset="0"/>
+                <a:ea typeface="Trebuchet MS" pitchFamily="34" charset="-122"/>
+                <a:cs typeface="Trebuchet MS" pitchFamily="34" charset="-120"/>
+              </a:rPr>
+              <a:t>tion</a:t>
+            </a:r>
+            <a:endParaRPr lang="en-US" sz="1400" dirty="0"/>
+          </a:p>
+        </p:txBody>
+      </p:sp>
+      <p:sp>
+        <p:nvSpPr>
+          <p:cNvPr id="36" name="Shape 34"/>
           <p:cNvSpPr/>
           <p:nvPr/>
         </p:nvSpPr>
@@ -28796,7 +28787,7 @@
       </p:sp>
       <p:sp>
         <p:nvSpPr>
-          <p:cNvPr id="34" name="Text 32"/>
+          <p:cNvPr id="37" name="Text 35"/>
           <p:cNvSpPr/>
           <p:nvPr/>
         </p:nvSpPr>
@@ -28835,7 +28826,7 @@
       </p:sp>
       <p:sp>
         <p:nvSpPr>
-          <p:cNvPr id="35" name="Shape 33"/>
+          <p:cNvPr id="38" name="Shape 36"/>
           <p:cNvSpPr/>
           <p:nvPr/>
         </p:nvSpPr>
@@ -28862,13 +28853,13 @@
       </p:sp>
       <p:sp>
         <p:nvSpPr>
-          <p:cNvPr id="36" name="Shape 34"/>
-          <p:cNvSpPr/>
-          <p:nvPr/>
-        </p:nvSpPr>
-        <p:spPr>
-          <a:xfrm>
-            <a:off x="2124837" y="4169664"/>
+          <p:cNvPr id="39" name="Shape 37"/>
+          <p:cNvSpPr/>
+          <p:nvPr/>
+        </p:nvSpPr>
+        <p:spPr>
+          <a:xfrm>
+            <a:off x="2023872" y="4169664"/>
             <a:ext cx="685800" cy="384048"/>
           </a:xfrm>
           <a:prstGeom prst="rect">
@@ -28889,13 +28880,13 @@
       </p:sp>
       <p:sp>
         <p:nvSpPr>
-          <p:cNvPr id="37" name="Text 35"/>
-          <p:cNvSpPr/>
-          <p:nvPr/>
-        </p:nvSpPr>
-        <p:spPr>
-          <a:xfrm>
-            <a:off x="2124837" y="4169664"/>
+          <p:cNvPr id="40" name="Text 38"/>
+          <p:cNvSpPr/>
+          <p:nvPr/>
+        </p:nvSpPr>
+        <p:spPr>
+          <a:xfrm>
+            <a:off x="2023872" y="4169664"/>
             <a:ext cx="685800" cy="384048"/>
           </a:xfrm>
           <a:prstGeom prst="rect">
@@ -28928,13 +28919,13 @@
       </p:sp>
       <p:sp>
         <p:nvSpPr>
-          <p:cNvPr id="38" name="Shape 36"/>
-          <p:cNvSpPr/>
-          <p:nvPr/>
-        </p:nvSpPr>
-        <p:spPr>
-          <a:xfrm>
-            <a:off x="3033522" y="4169664"/>
+          <p:cNvPr id="41" name="Shape 39"/>
+          <p:cNvSpPr/>
+          <p:nvPr/>
+        </p:nvSpPr>
+        <p:spPr>
+          <a:xfrm>
+            <a:off x="2831592" y="4169664"/>
             <a:ext cx="685800" cy="384048"/>
           </a:xfrm>
           <a:prstGeom prst="rect">
@@ -28955,13 +28946,13 @@
       </p:sp>
       <p:sp>
         <p:nvSpPr>
-          <p:cNvPr id="39" name="Text 37"/>
-          <p:cNvSpPr/>
-          <p:nvPr/>
-        </p:nvSpPr>
-        <p:spPr>
-          <a:xfrm>
-            <a:off x="3033522" y="4169664"/>
+          <p:cNvPr id="42" name="Text 40"/>
+          <p:cNvSpPr/>
+          <p:nvPr/>
+        </p:nvSpPr>
+        <p:spPr>
+          <a:xfrm>
+            <a:off x="2831592" y="4169664"/>
             <a:ext cx="685800" cy="384048"/>
           </a:xfrm>
           <a:prstGeom prst="rect">
@@ -28994,13 +28985,13 @@
       </p:sp>
       <p:sp>
         <p:nvSpPr>
-          <p:cNvPr id="40" name="Shape 38"/>
-          <p:cNvSpPr/>
-          <p:nvPr/>
-        </p:nvSpPr>
-        <p:spPr>
-          <a:xfrm>
-            <a:off x="3942207" y="4169664"/>
+          <p:cNvPr id="43" name="Shape 41"/>
+          <p:cNvSpPr/>
+          <p:nvPr/>
+        </p:nvSpPr>
+        <p:spPr>
+          <a:xfrm>
+            <a:off x="3639312" y="4169664"/>
             <a:ext cx="685800" cy="384048"/>
           </a:xfrm>
           <a:prstGeom prst="rect">
@@ -29021,13 +29012,13 @@
       </p:sp>
       <p:sp>
         <p:nvSpPr>
-          <p:cNvPr id="41" name="Text 39"/>
-          <p:cNvSpPr/>
-          <p:nvPr/>
-        </p:nvSpPr>
-        <p:spPr>
-          <a:xfrm>
-            <a:off x="3942207" y="4169664"/>
+          <p:cNvPr id="44" name="Text 42"/>
+          <p:cNvSpPr/>
+          <p:nvPr/>
+        </p:nvSpPr>
+        <p:spPr>
+          <a:xfrm>
+            <a:off x="3639312" y="4169664"/>
             <a:ext cx="685800" cy="384048"/>
           </a:xfrm>
           <a:prstGeom prst="rect">
@@ -29052,7 +29043,7 @@
                 <a:ea typeface="Trebuchet MS" pitchFamily="34" charset="-122"/>
                 <a:cs typeface="Trebuchet MS" pitchFamily="34" charset="-120"/>
               </a:rPr>
-              <a:t>f</a:t>
+              <a:t>fl</a:t>
             </a:r>
             <a:endParaRPr lang="en-US" sz="900" dirty="0"/>
           </a:p>
@@ -29060,13 +29051,13 @@
       </p:sp>
       <p:sp>
         <p:nvSpPr>
-          <p:cNvPr id="42" name="Shape 40"/>
-          <p:cNvSpPr/>
-          <p:nvPr/>
-        </p:nvSpPr>
-        <p:spPr>
-          <a:xfrm>
-            <a:off x="4850892" y="4169664"/>
+          <p:cNvPr id="45" name="Shape 43"/>
+          <p:cNvSpPr/>
+          <p:nvPr/>
+        </p:nvSpPr>
+        <p:spPr>
+          <a:xfrm>
+            <a:off x="4447032" y="4169664"/>
             <a:ext cx="685800" cy="384048"/>
           </a:xfrm>
           <a:prstGeom prst="rect">
@@ -29087,13 +29078,13 @@
       </p:sp>
       <p:sp>
         <p:nvSpPr>
-          <p:cNvPr id="43" name="Text 41"/>
-          <p:cNvSpPr/>
-          <p:nvPr/>
-        </p:nvSpPr>
-        <p:spPr>
-          <a:xfrm>
-            <a:off x="4850892" y="4169664"/>
+          <p:cNvPr id="46" name="Text 44"/>
+          <p:cNvSpPr/>
+          <p:nvPr/>
+        </p:nvSpPr>
+        <p:spPr>
+          <a:xfrm>
+            <a:off x="4447032" y="4169664"/>
             <a:ext cx="685800" cy="384048"/>
           </a:xfrm>
           <a:prstGeom prst="rect">
@@ -29118,7 +29109,7 @@
                 <a:ea typeface="Trebuchet MS" pitchFamily="34" charset="-122"/>
                 <a:cs typeface="Trebuchet MS" pitchFamily="34" charset="-120"/>
               </a:rPr>
-              <a:t>l</a:t>
+              <a:t>e</a:t>
             </a:r>
             <a:endParaRPr lang="en-US" sz="900" dirty="0"/>
           </a:p>
@@ -29126,13 +29117,13 @@
       </p:sp>
       <p:sp>
         <p:nvSpPr>
-          <p:cNvPr id="44" name="Shape 42"/>
-          <p:cNvSpPr/>
-          <p:nvPr/>
-        </p:nvSpPr>
-        <p:spPr>
-          <a:xfrm>
-            <a:off x="5759577" y="4169664"/>
+          <p:cNvPr id="47" name="Shape 45"/>
+          <p:cNvSpPr/>
+          <p:nvPr/>
+        </p:nvSpPr>
+        <p:spPr>
+          <a:xfrm>
+            <a:off x="5254752" y="4169664"/>
             <a:ext cx="685800" cy="384048"/>
           </a:xfrm>
           <a:prstGeom prst="rect">
@@ -29153,13 +29144,13 @@
       </p:sp>
       <p:sp>
         <p:nvSpPr>
-          <p:cNvPr id="45" name="Text 43"/>
-          <p:cNvSpPr/>
-          <p:nvPr/>
-        </p:nvSpPr>
-        <p:spPr>
-          <a:xfrm>
-            <a:off x="5759577" y="4169664"/>
+          <p:cNvPr id="48" name="Text 46"/>
+          <p:cNvSpPr/>
+          <p:nvPr/>
+        </p:nvSpPr>
+        <p:spPr>
+          <a:xfrm>
+            <a:off x="5254752" y="4169664"/>
             <a:ext cx="685800" cy="384048"/>
           </a:xfrm>
           <a:prstGeom prst="rect">
@@ -29184,7 +29175,7 @@
                 <a:ea typeface="Trebuchet MS" pitchFamily="34" charset="-122"/>
                 <a:cs typeface="Trebuchet MS" pitchFamily="34" charset="-120"/>
               </a:rPr>
-              <a:t>e</a:t>
+              <a:t>c</a:t>
             </a:r>
             <a:endParaRPr lang="en-US" sz="900" dirty="0"/>
           </a:p>
@@ -29192,13 +29183,13 @@
       </p:sp>
       <p:sp>
         <p:nvSpPr>
-          <p:cNvPr id="46" name="Shape 44"/>
-          <p:cNvSpPr/>
-          <p:nvPr/>
-        </p:nvSpPr>
-        <p:spPr>
-          <a:xfrm>
-            <a:off x="6668262" y="4169664"/>
+          <p:cNvPr id="49" name="Shape 47"/>
+          <p:cNvSpPr/>
+          <p:nvPr/>
+        </p:nvSpPr>
+        <p:spPr>
+          <a:xfrm>
+            <a:off x="6062472" y="4169664"/>
             <a:ext cx="685800" cy="384048"/>
           </a:xfrm>
           <a:prstGeom prst="rect">
@@ -29219,13 +29210,13 @@
       </p:sp>
       <p:sp>
         <p:nvSpPr>
-          <p:cNvPr id="47" name="Text 45"/>
-          <p:cNvSpPr/>
-          <p:nvPr/>
-        </p:nvSpPr>
-        <p:spPr>
-          <a:xfrm>
-            <a:off x="6668262" y="4169664"/>
+          <p:cNvPr id="50" name="Text 48"/>
+          <p:cNvSpPr/>
+          <p:nvPr/>
+        </p:nvSpPr>
+        <p:spPr>
+          <a:xfrm>
+            <a:off x="6062472" y="4169664"/>
             <a:ext cx="685800" cy="384048"/>
           </a:xfrm>
           <a:prstGeom prst="rect">
@@ -29250,7 +29241,7 @@
                 <a:ea typeface="Trebuchet MS" pitchFamily="34" charset="-122"/>
                 <a:cs typeface="Trebuchet MS" pitchFamily="34" charset="-120"/>
               </a:rPr>
-              <a:t>c</a:t>
+              <a:t>t</a:t>
             </a:r>
             <a:endParaRPr lang="en-US" sz="900" dirty="0"/>
           </a:p>
@@ -29258,13 +29249,79 @@
       </p:sp>
       <p:sp>
         <p:nvSpPr>
-          <p:cNvPr id="48" name="Text 46"/>
-          <p:cNvSpPr/>
-          <p:nvPr/>
-        </p:nvSpPr>
-        <p:spPr>
-          <a:xfrm>
-            <a:off x="6668262" y="4572000"/>
+          <p:cNvPr id="51" name="Shape 49"/>
+          <p:cNvSpPr/>
+          <p:nvPr/>
+        </p:nvSpPr>
+        <p:spPr>
+          <a:xfrm>
+            <a:off x="6870192" y="4169664"/>
+            <a:ext cx="685800" cy="384048"/>
+          </a:xfrm>
+          <a:prstGeom prst="rect">
+            <a:avLst>
+              <a:gd name="adj" fmla="val 9524"/>
+            </a:avLst>
+          </a:prstGeom>
+          <a:solidFill>
+            <a:srgbClr val="FFFFFF"/>
+          </a:solidFill>
+          <a:ln w="12700">
+            <a:solidFill>
+              <a:srgbClr val="DB2777"/>
+            </a:solidFill>
+            <a:prstDash val="solid"/>
+          </a:ln>
+        </p:spPr>
+      </p:sp>
+      <p:sp>
+        <p:nvSpPr>
+          <p:cNvPr id="52" name="Text 50"/>
+          <p:cNvSpPr/>
+          <p:nvPr/>
+        </p:nvSpPr>
+        <p:spPr>
+          <a:xfrm>
+            <a:off x="6870192" y="4169664"/>
+            <a:ext cx="685800" cy="384048"/>
+          </a:xfrm>
+          <a:prstGeom prst="rect">
+            <a:avLst/>
+          </a:prstGeom>
+          <a:noFill/>
+          <a:ln/>
+        </p:spPr>
+        <p:txBody>
+          <a:bodyPr wrap="square" lIns="0" tIns="0" rIns="0" bIns="0" rtlCol="0" anchor="ctr"/>
+          <a:lstStyle/>
+          <a:p>
+            <a:pPr algn="ctr" indent="0" marL="0">
+              <a:buNone/>
+            </a:pPr>
+            <a:r>
+              <a:rPr lang="en-US" sz="900" b="1" dirty="0">
+                <a:solidFill>
+                  <a:srgbClr val="9D174D"/>
+                </a:solidFill>
+                <a:latin typeface="Trebuchet MS" pitchFamily="34" charset="0"/>
+                <a:ea typeface="Trebuchet MS" pitchFamily="34" charset="-122"/>
+                <a:cs typeface="Trebuchet MS" pitchFamily="34" charset="-120"/>
+              </a:rPr>
+              <a:t>io</a:t>
+            </a:r>
+            <a:endParaRPr lang="en-US" sz="900" dirty="0"/>
+          </a:p>
+        </p:txBody>
+      </p:sp>
+      <p:sp>
+        <p:nvSpPr>
+          <p:cNvPr id="53" name="Text 51"/>
+          <p:cNvSpPr/>
+          <p:nvPr/>
+        </p:nvSpPr>
+        <p:spPr>
+          <a:xfrm>
+            <a:off x="6870192" y="4572000"/>
             <a:ext cx="685800" cy="219456"/>
           </a:xfrm>
           <a:prstGeom prst="rect">
@@ -29289,7 +29346,7 @@
                 <a:ea typeface="Calibri" pitchFamily="34" charset="-122"/>
                 <a:cs typeface="Calibri" pitchFamily="34" charset="-120"/>
               </a:rPr>
-              <a:t>/k/</a:t>
+              <a:t>/sh/</a:t>
             </a:r>
             <a:endParaRPr lang="en-US" sz="750" dirty="0"/>
           </a:p>
@@ -29297,13 +29354,13 @@
       </p:sp>
       <p:sp>
         <p:nvSpPr>
-          <p:cNvPr id="49" name="Shape 47"/>
-          <p:cNvSpPr/>
-          <p:nvPr/>
-        </p:nvSpPr>
-        <p:spPr>
-          <a:xfrm>
-            <a:off x="7576947" y="4169664"/>
+          <p:cNvPr id="54" name="Shape 52"/>
+          <p:cNvSpPr/>
+          <p:nvPr/>
+        </p:nvSpPr>
+        <p:spPr>
+          <a:xfrm>
+            <a:off x="7677912" y="4169664"/>
             <a:ext cx="685800" cy="384048"/>
           </a:xfrm>
           <a:prstGeom prst="rect">
@@ -29324,13 +29381,13 @@
       </p:sp>
       <p:sp>
         <p:nvSpPr>
-          <p:cNvPr id="50" name="Text 48"/>
-          <p:cNvSpPr/>
-          <p:nvPr/>
-        </p:nvSpPr>
-        <p:spPr>
-          <a:xfrm>
-            <a:off x="7576947" y="4169664"/>
+          <p:cNvPr id="55" name="Text 53"/>
+          <p:cNvSpPr/>
+          <p:nvPr/>
+        </p:nvSpPr>
+        <p:spPr>
+          <a:xfrm>
+            <a:off x="7677912" y="4169664"/>
             <a:ext cx="685800" cy="384048"/>
           </a:xfrm>
           <a:prstGeom prst="rect">
@@ -29355,7 +29412,7 @@
                 <a:ea typeface="Trebuchet MS" pitchFamily="34" charset="-122"/>
                 <a:cs typeface="Trebuchet MS" pitchFamily="34" charset="-120"/>
               </a:rPr>
-              <a:t>t</a:t>
+              <a:t>n</a:t>
             </a:r>
             <a:endParaRPr lang="en-US" sz="900" dirty="0"/>
           </a:p>
@@ -29786,7 +29843,7 @@
                 <a:ea typeface="Trebuchet MS" pitchFamily="34" charset="-122"/>
                 <a:cs typeface="Trebuchet MS" pitchFamily="34" charset="-120"/>
               </a:rPr>
-              <a:t>flexible</a:t>
+              <a:t>reflexive</a:t>
             </a:r>
             <a:endParaRPr lang="en-US" sz="2800" dirty="0"/>
           </a:p>
@@ -30613,7 +30670,7 @@
                 <a:ea typeface="Trebuchet MS" pitchFamily="34" charset="-122"/>
                 <a:cs typeface="Trebuchet MS" pitchFamily="34" charset="-120"/>
               </a:rPr>
-              <a:t>flexible</a:t>
+              <a:t>reflexive</a:t>
             </a:r>
             <a:endParaRPr lang="en-US" sz="2800" dirty="0"/>
           </a:p>
@@ -30693,7 +30750,7 @@
         </p:nvSpPr>
         <p:spPr>
           <a:xfrm>
-            <a:off x="2938272" y="2258568"/>
+            <a:off x="2221992" y="2258568"/>
             <a:ext cx="1828800" cy="292608"/>
           </a:xfrm>
           <a:prstGeom prst="rect">
@@ -30702,11 +30759,11 @@
             </a:avLst>
           </a:prstGeom>
           <a:solidFill>
-            <a:srgbClr val="CCFBF1"/>
+            <a:srgbClr val="DDD6FE"/>
           </a:solidFill>
           <a:ln w="19050">
             <a:solidFill>
-              <a:srgbClr val="0D9488"/>
+              <a:srgbClr val="7C3AED"/>
             </a:solidFill>
             <a:prstDash val="solid"/>
           </a:ln>
@@ -30727,7 +30784,7 @@
         </p:nvSpPr>
         <p:spPr>
           <a:xfrm>
-            <a:off x="2938272" y="2258568"/>
+            <a:off x="2221992" y="2258568"/>
             <a:ext cx="1828800" cy="292608"/>
           </a:xfrm>
           <a:prstGeom prst="rect">
@@ -30746,13 +30803,13 @@
             <a:r>
               <a:rPr lang="en-US" sz="1300" b="1" dirty="0">
                 <a:solidFill>
-                  <a:srgbClr val="0F766E"/>
+                  <a:srgbClr val="4C1D95"/>
                 </a:solidFill>
                 <a:latin typeface="Trebuchet MS" pitchFamily="34" charset="0"/>
                 <a:ea typeface="Trebuchet MS" pitchFamily="34" charset="-122"/>
                 <a:cs typeface="Trebuchet MS" pitchFamily="34" charset="-120"/>
               </a:rPr>
-              <a:t>flex</a:t>
+              <a:t>re</a:t>
             </a:r>
             <a:endParaRPr lang="en-US" sz="1300" dirty="0"/>
           </a:p>
@@ -30766,7 +30823,7 @@
         </p:nvSpPr>
         <p:spPr>
           <a:xfrm>
-            <a:off x="2938272" y="2569464"/>
+            <a:off x="2221992" y="2569464"/>
             <a:ext cx="1828800" cy="201168"/>
           </a:xfrm>
           <a:prstGeom prst="rect">
@@ -30791,7 +30848,7 @@
                 <a:ea typeface="Calibri" pitchFamily="34" charset="-122"/>
                 <a:cs typeface="Calibri" pitchFamily="34" charset="-120"/>
               </a:rPr>
-              <a:t>to bend</a:t>
+              <a:t>back or again</a:t>
             </a:r>
             <a:endParaRPr lang="en-US" sz="850" dirty="0"/>
           </a:p>
@@ -30805,7 +30862,7 @@
         </p:nvSpPr>
         <p:spPr>
           <a:xfrm>
-            <a:off x="5803392" y="2258568"/>
+            <a:off x="4370832" y="2258568"/>
             <a:ext cx="1828800" cy="292608"/>
           </a:xfrm>
           <a:prstGeom prst="rect">
@@ -30814,11 +30871,11 @@
             </a:avLst>
           </a:prstGeom>
           <a:solidFill>
-            <a:srgbClr val="FCE7F3"/>
+            <a:srgbClr val="CCFBF1"/>
           </a:solidFill>
           <a:ln w="19050">
             <a:solidFill>
-              <a:srgbClr val="DB2777"/>
+              <a:srgbClr val="0D9488"/>
             </a:solidFill>
             <a:prstDash val="solid"/>
           </a:ln>
@@ -30839,7 +30896,7 @@
         </p:nvSpPr>
         <p:spPr>
           <a:xfrm>
-            <a:off x="5803392" y="2258568"/>
+            <a:off x="4370832" y="2258568"/>
             <a:ext cx="1828800" cy="292608"/>
           </a:xfrm>
           <a:prstGeom prst="rect">
@@ -30858,13 +30915,13 @@
             <a:r>
               <a:rPr lang="en-US" sz="1300" b="1" dirty="0">
                 <a:solidFill>
-                  <a:srgbClr val="9D174D"/>
+                  <a:srgbClr val="0F766E"/>
                 </a:solidFill>
                 <a:latin typeface="Trebuchet MS" pitchFamily="34" charset="0"/>
                 <a:ea typeface="Trebuchet MS" pitchFamily="34" charset="-122"/>
                 <a:cs typeface="Trebuchet MS" pitchFamily="34" charset="-120"/>
               </a:rPr>
-              <a:t>ible</a:t>
+              <a:t>flex</a:t>
             </a:r>
             <a:endParaRPr lang="en-US" sz="1300" dirty="0"/>
           </a:p>
@@ -30878,7 +30935,7 @@
         </p:nvSpPr>
         <p:spPr>
           <a:xfrm>
-            <a:off x="5803392" y="2569464"/>
+            <a:off x="4370832" y="2569464"/>
             <a:ext cx="1828800" cy="201168"/>
           </a:xfrm>
           <a:prstGeom prst="rect">
@@ -30903,7 +30960,7 @@
                 <a:ea typeface="Calibri" pitchFamily="34" charset="-122"/>
                 <a:cs typeface="Calibri" pitchFamily="34" charset="-120"/>
               </a:rPr>
-              <a:t>able to be</a:t>
+              <a:t>to bend</a:t>
             </a:r>
             <a:endParaRPr lang="en-US" sz="850" dirty="0"/>
           </a:p>
@@ -30912,6 +30969,118 @@
       <p:sp>
         <p:nvSpPr>
           <p:cNvPr id="22" name="Shape 20"/>
+          <p:cNvSpPr/>
+          <p:nvPr/>
+        </p:nvSpPr>
+        <p:spPr>
+          <a:xfrm>
+            <a:off x="6519672" y="2258568"/>
+            <a:ext cx="1828800" cy="292608"/>
+          </a:xfrm>
+          <a:prstGeom prst="rect">
+            <a:avLst>
+              <a:gd name="adj" fmla="val 25000"/>
+            </a:avLst>
+          </a:prstGeom>
+          <a:solidFill>
+            <a:srgbClr val="FCE7F3"/>
+          </a:solidFill>
+          <a:ln w="19050">
+            <a:solidFill>
+              <a:srgbClr val="DB2777"/>
+            </a:solidFill>
+            <a:prstDash val="solid"/>
+          </a:ln>
+          <a:effectLst>
+            <a:outerShdw sx="100000" sy="100000" kx="0" ky="0" algn="bl" rotWithShape="0" blurRad="101600" dist="38100" dir="8100000">
+              <a:srgbClr val="000000">
+                <a:alpha val="12000"/>
+              </a:srgbClr>
+            </a:outerShdw>
+          </a:effectLst>
+        </p:spPr>
+      </p:sp>
+      <p:sp>
+        <p:nvSpPr>
+          <p:cNvPr id="23" name="Text 21"/>
+          <p:cNvSpPr/>
+          <p:nvPr/>
+        </p:nvSpPr>
+        <p:spPr>
+          <a:xfrm>
+            <a:off x="6519672" y="2258568"/>
+            <a:ext cx="1828800" cy="292608"/>
+          </a:xfrm>
+          <a:prstGeom prst="rect">
+            <a:avLst/>
+          </a:prstGeom>
+          <a:noFill/>
+          <a:ln/>
+        </p:spPr>
+        <p:txBody>
+          <a:bodyPr wrap="square" lIns="0" tIns="0" rIns="0" bIns="0" rtlCol="0" anchor="ctr"/>
+          <a:lstStyle/>
+          <a:p>
+            <a:pPr algn="ctr" indent="0" marL="0">
+              <a:buNone/>
+            </a:pPr>
+            <a:r>
+              <a:rPr lang="en-US" sz="1300" b="1" dirty="0">
+                <a:solidFill>
+                  <a:srgbClr val="9D174D"/>
+                </a:solidFill>
+                <a:latin typeface="Trebuchet MS" pitchFamily="34" charset="0"/>
+                <a:ea typeface="Trebuchet MS" pitchFamily="34" charset="-122"/>
+                <a:cs typeface="Trebuchet MS" pitchFamily="34" charset="-120"/>
+              </a:rPr>
+              <a:t>ive</a:t>
+            </a:r>
+            <a:endParaRPr lang="en-US" sz="1300" dirty="0"/>
+          </a:p>
+        </p:txBody>
+      </p:sp>
+      <p:sp>
+        <p:nvSpPr>
+          <p:cNvPr id="24" name="Text 22"/>
+          <p:cNvSpPr/>
+          <p:nvPr/>
+        </p:nvSpPr>
+        <p:spPr>
+          <a:xfrm>
+            <a:off x="6519672" y="2569464"/>
+            <a:ext cx="1828800" cy="201168"/>
+          </a:xfrm>
+          <a:prstGeom prst="rect">
+            <a:avLst/>
+          </a:prstGeom>
+          <a:noFill/>
+          <a:ln/>
+        </p:spPr>
+        <p:txBody>
+          <a:bodyPr wrap="square" lIns="0" tIns="0" rIns="0" bIns="0" rtlCol="0" anchor="t"/>
+          <a:lstStyle/>
+          <a:p>
+            <a:pPr algn="ctr" indent="0" marL="0">
+              <a:buNone/>
+            </a:pPr>
+            <a:r>
+              <a:rPr lang="en-US" sz="850" dirty="0">
+                <a:solidFill>
+                  <a:srgbClr val="475569"/>
+                </a:solidFill>
+                <a:latin typeface="Calibri" pitchFamily="34" charset="0"/>
+                <a:ea typeface="Calibri" pitchFamily="34" charset="-122"/>
+                <a:cs typeface="Calibri" pitchFamily="34" charset="-120"/>
+              </a:rPr>
+              <a:t>having the quality of</a:t>
+            </a:r>
+            <a:endParaRPr lang="en-US" sz="850" dirty="0"/>
+          </a:p>
+        </p:txBody>
+      </p:sp>
+      <p:sp>
+        <p:nvSpPr>
+          <p:cNvPr id="25" name="Shape 23"/>
           <p:cNvSpPr/>
           <p:nvPr/>
         </p:nvSpPr>
@@ -30938,7 +31107,7 @@
       </p:sp>
       <p:sp>
         <p:nvSpPr>
-          <p:cNvPr id="23" name="Text 21"/>
+          <p:cNvPr id="26" name="Text 24"/>
           <p:cNvSpPr/>
           <p:nvPr/>
         </p:nvSpPr>
@@ -30977,7 +31146,7 @@
       </p:sp>
       <p:sp>
         <p:nvSpPr>
-          <p:cNvPr id="24" name="Shape 22"/>
+          <p:cNvPr id="27" name="Shape 25"/>
           <p:cNvSpPr/>
           <p:nvPr/>
         </p:nvSpPr>
@@ -31004,7 +31173,7 @@
       </p:sp>
       <p:sp>
         <p:nvSpPr>
-          <p:cNvPr id="25" name="Text 23"/>
+          <p:cNvPr id="28" name="Text 26"/>
           <p:cNvSpPr/>
           <p:nvPr/>
         </p:nvSpPr>
@@ -31043,7 +31212,7 @@
       </p:sp>
       <p:sp>
         <p:nvSpPr>
-          <p:cNvPr id="26" name="Shape 24"/>
+          <p:cNvPr id="29" name="Shape 27"/>
           <p:cNvSpPr/>
           <p:nvPr/>
         </p:nvSpPr>
@@ -31070,7 +31239,7 @@
       </p:sp>
       <p:sp>
         <p:nvSpPr>
-          <p:cNvPr id="27" name="Text 25"/>
+          <p:cNvPr id="30" name="Text 28"/>
           <p:cNvSpPr/>
           <p:nvPr/>
         </p:nvSpPr>
@@ -31109,7 +31278,7 @@
       </p:sp>
       <p:sp>
         <p:nvSpPr>
-          <p:cNvPr id="28" name="Shape 26"/>
+          <p:cNvPr id="31" name="Shape 29"/>
           <p:cNvSpPr/>
           <p:nvPr/>
         </p:nvSpPr>
@@ -31136,7 +31305,7 @@
       </p:sp>
       <p:sp>
         <p:nvSpPr>
-          <p:cNvPr id="29" name="Text 27"/>
+          <p:cNvPr id="32" name="Text 30"/>
           <p:cNvSpPr/>
           <p:nvPr/>
         </p:nvSpPr>
@@ -31598,7 +31767,7 @@
                 <a:ea typeface="Trebuchet MS" pitchFamily="34" charset="-122"/>
                 <a:cs typeface="Trebuchet MS" pitchFamily="34" charset="-120"/>
               </a:rPr>
-              <a:t>flexible</a:t>
+              <a:t>reflexive</a:t>
             </a:r>
             <a:endParaRPr lang="en-US" sz="2800" dirty="0"/>
           </a:p>
@@ -31678,7 +31847,7 @@
         </p:nvSpPr>
         <p:spPr>
           <a:xfrm>
-            <a:off x="2938272" y="2258568"/>
+            <a:off x="2221992" y="2258568"/>
             <a:ext cx="1828800" cy="292608"/>
           </a:xfrm>
           <a:prstGeom prst="rect">
@@ -31687,11 +31856,11 @@
             </a:avLst>
           </a:prstGeom>
           <a:solidFill>
-            <a:srgbClr val="CCFBF1"/>
+            <a:srgbClr val="DDD6FE"/>
           </a:solidFill>
           <a:ln w="19050">
             <a:solidFill>
-              <a:srgbClr val="0D9488"/>
+              <a:srgbClr val="7C3AED"/>
             </a:solidFill>
             <a:prstDash val="solid"/>
           </a:ln>
@@ -31712,7 +31881,7 @@
         </p:nvSpPr>
         <p:spPr>
           <a:xfrm>
-            <a:off x="2938272" y="2258568"/>
+            <a:off x="2221992" y="2258568"/>
             <a:ext cx="1828800" cy="292608"/>
           </a:xfrm>
           <a:prstGeom prst="rect">
@@ -31731,13 +31900,13 @@
             <a:r>
               <a:rPr lang="en-US" sz="1300" b="1" dirty="0">
                 <a:solidFill>
-                  <a:srgbClr val="0F766E"/>
+                  <a:srgbClr val="4C1D95"/>
                 </a:solidFill>
                 <a:latin typeface="Trebuchet MS" pitchFamily="34" charset="0"/>
                 <a:ea typeface="Trebuchet MS" pitchFamily="34" charset="-122"/>
                 <a:cs typeface="Trebuchet MS" pitchFamily="34" charset="-120"/>
               </a:rPr>
-              <a:t>flex</a:t>
+              <a:t>re</a:t>
             </a:r>
             <a:endParaRPr lang="en-US" sz="1300" dirty="0"/>
           </a:p>
@@ -31751,7 +31920,7 @@
         </p:nvSpPr>
         <p:spPr>
           <a:xfrm>
-            <a:off x="2938272" y="2569464"/>
+            <a:off x="2221992" y="2569464"/>
             <a:ext cx="1828800" cy="201168"/>
           </a:xfrm>
           <a:prstGeom prst="rect">
@@ -31776,7 +31945,7 @@
                 <a:ea typeface="Calibri" pitchFamily="34" charset="-122"/>
                 <a:cs typeface="Calibri" pitchFamily="34" charset="-120"/>
               </a:rPr>
-              <a:t>to bend</a:t>
+              <a:t>back or again</a:t>
             </a:r>
             <a:endParaRPr lang="en-US" sz="850" dirty="0"/>
           </a:p>
@@ -31790,7 +31959,7 @@
         </p:nvSpPr>
         <p:spPr>
           <a:xfrm>
-            <a:off x="5803392" y="2258568"/>
+            <a:off x="4370832" y="2258568"/>
             <a:ext cx="1828800" cy="292608"/>
           </a:xfrm>
           <a:prstGeom prst="rect">
@@ -31799,11 +31968,11 @@
             </a:avLst>
           </a:prstGeom>
           <a:solidFill>
-            <a:srgbClr val="FCE7F3"/>
+            <a:srgbClr val="CCFBF1"/>
           </a:solidFill>
           <a:ln w="19050">
             <a:solidFill>
-              <a:srgbClr val="DB2777"/>
+              <a:srgbClr val="0D9488"/>
             </a:solidFill>
             <a:prstDash val="solid"/>
           </a:ln>
@@ -31824,7 +31993,7 @@
         </p:nvSpPr>
         <p:spPr>
           <a:xfrm>
-            <a:off x="5803392" y="2258568"/>
+            <a:off x="4370832" y="2258568"/>
             <a:ext cx="1828800" cy="292608"/>
           </a:xfrm>
           <a:prstGeom prst="rect">
@@ -31843,13 +32012,13 @@
             <a:r>
               <a:rPr lang="en-US" sz="1300" b="1" dirty="0">
                 <a:solidFill>
-                  <a:srgbClr val="9D174D"/>
+                  <a:srgbClr val="0F766E"/>
                 </a:solidFill>
                 <a:latin typeface="Trebuchet MS" pitchFamily="34" charset="0"/>
                 <a:ea typeface="Trebuchet MS" pitchFamily="34" charset="-122"/>
                 <a:cs typeface="Trebuchet MS" pitchFamily="34" charset="-120"/>
               </a:rPr>
-              <a:t>ible</a:t>
+              <a:t>flex</a:t>
             </a:r>
             <a:endParaRPr lang="en-US" sz="1300" dirty="0"/>
           </a:p>
@@ -31863,7 +32032,7 @@
         </p:nvSpPr>
         <p:spPr>
           <a:xfrm>
-            <a:off x="5803392" y="2569464"/>
+            <a:off x="4370832" y="2569464"/>
             <a:ext cx="1828800" cy="201168"/>
           </a:xfrm>
           <a:prstGeom prst="rect">
@@ -31888,7 +32057,7 @@
                 <a:ea typeface="Calibri" pitchFamily="34" charset="-122"/>
                 <a:cs typeface="Calibri" pitchFamily="34" charset="-120"/>
               </a:rPr>
-              <a:t>able to be</a:t>
+              <a:t>to bend</a:t>
             </a:r>
             <a:endParaRPr lang="en-US" sz="850" dirty="0"/>
           </a:p>
@@ -31897,6 +32066,118 @@
       <p:sp>
         <p:nvSpPr>
           <p:cNvPr id="22" name="Shape 20"/>
+          <p:cNvSpPr/>
+          <p:nvPr/>
+        </p:nvSpPr>
+        <p:spPr>
+          <a:xfrm>
+            <a:off x="6519672" y="2258568"/>
+            <a:ext cx="1828800" cy="292608"/>
+          </a:xfrm>
+          <a:prstGeom prst="rect">
+            <a:avLst>
+              <a:gd name="adj" fmla="val 25000"/>
+            </a:avLst>
+          </a:prstGeom>
+          <a:solidFill>
+            <a:srgbClr val="FCE7F3"/>
+          </a:solidFill>
+          <a:ln w="19050">
+            <a:solidFill>
+              <a:srgbClr val="DB2777"/>
+            </a:solidFill>
+            <a:prstDash val="solid"/>
+          </a:ln>
+          <a:effectLst>
+            <a:outerShdw sx="100000" sy="100000" kx="0" ky="0" algn="bl" rotWithShape="0" blurRad="101600" dist="38100" dir="8100000">
+              <a:srgbClr val="000000">
+                <a:alpha val="12000"/>
+              </a:srgbClr>
+            </a:outerShdw>
+          </a:effectLst>
+        </p:spPr>
+      </p:sp>
+      <p:sp>
+        <p:nvSpPr>
+          <p:cNvPr id="23" name="Text 21"/>
+          <p:cNvSpPr/>
+          <p:nvPr/>
+        </p:nvSpPr>
+        <p:spPr>
+          <a:xfrm>
+            <a:off x="6519672" y="2258568"/>
+            <a:ext cx="1828800" cy="292608"/>
+          </a:xfrm>
+          <a:prstGeom prst="rect">
+            <a:avLst/>
+          </a:prstGeom>
+          <a:noFill/>
+          <a:ln/>
+        </p:spPr>
+        <p:txBody>
+          <a:bodyPr wrap="square" lIns="0" tIns="0" rIns="0" bIns="0" rtlCol="0" anchor="ctr"/>
+          <a:lstStyle/>
+          <a:p>
+            <a:pPr algn="ctr" indent="0" marL="0">
+              <a:buNone/>
+            </a:pPr>
+            <a:r>
+              <a:rPr lang="en-US" sz="1300" b="1" dirty="0">
+                <a:solidFill>
+                  <a:srgbClr val="9D174D"/>
+                </a:solidFill>
+                <a:latin typeface="Trebuchet MS" pitchFamily="34" charset="0"/>
+                <a:ea typeface="Trebuchet MS" pitchFamily="34" charset="-122"/>
+                <a:cs typeface="Trebuchet MS" pitchFamily="34" charset="-120"/>
+              </a:rPr>
+              <a:t>ive</a:t>
+            </a:r>
+            <a:endParaRPr lang="en-US" sz="1300" dirty="0"/>
+          </a:p>
+        </p:txBody>
+      </p:sp>
+      <p:sp>
+        <p:nvSpPr>
+          <p:cNvPr id="24" name="Text 22"/>
+          <p:cNvSpPr/>
+          <p:nvPr/>
+        </p:nvSpPr>
+        <p:spPr>
+          <a:xfrm>
+            <a:off x="6519672" y="2569464"/>
+            <a:ext cx="1828800" cy="201168"/>
+          </a:xfrm>
+          <a:prstGeom prst="rect">
+            <a:avLst/>
+          </a:prstGeom>
+          <a:noFill/>
+          <a:ln/>
+        </p:spPr>
+        <p:txBody>
+          <a:bodyPr wrap="square" lIns="0" tIns="0" rIns="0" bIns="0" rtlCol="0" anchor="t"/>
+          <a:lstStyle/>
+          <a:p>
+            <a:pPr algn="ctr" indent="0" marL="0">
+              <a:buNone/>
+            </a:pPr>
+            <a:r>
+              <a:rPr lang="en-US" sz="850" dirty="0">
+                <a:solidFill>
+                  <a:srgbClr val="475569"/>
+                </a:solidFill>
+                <a:latin typeface="Calibri" pitchFamily="34" charset="0"/>
+                <a:ea typeface="Calibri" pitchFamily="34" charset="-122"/>
+                <a:cs typeface="Calibri" pitchFamily="34" charset="-120"/>
+              </a:rPr>
+              <a:t>having the quality of</a:t>
+            </a:r>
+            <a:endParaRPr lang="en-US" sz="850" dirty="0"/>
+          </a:p>
+        </p:txBody>
+      </p:sp>
+      <p:sp>
+        <p:nvSpPr>
+          <p:cNvPr id="25" name="Shape 23"/>
           <p:cNvSpPr/>
           <p:nvPr/>
         </p:nvSpPr>
@@ -31923,7 +32204,7 @@
       </p:sp>
       <p:sp>
         <p:nvSpPr>
-          <p:cNvPr id="23" name="Text 21"/>
+          <p:cNvPr id="26" name="Text 24"/>
           <p:cNvSpPr/>
           <p:nvPr/>
         </p:nvSpPr>
@@ -31962,7 +32243,7 @@
       </p:sp>
       <p:sp>
         <p:nvSpPr>
-          <p:cNvPr id="24" name="Shape 22"/>
+          <p:cNvPr id="27" name="Shape 25"/>
           <p:cNvSpPr/>
           <p:nvPr/>
         </p:nvSpPr>
@@ -31989,7 +32270,7 @@
       </p:sp>
       <p:sp>
         <p:nvSpPr>
-          <p:cNvPr id="25" name="Shape 23"/>
+          <p:cNvPr id="28" name="Shape 26"/>
           <p:cNvSpPr/>
           <p:nvPr/>
         </p:nvSpPr>
@@ -32016,7 +32297,7 @@
       </p:sp>
       <p:sp>
         <p:nvSpPr>
-          <p:cNvPr id="26" name="Text 24"/>
+          <p:cNvPr id="29" name="Text 27"/>
           <p:cNvSpPr/>
           <p:nvPr/>
         </p:nvSpPr>
@@ -32047,7 +32328,7 @@
                 <a:ea typeface="Trebuchet MS" pitchFamily="34" charset="-122"/>
                 <a:cs typeface="Trebuchet MS" pitchFamily="34" charset="-120"/>
               </a:rPr>
-              <a:t>flex</a:t>
+              <a:t>re</a:t>
             </a:r>
             <a:endParaRPr lang="en-US" sz="1400" dirty="0"/>
           </a:p>
@@ -32055,7 +32336,7 @@
       </p:sp>
       <p:sp>
         <p:nvSpPr>
-          <p:cNvPr id="27" name="Text 25"/>
+          <p:cNvPr id="30" name="Text 28"/>
           <p:cNvSpPr/>
           <p:nvPr/>
         </p:nvSpPr>
@@ -32094,7 +32375,7 @@
       </p:sp>
       <p:sp>
         <p:nvSpPr>
-          <p:cNvPr id="28" name="Shape 26"/>
+          <p:cNvPr id="31" name="Shape 29"/>
           <p:cNvSpPr/>
           <p:nvPr/>
         </p:nvSpPr>
@@ -32121,7 +32402,7 @@
       </p:sp>
       <p:sp>
         <p:nvSpPr>
-          <p:cNvPr id="29" name="Text 27"/>
+          <p:cNvPr id="32" name="Text 30"/>
           <p:cNvSpPr/>
           <p:nvPr/>
         </p:nvSpPr>
@@ -32152,7 +32433,7 @@
                 <a:ea typeface="Trebuchet MS" pitchFamily="34" charset="-122"/>
                 <a:cs typeface="Trebuchet MS" pitchFamily="34" charset="-120"/>
               </a:rPr>
-              <a:t>i</a:t>
+              <a:t>flex</a:t>
             </a:r>
             <a:endParaRPr lang="en-US" sz="1400" dirty="0"/>
           </a:p>
@@ -32160,7 +32441,7 @@
       </p:sp>
       <p:sp>
         <p:nvSpPr>
-          <p:cNvPr id="30" name="Text 28"/>
+          <p:cNvPr id="33" name="Text 31"/>
           <p:cNvSpPr/>
           <p:nvPr/>
         </p:nvSpPr>
@@ -32199,7 +32480,7 @@
       </p:sp>
       <p:sp>
         <p:nvSpPr>
-          <p:cNvPr id="31" name="Shape 29"/>
+          <p:cNvPr id="34" name="Shape 32"/>
           <p:cNvSpPr/>
           <p:nvPr/>
         </p:nvSpPr>
@@ -32226,7 +32507,7 @@
       </p:sp>
       <p:sp>
         <p:nvSpPr>
-          <p:cNvPr id="32" name="Text 30"/>
+          <p:cNvPr id="35" name="Text 33"/>
           <p:cNvSpPr/>
           <p:nvPr/>
         </p:nvSpPr>
@@ -32257,7 +32538,7 @@
                 <a:ea typeface="Trebuchet MS" pitchFamily="34" charset="-122"/>
                 <a:cs typeface="Trebuchet MS" pitchFamily="34" charset="-120"/>
               </a:rPr>
-              <a:t>ble</a:t>
+              <a:t>ive</a:t>
             </a:r>
             <a:endParaRPr lang="en-US" sz="1400" dirty="0"/>
           </a:p>
@@ -32265,7 +32546,7 @@
       </p:sp>
       <p:sp>
         <p:nvSpPr>
-          <p:cNvPr id="33" name="Shape 31"/>
+          <p:cNvPr id="36" name="Shape 34"/>
           <p:cNvSpPr/>
           <p:nvPr/>
         </p:nvSpPr>
@@ -32292,7 +32573,7 @@
       </p:sp>
       <p:sp>
         <p:nvSpPr>
-          <p:cNvPr id="34" name="Text 32"/>
+          <p:cNvPr id="37" name="Text 35"/>
           <p:cNvSpPr/>
           <p:nvPr/>
         </p:nvSpPr>
@@ -32331,7 +32612,7 @@
       </p:sp>
       <p:sp>
         <p:nvSpPr>
-          <p:cNvPr id="35" name="Shape 33"/>
+          <p:cNvPr id="38" name="Shape 36"/>
           <p:cNvSpPr/>
           <p:nvPr/>
         </p:nvSpPr>
@@ -32358,7 +32639,7 @@
       </p:sp>
       <p:sp>
         <p:nvSpPr>
-          <p:cNvPr id="36" name="Text 34"/>
+          <p:cNvPr id="39" name="Text 37"/>
           <p:cNvSpPr/>
           <p:nvPr/>
         </p:nvSpPr>
@@ -32820,7 +33101,7 @@
                 <a:ea typeface="Trebuchet MS" pitchFamily="34" charset="-122"/>
                 <a:cs typeface="Trebuchet MS" pitchFamily="34" charset="-120"/>
               </a:rPr>
-              <a:t>flexible</a:t>
+              <a:t>reflexive</a:t>
             </a:r>
             <a:endParaRPr lang="en-US" sz="2800" dirty="0"/>
           </a:p>
@@ -32900,7 +33181,7 @@
         </p:nvSpPr>
         <p:spPr>
           <a:xfrm>
-            <a:off x="2938272" y="2258568"/>
+            <a:off x="2221992" y="2258568"/>
             <a:ext cx="1828800" cy="292608"/>
           </a:xfrm>
           <a:prstGeom prst="rect">
@@ -32909,11 +33190,11 @@
             </a:avLst>
           </a:prstGeom>
           <a:solidFill>
-            <a:srgbClr val="CCFBF1"/>
+            <a:srgbClr val="DDD6FE"/>
           </a:solidFill>
           <a:ln w="19050">
             <a:solidFill>
-              <a:srgbClr val="0D9488"/>
+              <a:srgbClr val="7C3AED"/>
             </a:solidFill>
             <a:prstDash val="solid"/>
           </a:ln>
@@ -32934,7 +33215,7 @@
         </p:nvSpPr>
         <p:spPr>
           <a:xfrm>
-            <a:off x="2938272" y="2258568"/>
+            <a:off x="2221992" y="2258568"/>
             <a:ext cx="1828800" cy="292608"/>
           </a:xfrm>
           <a:prstGeom prst="rect">
@@ -32953,13 +33234,13 @@
             <a:r>
               <a:rPr lang="en-US" sz="1300" b="1" dirty="0">
                 <a:solidFill>
-                  <a:srgbClr val="0F766E"/>
+                  <a:srgbClr val="4C1D95"/>
                 </a:solidFill>
                 <a:latin typeface="Trebuchet MS" pitchFamily="34" charset="0"/>
                 <a:ea typeface="Trebuchet MS" pitchFamily="34" charset="-122"/>
                 <a:cs typeface="Trebuchet MS" pitchFamily="34" charset="-120"/>
               </a:rPr>
-              <a:t>flex</a:t>
+              <a:t>re</a:t>
             </a:r>
             <a:endParaRPr lang="en-US" sz="1300" dirty="0"/>
           </a:p>
@@ -32973,7 +33254,7 @@
         </p:nvSpPr>
         <p:spPr>
           <a:xfrm>
-            <a:off x="2938272" y="2569464"/>
+            <a:off x="2221992" y="2569464"/>
             <a:ext cx="1828800" cy="201168"/>
           </a:xfrm>
           <a:prstGeom prst="rect">
@@ -32998,7 +33279,7 @@
                 <a:ea typeface="Calibri" pitchFamily="34" charset="-122"/>
                 <a:cs typeface="Calibri" pitchFamily="34" charset="-120"/>
               </a:rPr>
-              <a:t>to bend</a:t>
+              <a:t>back or again</a:t>
             </a:r>
             <a:endParaRPr lang="en-US" sz="850" dirty="0"/>
           </a:p>
@@ -33012,7 +33293,7 @@
         </p:nvSpPr>
         <p:spPr>
           <a:xfrm>
-            <a:off x="5803392" y="2258568"/>
+            <a:off x="4370832" y="2258568"/>
             <a:ext cx="1828800" cy="292608"/>
           </a:xfrm>
           <a:prstGeom prst="rect">
@@ -33021,11 +33302,11 @@
             </a:avLst>
           </a:prstGeom>
           <a:solidFill>
-            <a:srgbClr val="FCE7F3"/>
+            <a:srgbClr val="CCFBF1"/>
           </a:solidFill>
           <a:ln w="19050">
             <a:solidFill>
-              <a:srgbClr val="DB2777"/>
+              <a:srgbClr val="0D9488"/>
             </a:solidFill>
             <a:prstDash val="solid"/>
           </a:ln>
@@ -33046,7 +33327,7 @@
         </p:nvSpPr>
         <p:spPr>
           <a:xfrm>
-            <a:off x="5803392" y="2258568"/>
+            <a:off x="4370832" y="2258568"/>
             <a:ext cx="1828800" cy="292608"/>
           </a:xfrm>
           <a:prstGeom prst="rect">
@@ -33065,13 +33346,13 @@
             <a:r>
               <a:rPr lang="en-US" sz="1300" b="1" dirty="0">
                 <a:solidFill>
-                  <a:srgbClr val="9D174D"/>
+                  <a:srgbClr val="0F766E"/>
                 </a:solidFill>
                 <a:latin typeface="Trebuchet MS" pitchFamily="34" charset="0"/>
                 <a:ea typeface="Trebuchet MS" pitchFamily="34" charset="-122"/>
                 <a:cs typeface="Trebuchet MS" pitchFamily="34" charset="-120"/>
               </a:rPr>
-              <a:t>ible</a:t>
+              <a:t>flex</a:t>
             </a:r>
             <a:endParaRPr lang="en-US" sz="1300" dirty="0"/>
           </a:p>
@@ -33085,7 +33366,7 @@
         </p:nvSpPr>
         <p:spPr>
           <a:xfrm>
-            <a:off x="5803392" y="2569464"/>
+            <a:off x="4370832" y="2569464"/>
             <a:ext cx="1828800" cy="201168"/>
           </a:xfrm>
           <a:prstGeom prst="rect">
@@ -33110,7 +33391,7 @@
                 <a:ea typeface="Calibri" pitchFamily="34" charset="-122"/>
                 <a:cs typeface="Calibri" pitchFamily="34" charset="-120"/>
               </a:rPr>
-              <a:t>able to be</a:t>
+              <a:t>to bend</a:t>
             </a:r>
             <a:endParaRPr lang="en-US" sz="850" dirty="0"/>
           </a:p>
@@ -33119,6 +33400,118 @@
       <p:sp>
         <p:nvSpPr>
           <p:cNvPr id="22" name="Shape 20"/>
+          <p:cNvSpPr/>
+          <p:nvPr/>
+        </p:nvSpPr>
+        <p:spPr>
+          <a:xfrm>
+            <a:off x="6519672" y="2258568"/>
+            <a:ext cx="1828800" cy="292608"/>
+          </a:xfrm>
+          <a:prstGeom prst="rect">
+            <a:avLst>
+              <a:gd name="adj" fmla="val 25000"/>
+            </a:avLst>
+          </a:prstGeom>
+          <a:solidFill>
+            <a:srgbClr val="FCE7F3"/>
+          </a:solidFill>
+          <a:ln w="19050">
+            <a:solidFill>
+              <a:srgbClr val="DB2777"/>
+            </a:solidFill>
+            <a:prstDash val="solid"/>
+          </a:ln>
+          <a:effectLst>
+            <a:outerShdw sx="100000" sy="100000" kx="0" ky="0" algn="bl" rotWithShape="0" blurRad="101600" dist="38100" dir="8100000">
+              <a:srgbClr val="000000">
+                <a:alpha val="12000"/>
+              </a:srgbClr>
+            </a:outerShdw>
+          </a:effectLst>
+        </p:spPr>
+      </p:sp>
+      <p:sp>
+        <p:nvSpPr>
+          <p:cNvPr id="23" name="Text 21"/>
+          <p:cNvSpPr/>
+          <p:nvPr/>
+        </p:nvSpPr>
+        <p:spPr>
+          <a:xfrm>
+            <a:off x="6519672" y="2258568"/>
+            <a:ext cx="1828800" cy="292608"/>
+          </a:xfrm>
+          <a:prstGeom prst="rect">
+            <a:avLst/>
+          </a:prstGeom>
+          <a:noFill/>
+          <a:ln/>
+        </p:spPr>
+        <p:txBody>
+          <a:bodyPr wrap="square" lIns="0" tIns="0" rIns="0" bIns="0" rtlCol="0" anchor="ctr"/>
+          <a:lstStyle/>
+          <a:p>
+            <a:pPr algn="ctr" indent="0" marL="0">
+              <a:buNone/>
+            </a:pPr>
+            <a:r>
+              <a:rPr lang="en-US" sz="1300" b="1" dirty="0">
+                <a:solidFill>
+                  <a:srgbClr val="9D174D"/>
+                </a:solidFill>
+                <a:latin typeface="Trebuchet MS" pitchFamily="34" charset="0"/>
+                <a:ea typeface="Trebuchet MS" pitchFamily="34" charset="-122"/>
+                <a:cs typeface="Trebuchet MS" pitchFamily="34" charset="-120"/>
+              </a:rPr>
+              <a:t>ive</a:t>
+            </a:r>
+            <a:endParaRPr lang="en-US" sz="1300" dirty="0"/>
+          </a:p>
+        </p:txBody>
+      </p:sp>
+      <p:sp>
+        <p:nvSpPr>
+          <p:cNvPr id="24" name="Text 22"/>
+          <p:cNvSpPr/>
+          <p:nvPr/>
+        </p:nvSpPr>
+        <p:spPr>
+          <a:xfrm>
+            <a:off x="6519672" y="2569464"/>
+            <a:ext cx="1828800" cy="201168"/>
+          </a:xfrm>
+          <a:prstGeom prst="rect">
+            <a:avLst/>
+          </a:prstGeom>
+          <a:noFill/>
+          <a:ln/>
+        </p:spPr>
+        <p:txBody>
+          <a:bodyPr wrap="square" lIns="0" tIns="0" rIns="0" bIns="0" rtlCol="0" anchor="t"/>
+          <a:lstStyle/>
+          <a:p>
+            <a:pPr algn="ctr" indent="0" marL="0">
+              <a:buNone/>
+            </a:pPr>
+            <a:r>
+              <a:rPr lang="en-US" sz="850" dirty="0">
+                <a:solidFill>
+                  <a:srgbClr val="475569"/>
+                </a:solidFill>
+                <a:latin typeface="Calibri" pitchFamily="34" charset="0"/>
+                <a:ea typeface="Calibri" pitchFamily="34" charset="-122"/>
+                <a:cs typeface="Calibri" pitchFamily="34" charset="-120"/>
+              </a:rPr>
+              <a:t>having the quality of</a:t>
+            </a:r>
+            <a:endParaRPr lang="en-US" sz="850" dirty="0"/>
+          </a:p>
+        </p:txBody>
+      </p:sp>
+      <p:sp>
+        <p:nvSpPr>
+          <p:cNvPr id="25" name="Shape 23"/>
           <p:cNvSpPr/>
           <p:nvPr/>
         </p:nvSpPr>
@@ -33145,7 +33538,7 @@
       </p:sp>
       <p:sp>
         <p:nvSpPr>
-          <p:cNvPr id="23" name="Text 21"/>
+          <p:cNvPr id="26" name="Text 24"/>
           <p:cNvSpPr/>
           <p:nvPr/>
         </p:nvSpPr>
@@ -33184,7 +33577,7 @@
       </p:sp>
       <p:sp>
         <p:nvSpPr>
-          <p:cNvPr id="24" name="Shape 22"/>
+          <p:cNvPr id="27" name="Shape 25"/>
           <p:cNvSpPr/>
           <p:nvPr/>
         </p:nvSpPr>
@@ -33211,7 +33604,7 @@
       </p:sp>
       <p:sp>
         <p:nvSpPr>
-          <p:cNvPr id="25" name="Shape 23"/>
+          <p:cNvPr id="28" name="Shape 26"/>
           <p:cNvSpPr/>
           <p:nvPr/>
         </p:nvSpPr>
@@ -33238,7 +33631,7 @@
       </p:sp>
       <p:sp>
         <p:nvSpPr>
-          <p:cNvPr id="26" name="Text 24"/>
+          <p:cNvPr id="29" name="Text 27"/>
           <p:cNvSpPr/>
           <p:nvPr/>
         </p:nvSpPr>
@@ -33269,7 +33662,7 @@
                 <a:ea typeface="Trebuchet MS" pitchFamily="34" charset="-122"/>
                 <a:cs typeface="Trebuchet MS" pitchFamily="34" charset="-120"/>
               </a:rPr>
-              <a:t>flex</a:t>
+              <a:t>re</a:t>
             </a:r>
             <a:endParaRPr lang="en-US" sz="1400" dirty="0"/>
           </a:p>
@@ -33277,7 +33670,7 @@
       </p:sp>
       <p:sp>
         <p:nvSpPr>
-          <p:cNvPr id="27" name="Text 25"/>
+          <p:cNvPr id="30" name="Text 28"/>
           <p:cNvSpPr/>
           <p:nvPr/>
         </p:nvSpPr>
@@ -33316,7 +33709,7 @@
       </p:sp>
       <p:sp>
         <p:nvSpPr>
-          <p:cNvPr id="28" name="Shape 26"/>
+          <p:cNvPr id="31" name="Shape 29"/>
           <p:cNvSpPr/>
           <p:nvPr/>
         </p:nvSpPr>
@@ -33343,7 +33736,7 @@
       </p:sp>
       <p:sp>
         <p:nvSpPr>
-          <p:cNvPr id="29" name="Text 27"/>
+          <p:cNvPr id="32" name="Text 30"/>
           <p:cNvSpPr/>
           <p:nvPr/>
         </p:nvSpPr>
@@ -33374,7 +33767,7 @@
                 <a:ea typeface="Trebuchet MS" pitchFamily="34" charset="-122"/>
                 <a:cs typeface="Trebuchet MS" pitchFamily="34" charset="-120"/>
               </a:rPr>
-              <a:t>i</a:t>
+              <a:t>flex</a:t>
             </a:r>
             <a:endParaRPr lang="en-US" sz="1400" dirty="0"/>
           </a:p>
@@ -33382,7 +33775,7 @@
       </p:sp>
       <p:sp>
         <p:nvSpPr>
-          <p:cNvPr id="30" name="Text 28"/>
+          <p:cNvPr id="33" name="Text 31"/>
           <p:cNvSpPr/>
           <p:nvPr/>
         </p:nvSpPr>
@@ -33421,7 +33814,7 @@
       </p:sp>
       <p:sp>
         <p:nvSpPr>
-          <p:cNvPr id="31" name="Shape 29"/>
+          <p:cNvPr id="34" name="Shape 32"/>
           <p:cNvSpPr/>
           <p:nvPr/>
         </p:nvSpPr>
@@ -33448,7 +33841,7 @@
       </p:sp>
       <p:sp>
         <p:nvSpPr>
-          <p:cNvPr id="32" name="Text 30"/>
+          <p:cNvPr id="35" name="Text 33"/>
           <p:cNvSpPr/>
           <p:nvPr/>
         </p:nvSpPr>
@@ -33479,7 +33872,7 @@
                 <a:ea typeface="Trebuchet MS" pitchFamily="34" charset="-122"/>
                 <a:cs typeface="Trebuchet MS" pitchFamily="34" charset="-120"/>
               </a:rPr>
-              <a:t>ble</a:t>
+              <a:t>ive</a:t>
             </a:r>
             <a:endParaRPr lang="en-US" sz="1400" dirty="0"/>
           </a:p>
@@ -33487,7 +33880,7 @@
       </p:sp>
       <p:sp>
         <p:nvSpPr>
-          <p:cNvPr id="33" name="Shape 31"/>
+          <p:cNvPr id="36" name="Shape 34"/>
           <p:cNvSpPr/>
           <p:nvPr/>
         </p:nvSpPr>
@@ -33514,7 +33907,7 @@
       </p:sp>
       <p:sp>
         <p:nvSpPr>
-          <p:cNvPr id="34" name="Text 32"/>
+          <p:cNvPr id="37" name="Text 35"/>
           <p:cNvSpPr/>
           <p:nvPr/>
         </p:nvSpPr>
@@ -33553,7 +33946,7 @@
       </p:sp>
       <p:sp>
         <p:nvSpPr>
-          <p:cNvPr id="35" name="Shape 33"/>
+          <p:cNvPr id="38" name="Shape 36"/>
           <p:cNvSpPr/>
           <p:nvPr/>
         </p:nvSpPr>
@@ -33580,7 +33973,7 @@
       </p:sp>
       <p:sp>
         <p:nvSpPr>
-          <p:cNvPr id="36" name="Shape 34"/>
+          <p:cNvPr id="39" name="Shape 37"/>
           <p:cNvSpPr/>
           <p:nvPr/>
         </p:nvSpPr>
@@ -33607,7 +34000,7 @@
       </p:sp>
       <p:sp>
         <p:nvSpPr>
-          <p:cNvPr id="37" name="Text 35"/>
+          <p:cNvPr id="40" name="Text 38"/>
           <p:cNvSpPr/>
           <p:nvPr/>
         </p:nvSpPr>
@@ -33638,7 +34031,7 @@
                 <a:ea typeface="Trebuchet MS" pitchFamily="34" charset="-122"/>
                 <a:cs typeface="Trebuchet MS" pitchFamily="34" charset="-120"/>
               </a:rPr>
-              <a:t>f</a:t>
+              <a:t>r</a:t>
             </a:r>
             <a:endParaRPr lang="en-US" sz="900" dirty="0"/>
           </a:p>
@@ -33646,7 +34039,7 @@
       </p:sp>
       <p:sp>
         <p:nvSpPr>
-          <p:cNvPr id="38" name="Shape 36"/>
+          <p:cNvPr id="41" name="Shape 39"/>
           <p:cNvSpPr/>
           <p:nvPr/>
         </p:nvSpPr>
@@ -33673,7 +34066,7 @@
       </p:sp>
       <p:sp>
         <p:nvSpPr>
-          <p:cNvPr id="39" name="Text 37"/>
+          <p:cNvPr id="42" name="Text 40"/>
           <p:cNvSpPr/>
           <p:nvPr/>
         </p:nvSpPr>
@@ -33704,7 +34097,7 @@
                 <a:ea typeface="Trebuchet MS" pitchFamily="34" charset="-122"/>
                 <a:cs typeface="Trebuchet MS" pitchFamily="34" charset="-120"/>
               </a:rPr>
-              <a:t>l</a:t>
+              <a:t>e</a:t>
             </a:r>
             <a:endParaRPr lang="en-US" sz="900" dirty="0"/>
           </a:p>
@@ -33712,7 +34105,7 @@
       </p:sp>
       <p:sp>
         <p:nvSpPr>
-          <p:cNvPr id="40" name="Shape 38"/>
+          <p:cNvPr id="43" name="Shape 41"/>
           <p:cNvSpPr/>
           <p:nvPr/>
         </p:nvSpPr>
@@ -33739,7 +34132,7 @@
       </p:sp>
       <p:sp>
         <p:nvSpPr>
-          <p:cNvPr id="41" name="Text 39"/>
+          <p:cNvPr id="44" name="Text 42"/>
           <p:cNvSpPr/>
           <p:nvPr/>
         </p:nvSpPr>
@@ -33770,7 +34163,7 @@
                 <a:ea typeface="Trebuchet MS" pitchFamily="34" charset="-122"/>
                 <a:cs typeface="Trebuchet MS" pitchFamily="34" charset="-120"/>
               </a:rPr>
-              <a:t>e</a:t>
+              <a:t>fl</a:t>
             </a:r>
             <a:endParaRPr lang="en-US" sz="900" dirty="0"/>
           </a:p>
@@ -33778,7 +34171,7 @@
       </p:sp>
       <p:sp>
         <p:nvSpPr>
-          <p:cNvPr id="42" name="Shape 40"/>
+          <p:cNvPr id="45" name="Shape 43"/>
           <p:cNvSpPr/>
           <p:nvPr/>
         </p:nvSpPr>
@@ -33805,7 +34198,7 @@
       </p:sp>
       <p:sp>
         <p:nvSpPr>
-          <p:cNvPr id="43" name="Text 41"/>
+          <p:cNvPr id="46" name="Text 44"/>
           <p:cNvSpPr/>
           <p:nvPr/>
         </p:nvSpPr>
@@ -33836,6 +34229,72 @@
                 <a:ea typeface="Trebuchet MS" pitchFamily="34" charset="-122"/>
                 <a:cs typeface="Trebuchet MS" pitchFamily="34" charset="-120"/>
               </a:rPr>
+              <a:t>e</a:t>
+            </a:r>
+            <a:endParaRPr lang="en-US" sz="900" dirty="0"/>
+          </a:p>
+        </p:txBody>
+      </p:sp>
+      <p:sp>
+        <p:nvSpPr>
+          <p:cNvPr id="47" name="Shape 45"/>
+          <p:cNvSpPr/>
+          <p:nvPr/>
+        </p:nvSpPr>
+        <p:spPr>
+          <a:xfrm>
+            <a:off x="5759577" y="4169664"/>
+            <a:ext cx="685800" cy="384048"/>
+          </a:xfrm>
+          <a:prstGeom prst="rect">
+            <a:avLst>
+              <a:gd name="adj" fmla="val 9524"/>
+            </a:avLst>
+          </a:prstGeom>
+          <a:solidFill>
+            <a:srgbClr val="FFFFFF"/>
+          </a:solidFill>
+          <a:ln w="12700">
+            <a:solidFill>
+              <a:srgbClr val="DB2777"/>
+            </a:solidFill>
+            <a:prstDash val="solid"/>
+          </a:ln>
+        </p:spPr>
+      </p:sp>
+      <p:sp>
+        <p:nvSpPr>
+          <p:cNvPr id="48" name="Text 46"/>
+          <p:cNvSpPr/>
+          <p:nvPr/>
+        </p:nvSpPr>
+        <p:spPr>
+          <a:xfrm>
+            <a:off x="5759577" y="4169664"/>
+            <a:ext cx="685800" cy="384048"/>
+          </a:xfrm>
+          <a:prstGeom prst="rect">
+            <a:avLst/>
+          </a:prstGeom>
+          <a:noFill/>
+          <a:ln/>
+        </p:spPr>
+        <p:txBody>
+          <a:bodyPr wrap="square" lIns="0" tIns="0" rIns="0" bIns="0" rtlCol="0" anchor="ctr"/>
+          <a:lstStyle/>
+          <a:p>
+            <a:pPr algn="ctr" indent="0" marL="0">
+              <a:buNone/>
+            </a:pPr>
+            <a:r>
+              <a:rPr lang="en-US" sz="900" b="1" dirty="0">
+                <a:solidFill>
+                  <a:srgbClr val="9D174D"/>
+                </a:solidFill>
+                <a:latin typeface="Trebuchet MS" pitchFamily="34" charset="0"/>
+                <a:ea typeface="Trebuchet MS" pitchFamily="34" charset="-122"/>
+                <a:cs typeface="Trebuchet MS" pitchFamily="34" charset="-120"/>
+              </a:rPr>
               <a:t>x</a:t>
             </a:r>
             <a:endParaRPr lang="en-US" sz="900" dirty="0"/>
@@ -33844,13 +34303,13 @@
       </p:sp>
       <p:sp>
         <p:nvSpPr>
-          <p:cNvPr id="44" name="Text 42"/>
-          <p:cNvSpPr/>
-          <p:nvPr/>
-        </p:nvSpPr>
-        <p:spPr>
-          <a:xfrm>
-            <a:off x="4850892" y="4572000"/>
+          <p:cNvPr id="49" name="Text 47"/>
+          <p:cNvSpPr/>
+          <p:nvPr/>
+        </p:nvSpPr>
+        <p:spPr>
+          <a:xfrm>
+            <a:off x="5759577" y="4572000"/>
             <a:ext cx="685800" cy="219456"/>
           </a:xfrm>
           <a:prstGeom prst="rect">
@@ -33883,13 +34342,13 @@
       </p:sp>
       <p:sp>
         <p:nvSpPr>
-          <p:cNvPr id="45" name="Shape 43"/>
-          <p:cNvSpPr/>
-          <p:nvPr/>
-        </p:nvSpPr>
-        <p:spPr>
-          <a:xfrm>
-            <a:off x="5759577" y="4169664"/>
+          <p:cNvPr id="50" name="Shape 48"/>
+          <p:cNvSpPr/>
+          <p:nvPr/>
+        </p:nvSpPr>
+        <p:spPr>
+          <a:xfrm>
+            <a:off x="6668262" y="4169664"/>
             <a:ext cx="685800" cy="384048"/>
           </a:xfrm>
           <a:prstGeom prst="rect">
@@ -33910,13 +34369,13 @@
       </p:sp>
       <p:sp>
         <p:nvSpPr>
-          <p:cNvPr id="46" name="Text 44"/>
-          <p:cNvSpPr/>
-          <p:nvPr/>
-        </p:nvSpPr>
-        <p:spPr>
-          <a:xfrm>
-            <a:off x="5759577" y="4169664"/>
+          <p:cNvPr id="51" name="Text 49"/>
+          <p:cNvSpPr/>
+          <p:nvPr/>
+        </p:nvSpPr>
+        <p:spPr>
+          <a:xfrm>
+            <a:off x="6668262" y="4169664"/>
             <a:ext cx="685800" cy="384048"/>
           </a:xfrm>
           <a:prstGeom prst="rect">
@@ -33949,13 +34408,13 @@
       </p:sp>
       <p:sp>
         <p:nvSpPr>
-          <p:cNvPr id="47" name="Shape 45"/>
-          <p:cNvSpPr/>
-          <p:nvPr/>
-        </p:nvSpPr>
-        <p:spPr>
-          <a:xfrm>
-            <a:off x="6668262" y="4169664"/>
+          <p:cNvPr id="52" name="Shape 50"/>
+          <p:cNvSpPr/>
+          <p:nvPr/>
+        </p:nvSpPr>
+        <p:spPr>
+          <a:xfrm>
+            <a:off x="7576947" y="4169664"/>
             <a:ext cx="685800" cy="384048"/>
           </a:xfrm>
           <a:prstGeom prst="rect">
@@ -33976,13 +34435,13 @@
       </p:sp>
       <p:sp>
         <p:nvSpPr>
-          <p:cNvPr id="48" name="Text 46"/>
-          <p:cNvSpPr/>
-          <p:nvPr/>
-        </p:nvSpPr>
-        <p:spPr>
-          <a:xfrm>
-            <a:off x="6668262" y="4169664"/>
+          <p:cNvPr id="53" name="Text 51"/>
+          <p:cNvSpPr/>
+          <p:nvPr/>
+        </p:nvSpPr>
+        <p:spPr>
+          <a:xfrm>
+            <a:off x="7576947" y="4169664"/>
             <a:ext cx="685800" cy="384048"/>
           </a:xfrm>
           <a:prstGeom prst="rect">
@@ -34007,73 +34466,7 @@
                 <a:ea typeface="Trebuchet MS" pitchFamily="34" charset="-122"/>
                 <a:cs typeface="Trebuchet MS" pitchFamily="34" charset="-120"/>
               </a:rPr>
-              <a:t>b</a:t>
-            </a:r>
-            <a:endParaRPr lang="en-US" sz="900" dirty="0"/>
-          </a:p>
-        </p:txBody>
-      </p:sp>
-      <p:sp>
-        <p:nvSpPr>
-          <p:cNvPr id="49" name="Shape 47"/>
-          <p:cNvSpPr/>
-          <p:nvPr/>
-        </p:nvSpPr>
-        <p:spPr>
-          <a:xfrm>
-            <a:off x="7576947" y="4169664"/>
-            <a:ext cx="685800" cy="384048"/>
-          </a:xfrm>
-          <a:prstGeom prst="rect">
-            <a:avLst>
-              <a:gd name="adj" fmla="val 9524"/>
-            </a:avLst>
-          </a:prstGeom>
-          <a:solidFill>
-            <a:srgbClr val="FFFFFF"/>
-          </a:solidFill>
-          <a:ln w="12700">
-            <a:solidFill>
-              <a:srgbClr val="DB2777"/>
-            </a:solidFill>
-            <a:prstDash val="solid"/>
-          </a:ln>
-        </p:spPr>
-      </p:sp>
-      <p:sp>
-        <p:nvSpPr>
-          <p:cNvPr id="50" name="Text 48"/>
-          <p:cNvSpPr/>
-          <p:nvPr/>
-        </p:nvSpPr>
-        <p:spPr>
-          <a:xfrm>
-            <a:off x="7576947" y="4169664"/>
-            <a:ext cx="685800" cy="384048"/>
-          </a:xfrm>
-          <a:prstGeom prst="rect">
-            <a:avLst/>
-          </a:prstGeom>
-          <a:noFill/>
-          <a:ln/>
-        </p:spPr>
-        <p:txBody>
-          <a:bodyPr wrap="square" lIns="0" tIns="0" rIns="0" bIns="0" rtlCol="0" anchor="ctr"/>
-          <a:lstStyle/>
-          <a:p>
-            <a:pPr algn="ctr" indent="0" marL="0">
-              <a:buNone/>
-            </a:pPr>
-            <a:r>
-              <a:rPr lang="en-US" sz="900" b="1" dirty="0">
-                <a:solidFill>
-                  <a:srgbClr val="9D174D"/>
-                </a:solidFill>
-                <a:latin typeface="Trebuchet MS" pitchFamily="34" charset="0"/>
-                <a:ea typeface="Trebuchet MS" pitchFamily="34" charset="-122"/>
-                <a:cs typeface="Trebuchet MS" pitchFamily="34" charset="-120"/>
-              </a:rPr>
-              <a:t>le</a:t>
+              <a:t>ve</a:t>
             </a:r>
             <a:endParaRPr lang="en-US" sz="900" dirty="0"/>
           </a:p>
@@ -35963,7 +36356,7 @@
                 <a:ea typeface="Trebuchet MS" pitchFamily="34" charset="-122"/>
                 <a:cs typeface="Trebuchet MS" pitchFamily="34" charset="-120"/>
               </a:rPr>
-              <a:t>-ible</a:t>
+              <a:t>-ion</a:t>
             </a:r>
             <a:endParaRPr lang="en-US" sz="1300" dirty="0"/>
           </a:p>
@@ -36116,7 +36509,7 @@
                 <a:ea typeface="Trebuchet MS" pitchFamily="34" charset="-122"/>
                 <a:cs typeface="Trebuchet MS" pitchFamily="34" charset="-120"/>
               </a:rPr>
-              <a:t>-ion</a:t>
+              <a:t>-ible</a:t>
             </a:r>
             <a:endParaRPr lang="en-US" sz="1300" dirty="0"/>
           </a:p>
@@ -36269,7 +36662,7 @@
                 <a:ea typeface="Trebuchet MS" pitchFamily="34" charset="-122"/>
                 <a:cs typeface="Trebuchet MS" pitchFamily="34" charset="-120"/>
               </a:rPr>
-              <a:t>-ive</a:t>
+              <a:t>-ibility</a:t>
             </a:r>
             <a:endParaRPr lang="en-US" sz="1300" dirty="0"/>
           </a:p>
@@ -36746,7 +37139,7 @@
                 <a:ea typeface="Trebuchet MS" pitchFamily="34" charset="-122"/>
                 <a:cs typeface="Trebuchet MS" pitchFamily="34" charset="-120"/>
               </a:rPr>
-              <a:t>flexible</a:t>
+              <a:t>reflex</a:t>
             </a:r>
             <a:endParaRPr lang="en-US" sz="1200" dirty="0"/>
           </a:p>
@@ -36812,7 +37205,7 @@
                 <a:ea typeface="Trebuchet MS" pitchFamily="34" charset="-122"/>
                 <a:cs typeface="Trebuchet MS" pitchFamily="34" charset="-120"/>
               </a:rPr>
-              <a:t>inflexible</a:t>
+              <a:t>flexible</a:t>
             </a:r>
             <a:endParaRPr lang="en-US" sz="1200" dirty="0"/>
           </a:p>
@@ -36878,7 +37271,7 @@
                 <a:ea typeface="Trebuchet MS" pitchFamily="34" charset="-122"/>
                 <a:cs typeface="Trebuchet MS" pitchFamily="34" charset="-120"/>
               </a:rPr>
-              <a:t>reflex</a:t>
+              <a:t>inflexible</a:t>
             </a:r>
             <a:endParaRPr lang="en-US" sz="1200" dirty="0"/>
           </a:p>
@@ -36944,7 +37337,7 @@
                 <a:ea typeface="Trebuchet MS" pitchFamily="34" charset="-122"/>
                 <a:cs typeface="Trebuchet MS" pitchFamily="34" charset="-120"/>
               </a:rPr>
-              <a:t>reflection</a:t>
+              <a:t>flexibility</a:t>
             </a:r>
             <a:endParaRPr lang="en-US" sz="1200" dirty="0"/>
           </a:p>
@@ -37076,7 +37469,7 @@
                 <a:ea typeface="Trebuchet MS" pitchFamily="34" charset="-122"/>
                 <a:cs typeface="Trebuchet MS" pitchFamily="34" charset="-120"/>
               </a:rPr>
-              <a:t>flexion</a:t>
+              <a:t>reflexive</a:t>
             </a:r>
             <a:endParaRPr lang="en-US" sz="1200" dirty="0"/>
           </a:p>
@@ -38330,7 +38723,7 @@
                 <a:ea typeface="Calibri" pitchFamily="34" charset="-122"/>
                 <a:cs typeface="Calibri" pitchFamily="34" charset="-120"/>
               </a:rPr>
-              <a:t>1.  The root 'flex' comes from Latin and means to bend.</a:t>
+              <a:t>1.  A reflex action happens automatically without you having to think about it.</a:t>
             </a:r>
             <a:endParaRPr lang="en-US" sz="1300" dirty="0"/>
           </a:p>
@@ -38469,7 +38862,7 @@
                 <a:ea typeface="Calibri" pitchFamily="34" charset="-122"/>
                 <a:cs typeface="Calibri" pitchFamily="34" charset="-120"/>
               </a:rPr>
-              <a:t>2.  The word 'inflexible' means something that bends very easily.</a:t>
+              <a:t>2.  The root 'flex' comes from a Latin word meaning to bend.</a:t>
             </a:r>
             <a:endParaRPr lang="en-US" sz="1300" dirty="0"/>
           </a:p>
@@ -38492,11 +38885,11 @@
             </a:avLst>
           </a:prstGeom>
           <a:solidFill>
-            <a:srgbClr val="FEE2E2"/>
-          </a:solidFill>
-          <a:ln w="12700">
-            <a:solidFill>
-              <a:srgbClr val="DC2626"/>
+            <a:srgbClr val="DCFCE7"/>
+          </a:solidFill>
+          <a:ln w="12700">
+            <a:solidFill>
+              <a:srgbClr val="16A34A"/>
             </a:solidFill>
             <a:prstDash val="solid"/>
           </a:ln>
@@ -38529,13 +38922,13 @@
             <a:r>
               <a:rPr lang="en-US" sz="1100" b="1" dirty="0">
                 <a:solidFill>
-                  <a:srgbClr val="DC2626"/>
+                  <a:srgbClr val="16A34A"/>
                 </a:solidFill>
                 <a:latin typeface="Trebuchet MS" pitchFamily="34" charset="0"/>
                 <a:ea typeface="Trebuchet MS" pitchFamily="34" charset="-122"/>
                 <a:cs typeface="Trebuchet MS" pitchFamily="34" charset="-120"/>
               </a:rPr>
-              <a:t>FALSE</a:t>
+              <a:t>TRUE</a:t>
             </a:r>
             <a:endParaRPr lang="en-US" sz="1100" dirty="0"/>
           </a:p>
@@ -38608,7 +39001,7 @@
                 <a:ea typeface="Calibri" pitchFamily="34" charset="-122"/>
                 <a:cs typeface="Calibri" pitchFamily="34" charset="-120"/>
               </a:rPr>
-              <a:t>3.  A reflex action is something your body does automatically without thinking.</a:t>
+              <a:t>3.  The root 'flex' originally came from the Greek word for movement.</a:t>
             </a:r>
             <a:endParaRPr lang="en-US" sz="1300" dirty="0"/>
           </a:p>
@@ -38631,11 +39024,11 @@
             </a:avLst>
           </a:prstGeom>
           <a:solidFill>
-            <a:srgbClr val="DCFCE7"/>
-          </a:solidFill>
-          <a:ln w="12700">
-            <a:solidFill>
-              <a:srgbClr val="16A34A"/>
+            <a:srgbClr val="FEE2E2"/>
+          </a:solidFill>
+          <a:ln w="12700">
+            <a:solidFill>
+              <a:srgbClr val="DC2626"/>
             </a:solidFill>
             <a:prstDash val="solid"/>
           </a:ln>
@@ -38668,13 +39061,13 @@
             <a:r>
               <a:rPr lang="en-US" sz="1100" b="1" dirty="0">
                 <a:solidFill>
-                  <a:srgbClr val="16A34A"/>
+                  <a:srgbClr val="DC2626"/>
                 </a:solidFill>
                 <a:latin typeface="Trebuchet MS" pitchFamily="34" charset="0"/>
                 <a:ea typeface="Trebuchet MS" pitchFamily="34" charset="-122"/>
                 <a:cs typeface="Trebuchet MS" pitchFamily="34" charset="-120"/>
               </a:rPr>
-              <a:t>TRUE</a:t>
+              <a:t>FALSE</a:t>
             </a:r>
             <a:endParaRPr lang="en-US" sz="1100" dirty="0"/>
           </a:p>
@@ -38886,7 +39279,7 @@
                 <a:ea typeface="Calibri" pitchFamily="34" charset="-122"/>
                 <a:cs typeface="Calibri" pitchFamily="34" charset="-120"/>
               </a:rPr>
-              <a:t>5.  The root 'flex' originally came from ancient Greek.</a:t>
+              <a:t>5.  A person who is inflexible is very good at bending and changing their plans.</a:t>
             </a:r>
             <a:endParaRPr lang="en-US" sz="1300" dirty="0"/>
           </a:p>
@@ -39591,7 +39984,7 @@
                 <a:ea typeface="Trebuchet MS" pitchFamily="34" charset="-122"/>
                 <a:cs typeface="Trebuchet MS" pitchFamily="34" charset="-120"/>
               </a:rPr>
-              <a:t>flexible</a:t>
+              <a:t>reflex</a:t>
             </a:r>
             <a:endParaRPr lang="en-US" sz="1300" dirty="0"/>
           </a:p>
@@ -39657,7 +40050,7 @@
                 <a:ea typeface="Trebuchet MS" pitchFamily="34" charset="-122"/>
                 <a:cs typeface="Trebuchet MS" pitchFamily="34" charset="-120"/>
               </a:rPr>
-              <a:t>inflexible</a:t>
+              <a:t>flexible</a:t>
             </a:r>
             <a:endParaRPr lang="en-US" sz="1300" dirty="0"/>
           </a:p>
@@ -39723,7 +40116,7 @@
                 <a:ea typeface="Trebuchet MS" pitchFamily="34" charset="-122"/>
                 <a:cs typeface="Trebuchet MS" pitchFamily="34" charset="-120"/>
               </a:rPr>
-              <a:t>reflex</a:t>
+              <a:t>inflexible</a:t>
             </a:r>
             <a:endParaRPr lang="en-US" sz="1300" dirty="0"/>
           </a:p>
@@ -39789,7 +40182,7 @@
                 <a:ea typeface="Trebuchet MS" pitchFamily="34" charset="-122"/>
                 <a:cs typeface="Trebuchet MS" pitchFamily="34" charset="-120"/>
               </a:rPr>
-              <a:t>reflection</a:t>
+              <a:t>flexibility</a:t>
             </a:r>
             <a:endParaRPr lang="en-US" sz="1300" dirty="0"/>
           </a:p>
@@ -39921,7 +40314,7 @@
                 <a:ea typeface="Trebuchet MS" pitchFamily="34" charset="-122"/>
                 <a:cs typeface="Trebuchet MS" pitchFamily="34" charset="-120"/>
               </a:rPr>
-              <a:t>flexion</a:t>
+              <a:t>reflexive</a:t>
             </a:r>
             <a:endParaRPr lang="en-US" sz="1300" dirty="0"/>
           </a:p>
@@ -40642,7 +41035,7 @@
                 <a:ea typeface="Trebuchet MS" pitchFamily="34" charset="-122"/>
                 <a:cs typeface="Trebuchet MS" pitchFamily="34" charset="-120"/>
               </a:rPr>
-              <a:t>-ible</a:t>
+              <a:t>-ion</a:t>
             </a:r>
             <a:endParaRPr lang="en-US" sz="1300" dirty="0"/>
           </a:p>
@@ -40795,7 +41188,7 @@
                 <a:ea typeface="Trebuchet MS" pitchFamily="34" charset="-122"/>
                 <a:cs typeface="Trebuchet MS" pitchFamily="34" charset="-120"/>
               </a:rPr>
-              <a:t>-ion</a:t>
+              <a:t>-ible</a:t>
             </a:r>
             <a:endParaRPr lang="en-US" sz="1300" dirty="0"/>
           </a:p>
@@ -40948,7 +41341,7 @@
                 <a:ea typeface="Trebuchet MS" pitchFamily="34" charset="-122"/>
                 <a:cs typeface="Trebuchet MS" pitchFamily="34" charset="-120"/>
               </a:rPr>
-              <a:t>-ive</a:t>
+              <a:t>-ibility</a:t>
             </a:r>
             <a:endParaRPr lang="en-US" sz="1300" dirty="0"/>
           </a:p>
@@ -41532,7 +41925,7 @@
         <p:spPr>
           <a:xfrm>
             <a:off x="4325112" y="4178808"/>
-            <a:ext cx="1097280" cy="420624"/>
+            <a:ext cx="950976" cy="420624"/>
           </a:xfrm>
           <a:prstGeom prst="rect">
             <a:avLst>
@@ -41566,7 +41959,7 @@
         <p:spPr>
           <a:xfrm>
             <a:off x="4325112" y="4178808"/>
-            <a:ext cx="1097280" cy="420624"/>
+            <a:ext cx="950976" cy="420624"/>
           </a:xfrm>
           <a:prstGeom prst="rect">
             <a:avLst/>
@@ -41590,7 +41983,7 @@
                 <a:ea typeface="Trebuchet MS" pitchFamily="34" charset="-122"/>
                 <a:cs typeface="Trebuchet MS" pitchFamily="34" charset="-120"/>
               </a:rPr>
-              <a:t>-ible</a:t>
+              <a:t>-ion</a:t>
             </a:r>
             <a:endParaRPr lang="en-US" sz="1300" dirty="0"/>
           </a:p>
@@ -41604,7 +41997,7 @@
         </p:nvSpPr>
         <p:spPr>
           <a:xfrm>
-            <a:off x="5495544" y="4178808"/>
+            <a:off x="5349240" y="4178808"/>
             <a:ext cx="365760" cy="420624"/>
           </a:xfrm>
           <a:prstGeom prst="rect">
@@ -41643,7 +42036,7 @@
         </p:nvSpPr>
         <p:spPr>
           <a:xfrm>
-            <a:off x="5907024" y="4178808"/>
+            <a:off x="5760720" y="4178808"/>
             <a:ext cx="2194560" cy="420624"/>
           </a:xfrm>
           <a:prstGeom prst="rect">
@@ -41670,7 +42063,7 @@
         </p:nvSpPr>
         <p:spPr>
           <a:xfrm>
-            <a:off x="5907024" y="4178808"/>
+            <a:off x="5760720" y="4178808"/>
             <a:ext cx="2194560" cy="420624"/>
           </a:xfrm>
           <a:prstGeom prst="rect">
@@ -42165,7 +42558,7 @@
                 <a:ea typeface="Calibri" pitchFamily="34" charset="-122"/>
                 <a:cs typeface="Calibri" pitchFamily="34" charset="-120"/>
               </a:rPr>
-              <a:t>To bend a part of your body, like curling your arm to show your muscles.</a:t>
+              <a:t>To bend or move a part of your body, like when you curl your arm to show your muscles.</a:t>
             </a:r>
             <a:endParaRPr lang="en-US" sz="1200" dirty="0"/>
           </a:p>
@@ -42238,7 +42631,7 @@
                 <a:ea typeface="Trebuchet MS" pitchFamily="34" charset="-122"/>
                 <a:cs typeface="Trebuchet MS" pitchFamily="34" charset="-120"/>
               </a:rPr>
-              <a:t>flexible</a:t>
+              <a:t>reflex</a:t>
             </a:r>
             <a:endParaRPr lang="en-US" sz="1200" dirty="0"/>
           </a:p>
@@ -42304,7 +42697,7 @@
                 <a:ea typeface="Calibri" pitchFamily="34" charset="-122"/>
                 <a:cs typeface="Calibri" pitchFamily="34" charset="-120"/>
               </a:rPr>
-              <a:t>A quick, automatic reaction your body makes without you thinking about it, like blinking.</a:t>
+              <a:t>Not able to bend easily, or someone who refuses to change their mind or plans.</a:t>
             </a:r>
             <a:endParaRPr lang="en-US" sz="1200" dirty="0"/>
           </a:p>
@@ -42377,7 +42770,7 @@
                 <a:ea typeface="Trebuchet MS" pitchFamily="34" charset="-122"/>
                 <a:cs typeface="Trebuchet MS" pitchFamily="34" charset="-120"/>
               </a:rPr>
-              <a:t>inflexible</a:t>
+              <a:t>flexible</a:t>
             </a:r>
             <a:endParaRPr lang="en-US" sz="1200" dirty="0"/>
           </a:p>
@@ -42443,7 +42836,7 @@
                 <a:ea typeface="Calibri" pitchFamily="34" charset="-122"/>
                 <a:cs typeface="Calibri" pitchFamily="34" charset="-120"/>
               </a:rPr>
-              <a:t>Not able to bend or change; stiff and rigid, like a metal rod.</a:t>
+              <a:t>Able to bend easily without breaking, or able to change plans without trouble.</a:t>
             </a:r>
             <a:endParaRPr lang="en-US" sz="1200" dirty="0"/>
           </a:p>
@@ -42516,7 +42909,7 @@
                 <a:ea typeface="Trebuchet MS" pitchFamily="34" charset="-122"/>
                 <a:cs typeface="Trebuchet MS" pitchFamily="34" charset="-120"/>
               </a:rPr>
-              <a:t>reflex</a:t>
+              <a:t>inflexible</a:t>
             </a:r>
             <a:endParaRPr lang="en-US" sz="1200" dirty="0"/>
           </a:p>
@@ -42582,7 +42975,7 @@
                 <a:ea typeface="Calibri" pitchFamily="34" charset="-122"/>
                 <a:cs typeface="Calibri" pitchFamily="34" charset="-120"/>
               </a:rPr>
-              <a:t>The image you see when light bounces off a mirror or still water.</a:t>
+              <a:t>The ability to bend or stretch easily, or the ability to change and adapt when needed.</a:t>
             </a:r>
             <a:endParaRPr lang="en-US" sz="1200" dirty="0"/>
           </a:p>
@@ -42655,7 +43048,7 @@
                 <a:ea typeface="Trebuchet MS" pitchFamily="34" charset="-122"/>
                 <a:cs typeface="Trebuchet MS" pitchFamily="34" charset="-120"/>
               </a:rPr>
-              <a:t>reflection</a:t>
+              <a:t>flexibility</a:t>
             </a:r>
             <a:endParaRPr lang="en-US" sz="1200" dirty="0"/>
           </a:p>
@@ -42721,7 +43114,7 @@
                 <a:ea typeface="Calibri" pitchFamily="34" charset="-122"/>
                 <a:cs typeface="Calibri" pitchFamily="34" charset="-120"/>
               </a:rPr>
-              <a:t>The act of bending a joint in your body, like bending your knee.</a:t>
+              <a:t>Happening automatically without thinking, like a reflex action, or in grammar, when the subject and object are the same person.</a:t>
             </a:r>
             <a:endParaRPr lang="en-US" sz="1200" dirty="0"/>
           </a:p>
@@ -42860,7 +43253,7 @@
                 <a:ea typeface="Calibri" pitchFamily="34" charset="-122"/>
                 <a:cs typeface="Calibri" pitchFamily="34" charset="-120"/>
               </a:rPr>
-              <a:t>To make something change direction by hitting or pushing it away, like a goalkeeper deflecting a ball.</a:t>
+              <a:t>To make something change direction by hitting or touching it, like a goalkeeper deflecting a ball.</a:t>
             </a:r>
             <a:endParaRPr lang="en-US" sz="1200" dirty="0"/>
           </a:p>
@@ -42933,7 +43326,7 @@
                 <a:ea typeface="Trebuchet MS" pitchFamily="34" charset="-122"/>
                 <a:cs typeface="Trebuchet MS" pitchFamily="34" charset="-120"/>
               </a:rPr>
-              <a:t>flexion</a:t>
+              <a:t>reflexive</a:t>
             </a:r>
             <a:endParaRPr lang="en-US" sz="1200" dirty="0"/>
           </a:p>
@@ -42999,7 +43392,7 @@
                 <a:ea typeface="Calibri" pitchFamily="34" charset="-122"/>
                 <a:cs typeface="Calibri" pitchFamily="34" charset="-120"/>
               </a:rPr>
-              <a:t>Able to bend easily without breaking, like a rubber band or a gymnast.</a:t>
+              <a:t>A fast, automatic movement your body makes without you thinking about it, like blinking when something comes near your eye.</a:t>
             </a:r>
             <a:endParaRPr lang="en-US" sz="1200" dirty="0"/>
           </a:p>
@@ -43494,7 +43887,7 @@
                 <a:ea typeface="Calibri" pitchFamily="34" charset="-122"/>
                 <a:cs typeface="Calibri" pitchFamily="34" charset="-120"/>
               </a:rPr>
-              <a:t>A gymnast needs to be very flexible to perform those amazing backbends and splits.</a:t>
+              <a:t>The gymnast showed amazing flexibility as she bent her body into incredible shapes.</a:t>
             </a:r>
             <a:endParaRPr lang="en-US" sz="1500" dirty="0"/>
           </a:p>
@@ -43658,7 +44051,7 @@
                 <a:ea typeface="Calibri" pitchFamily="34" charset="-122"/>
                 <a:cs typeface="Calibri" pitchFamily="34" charset="-120"/>
               </a:rPr>
-              <a:t>When the doctor tapped below my knee, my leg kicked out as a reflex action.</a:t>
+              <a:t>When the doctor tapped below Marcus's knee, his leg kicked out in an automatic reflex action.</a:t>
             </a:r>
             <a:endParaRPr lang="en-US" sz="1500" dirty="0"/>
           </a:p>
@@ -43822,7 +44215,7 @@
                 <a:ea typeface="Calibri" pitchFamily="34" charset="-122"/>
                 <a:cs typeface="Calibri" pitchFamily="34" charset="-120"/>
               </a:rPr>
-              <a:t>The goalkeeper managed to deflect the ball away from the goal at the last second.</a:t>
+              <a:t>Our teacher said we needed to be flexible about the excursion date because the weather might change.</a:t>
             </a:r>
             <a:endParaRPr lang="en-US" sz="1500" dirty="0"/>
           </a:p>
